--- a/docs/presentation.pptx
+++ b/docs/presentation.pptx
@@ -2,18 +2,20 @@
 <file path=ppt/presentation.xml><?xml version="1.0" encoding="utf-8"?>
 <p:presentation xmlns:p="http://schemas.openxmlformats.org/presentationml/2006/main">
   <p:sldMasterIdLst>
-    <p:sldMasterId xmlns:r="http://schemas.openxmlformats.org/officeDocument/2006/relationships" id="2147483648" r:id="R8fe86474c02c4d5b"/>
+    <p:sldMasterId xmlns:r="http://schemas.openxmlformats.org/officeDocument/2006/relationships" id="2147483648" r:id="Rfa223153d9a844c6"/>
   </p:sldMasterIdLst>
   <p:notesMasterIdLst>
-    <p:notesMasterId xmlns:r="http://schemas.openxmlformats.org/officeDocument/2006/relationships" r:id="R1f325b72d1eb4a6c"/>
+    <p:notesMasterId xmlns:r="http://schemas.openxmlformats.org/officeDocument/2006/relationships" r:id="Rad3d12afeee94099"/>
   </p:notesMasterIdLst>
   <p:sldIdLst>
-    <p:sldId xmlns:r="http://schemas.openxmlformats.org/officeDocument/2006/relationships" id="256" r:id="R0a44f8fe77f349de"/>
-    <p:sldId xmlns:r="http://schemas.openxmlformats.org/officeDocument/2006/relationships" id="257" r:id="R6b665f0e74d441c3"/>
-    <p:sldId xmlns:r="http://schemas.openxmlformats.org/officeDocument/2006/relationships" id="258" r:id="Raafe568c129741ca"/>
-    <p:sldId xmlns:r="http://schemas.openxmlformats.org/officeDocument/2006/relationships" id="259" r:id="R687a5871175e4cf8"/>
-    <p:sldId xmlns:r="http://schemas.openxmlformats.org/officeDocument/2006/relationships" id="260" r:id="Rf590d7e794e1487b"/>
-    <p:sldId xmlns:r="http://schemas.openxmlformats.org/officeDocument/2006/relationships" id="261" r:id="R048235fa7adb477f"/>
+    <p:sldId xmlns:r="http://schemas.openxmlformats.org/officeDocument/2006/relationships" id="256" r:id="R22173467197a40a8"/>
+    <p:sldId xmlns:r="http://schemas.openxmlformats.org/officeDocument/2006/relationships" id="257" r:id="Rae42869be28f40fb"/>
+    <p:sldId xmlns:r="http://schemas.openxmlformats.org/officeDocument/2006/relationships" id="258" r:id="Rf483896c4c964dbb"/>
+    <p:sldId xmlns:r="http://schemas.openxmlformats.org/officeDocument/2006/relationships" id="259" r:id="Rdc1d59cfbcd34f52"/>
+    <p:sldId xmlns:r="http://schemas.openxmlformats.org/officeDocument/2006/relationships" id="260" r:id="R67dd343d60ed478f"/>
+    <p:sldId xmlns:r="http://schemas.openxmlformats.org/officeDocument/2006/relationships" id="261" r:id="Re5023b5689e145ce"/>
+    <p:sldId xmlns:r="http://schemas.openxmlformats.org/officeDocument/2006/relationships" id="262" r:id="Rf134a8dc9bd444b9"/>
+    <p:sldId xmlns:r="http://schemas.openxmlformats.org/officeDocument/2006/relationships" id="263" r:id="Rf412e12575764d79"/>
   </p:sldIdLst>
   <p:sldSz cx="12192000" cy="6858000"/>
   <p:notesSz cx="6858000" cy="9144000"/>
@@ -447,7 +449,7 @@
           <a:lstStyle xmlns:a="http://schemas.openxmlformats.org/drawingml/2006/main"/>
           <a:p xmlns:a="http://schemas.openxmlformats.org/drawingml/2006/main">
             <a:r>
-              <a:t>Илья, около 35 секунд. Мы разрабатываем платформу, где преподаватели публикуют бесплатные учебные курсы, а студенты проходят уроки и тесты с сохранением прогресса. Один пользователь может учиться на чужих курсах и, получив права преподавателя, создавать свои. В учебный MVP входят каталог, уроки, квизы, личный кабинет и обязательное администрирование. Платежи, чат и сертификаты в первый выпуск не входят.</a:t>
+              <a:t>Илья, около 25 секунд. Мы разрабатываем платформу бесплатных онлайн-курсов. Преподаватель создаёт программу из уроков и тестов, а студент проходит её и видит сохранённый прогресс. В MVP входят каталог, обучение, квизы, личный кабинет и обязательное администрирование. Платежи и сертификаты оставляем за рамками первого выпуска.</a:t>
             </a:r>
           </a:p>
         </p:txBody>
@@ -517,7 +519,7 @@
           <a:lstStyle xmlns:a="http://schemas.openxmlformats.org/drawingml/2006/main"/>
           <a:p xmlns:a="http://schemas.openxmlformats.org/drawingml/2006/main">
             <a:r>
-              <a:t>Илья, около 35 секунд. В команде три человека. Константин Барановский отвечает за разработку интерфейса, API и базы данных. Станислав Борцевич составляет проверки, регистрирует дефекты и проверяет исправления. Я, Илья Момотюк, веду требования, планирование, Trello и подготовку к приёмке. Каждая функциональная задача связана с отдельной проверкой. Например, личный кабинет разрабатывает Константин, проверяет Станислав, а критерии и приёмку ведёт Илья. Это должности команды, отдельно от ролей пользователей платформы.</a:t>
+              <a:t>Илья, около 30 секунд. В команде три человека. Константин отвечает за интерфейс, API, базу данных и исправление ошибок. Станислав составляет тестовые сценарии, проводит проверки и оформляет дефекты. Я веду требования, сроки и Trello, организую согласование результата. У каждой функции есть задача разработки и связанная проверка. Например, кабинет разрабатывает Константин, проверяет Станислав, а критерии приёмки ведёт Илья.</a:t>
             </a:r>
           </a:p>
         </p:txBody>
@@ -587,7 +589,7 @@
           <a:lstStyle xmlns:a="http://schemas.openxmlformats.org/drawingml/2006/main"/>
           <a:p xmlns:a="http://schemas.openxmlformats.org/drawingml/2006/main">
             <a:r>
-              <a:t>Станислав, около 45 секунд. По замечаниям преподавателя мы убрали развилки, которые мешали тестированию. Администратор обязателен, подтверждение email тоже. При регистрации все получают базовые права студента, преподавательские права выдаются по заявке. Для курса определены статусы и доступ студентов после снятия с публикации или архивации. Урок завершается кнопкой, поэтому не нужно спорить, что считать концом текста или видео. Для квиза выбраны три попытки по двадцать минут и порог семьдесят процентов. Прогресс после отписки сохраняется. Также заданы лимиты файлов и конкретная нагрузка для испытаний.</a:t>
+              <a:t>Илья, около 40 секунд. За прошедшую неделю мы создали доску Trello и перенесли туда задачи по основным модулям: регистрации, каталогу, курсам, обучению, тестам и кабинетам. Исходное ТЗ уже существовало раньше, поэтому мы использовали его как основу бэклога. Пример макета Figma помогал обсуждать внешний вид главной страницы. К концу этапа у нас были документ, ориентир интерфейса и список задач. Однако доску заполнили быстро: оценки и критерии готовности системно не вели, реализация модулей не была подтверждена.</a:t>
             </a:r>
           </a:p>
         </p:txBody>
@@ -657,7 +659,7 @@
           <a:lstStyle xmlns:a="http://schemas.openxmlformats.org/drawingml/2006/main"/>
           <a:p xmlns:a="http://schemas.openxmlformats.org/drawingml/2006/main">
             <a:r>
-              <a:t>Константин, около 45 секунд. Изначально у нас были ТЗ, макет в Figma и быстро заполненная доска. Подтверждённой реализации по модулям на прошедшем этапе не было. Сейчас подготовлены уточнённые требования, связанный план разработки и проверок, а также HTML-прототип главной страницы. В прототипе есть поиск, фильтры, описание курса и демонстрационное прохождение текстовых уроков с локальным прогрессом. Настоящих регистрации, API, базы данных и серверной проверки тестов пока нет. Справа исходный ориентир из Figma, это не снимок работающей системы. Источник изображения: макет, приложенный командой.</a:t>
+              <a:t>Станислав, около 40 секунд. По замечаниям преподавателя мы уточнили правила, от которых зависит тестирование. Администратор и подтверждение email обязательны. Права преподавателя выдаются по заявке. Для курса определены статусы и доступ студентов после снятия с публикации, архивации и удаления. Урок завершается кнопкой. Для квиза выбраны три попытки по двадцать минут и порог семьдесят процентов. Отписка сохраняет историю. Добавлены лимиты файлов и измеримые требования к нагрузке. Это текущая редакция документа, которую ещё нужно согласовать.</a:t>
             </a:r>
           </a:p>
         </p:txBody>
@@ -727,7 +729,7 @@
           <a:lstStyle xmlns:a="http://schemas.openxmlformats.org/drawingml/2006/main"/>
           <a:p xmlns:a="http://schemas.openxmlformats.org/drawingml/2006/main">
             <a:r>
-              <a:t>Илья, около 45 секунд. На неделю с двадцать четвёртого по тридцатое октября предлагаем пять результатов: ТЗ — три story points, организация Trello — два, HTML-прототип — три, его проверка — два и презентация — один. Всего одиннадцать SP на команду. Мы оцениваем относительную сложность, а не часы. До одной-двух итераций у команды нет измеренной скорости, поэтому это первая оценка. Документ и код уже подготовлены к проверке, но мы не считаем их принятыми. Для каждой задачи есть ответственный и срок. Завершение недели оценим по принятым результатам и фактическим проверкам.</a:t>
+              <a:t>Константин, около 35 секунд. Сейчас мы на этапах уточнения требований, проектирования и начала реализации. ТЗ второй редакции подготовлено. Есть первый HTML-прототип и сценарии его проверки. В GitHub опубликованы исходники и документы, изменения разделены на коммиты по этапам. В Trello на всех сорока шести карточках назначены ответственные и связаны разработка с проверками. При этом настоящие регистрация, API, база данных и серверные квизы ещё не реализованы. Справа исходный макет Figma, предоставленный командой, а не скриншот работающей системы.</a:t>
             </a:r>
           </a:p>
         </p:txBody>
@@ -797,7 +799,147 @@
           <a:lstStyle xmlns:a="http://schemas.openxmlformats.org/drawingml/2006/main"/>
           <a:p xmlns:a="http://schemas.openxmlformats.org/drawingml/2006/main">
             <a:r>
-              <a:t>Станислав, около 40 секунд. На вопрос, уложились ли мы в прошлую неделю, честный ответ: подтвердить выполнение разработки нельзя. Карточки были подготовлены быстро, а исходные оценки и фактическое время не велись. Сейчас мы исправили план и подготовили проверяемый прототип. Мне нужно пройти сценарии на компьютере и телефоне, проверить фильтры, сохранение прогресса и повторную запись. Браузерный прогон в среде подготовки не состоялся, поэтому статус проверки остаётся открытым. После совместного ревью мы принимаем результат, затем переходим к модели данных и аутентификации. В дальнейшем в готово переносим только результат с кодом и свидетельством проверки.</a:t>
+              <a:t>Илья, около 35 секунд. Новый план охватывает неделю с двадцать четвёртого по тридцатое октября. На ТЗ заложили три story points, на организацию Trello два, на HTML-прототип три, на его проверку два и на презентацию один. Всего одиннадцать SP на команду. Для каждой задачи есть ответственный и срок. Часть артефактов уже подготовлена, но готовность задачи подтверждаем после проверки и приёмки. Эти оценки относятся к новому плану, а не задним числом к прошедшей неделе.</a:t>
+            </a:r>
+          </a:p>
+        </p:txBody>
+      </p:sp>
+      <p:sp>
+        <p:nvSpPr>
+          <p:cNvPr id="4" name="Slide Number Placeholder 3"/>
+          <p:cNvSpPr>
+            <a:spLocks xmlns:a="http://schemas.openxmlformats.org/drawingml/2006/main" noGrp="1"/>
+          </p:cNvSpPr>
+          <p:nvPr>
+            <p:ph type="sldNum" idx="5"/>
+          </p:nvPr>
+        </p:nvSpPr>
+        <p:spPr/>
+        <p:txBody>
+          <a:bodyPr xmlns:a="http://schemas.openxmlformats.org/drawingml/2006/main"/>
+          <a:lstStyle xmlns:a="http://schemas.openxmlformats.org/drawingml/2006/main"/>
+          <a:p xmlns:a="http://schemas.openxmlformats.org/drawingml/2006/main"/>
+        </p:txBody>
+      </p:sp>
+    </p:spTree>
+  </p:cSld>
+  <p:clrMapOvr>
+    <a:masterClrMapping xmlns:a="http://schemas.openxmlformats.org/drawingml/2006/main"/>
+  </p:clrMapOvr>
+</p:notes>
+</file>
+
+<file path=ppt/notesSlides/notesSlide7.xml><?xml version="1.0" encoding="utf-8"?>
+<p:notes xmlns:p="http://schemas.openxmlformats.org/presentationml/2006/main">
+  <p:cSld>
+    <p:spTree>
+      <p:nvGrpSpPr>
+        <p:cNvPr id="1" name=""/>
+        <p:cNvGrpSpPr/>
+        <p:nvPr/>
+      </p:nvGrpSpPr>
+      <p:grpSpPr>
+        <a:xfrm xmlns:a="http://schemas.openxmlformats.org/drawingml/2006/main"/>
+      </p:grpSpPr>
+      <p:sp>
+        <p:nvSpPr>
+          <p:cNvPr id="2" name="Slide Image Placeholder 1"/>
+          <p:cNvSpPr>
+            <a:spLocks xmlns:a="http://schemas.openxmlformats.org/drawingml/2006/main" noGrp="1"/>
+          </p:cNvSpPr>
+          <p:nvPr>
+            <p:ph type="sldImg" idx="0"/>
+          </p:nvPr>
+        </p:nvSpPr>
+        <p:spPr/>
+      </p:sp>
+      <p:sp>
+        <p:nvSpPr>
+          <p:cNvPr id="3" name="Notes Placeholder 2"/>
+          <p:cNvSpPr>
+            <a:spLocks xmlns:a="http://schemas.openxmlformats.org/drawingml/2006/main" noGrp="1"/>
+          </p:cNvSpPr>
+          <p:nvPr>
+            <p:ph type="body" idx="1"/>
+          </p:nvPr>
+        </p:nvSpPr>
+        <p:spPr/>
+        <p:txBody>
+          <a:bodyPr xmlns:a="http://schemas.openxmlformats.org/drawingml/2006/main"/>
+          <a:lstStyle xmlns:a="http://schemas.openxmlformats.org/drawingml/2006/main"/>
+          <a:p xmlns:a="http://schemas.openxmlformats.org/drawingml/2006/main">
+            <a:r>
+              <a:t>Илья, около 35 секунд. Оценку делаем в story points по относительной сложности. Учитываем объём задачи, зависимости и неопределённость. Story points не переводим напрямую в часы. На вопрос о прошедшей неделе отвечаем так: организационную основу подготовили, а реализацию не завершили. Первоначальные оценки и фактическую длительность не зафиксировали, поэтому достоверно посчитать выполнение плана в SP нельзя. На новой неделе будем отдельно фиксировать принятые результаты, переносы и причины задержек.</a:t>
+            </a:r>
+          </a:p>
+        </p:txBody>
+      </p:sp>
+      <p:sp>
+        <p:nvSpPr>
+          <p:cNvPr id="4" name="Slide Number Placeholder 3"/>
+          <p:cNvSpPr>
+            <a:spLocks xmlns:a="http://schemas.openxmlformats.org/drawingml/2006/main" noGrp="1"/>
+          </p:cNvSpPr>
+          <p:nvPr>
+            <p:ph type="sldNum" idx="5"/>
+          </p:nvPr>
+        </p:nvSpPr>
+        <p:spPr/>
+        <p:txBody>
+          <a:bodyPr xmlns:a="http://schemas.openxmlformats.org/drawingml/2006/main"/>
+          <a:lstStyle xmlns:a="http://schemas.openxmlformats.org/drawingml/2006/main"/>
+          <a:p xmlns:a="http://schemas.openxmlformats.org/drawingml/2006/main"/>
+        </p:txBody>
+      </p:sp>
+    </p:spTree>
+  </p:cSld>
+  <p:clrMapOvr>
+    <a:masterClrMapping xmlns:a="http://schemas.openxmlformats.org/drawingml/2006/main"/>
+  </p:clrMapOvr>
+</p:notes>
+</file>
+
+<file path=ppt/notesSlides/notesSlide8.xml><?xml version="1.0" encoding="utf-8"?>
+<p:notes xmlns:p="http://schemas.openxmlformats.org/presentationml/2006/main">
+  <p:cSld>
+    <p:spTree>
+      <p:nvGrpSpPr>
+        <p:cNvPr id="1" name=""/>
+        <p:cNvGrpSpPr/>
+        <p:nvPr/>
+      </p:nvGrpSpPr>
+      <p:grpSpPr>
+        <a:xfrm xmlns:a="http://schemas.openxmlformats.org/drawingml/2006/main"/>
+      </p:grpSpPr>
+      <p:sp>
+        <p:nvSpPr>
+          <p:cNvPr id="2" name="Slide Image Placeholder 1"/>
+          <p:cNvSpPr>
+            <a:spLocks xmlns:a="http://schemas.openxmlformats.org/drawingml/2006/main" noGrp="1"/>
+          </p:cNvSpPr>
+          <p:nvPr>
+            <p:ph type="sldImg" idx="0"/>
+          </p:nvPr>
+        </p:nvSpPr>
+        <p:spPr/>
+      </p:sp>
+      <p:sp>
+        <p:nvSpPr>
+          <p:cNvPr id="3" name="Notes Placeholder 2"/>
+          <p:cNvSpPr>
+            <a:spLocks xmlns:a="http://schemas.openxmlformats.org/drawingml/2006/main" noGrp="1"/>
+          </p:cNvSpPr>
+          <p:nvPr>
+            <p:ph type="body" idx="1"/>
+          </p:nvPr>
+        </p:nvSpPr>
+        <p:spPr/>
+        <p:txBody>
+          <a:bodyPr xmlns:a="http://schemas.openxmlformats.org/drawingml/2006/main"/>
+          <a:lstStyle xmlns:a="http://schemas.openxmlformats.org/drawingml/2006/main"/>
+          <a:p xmlns:a="http://schemas.openxmlformats.org/drawingml/2006/main">
+            <a:r>
+              <a:t>Станислав, около 30 секунд. Текущий результат можно показать: уточнённое ТЗ, HTML-прототип, историю GitHub и доску с ответственными. Мне предстоит проверить поиск, фильтры, последовательность уроков, сохранение прогресса и повторную запись, а также поведение на телефоне. Подготовлены восемнадцать сценариев, но браузерный прогон ещё не выполнен. После проверки команда согласует ТЗ, примет прототип и перейдёт к схеме данных и аутентификации.</a:t>
             </a:r>
           </a:p>
         </p:txBody>
@@ -3240,12 +3382,12 @@
   </p:cSld>
   <p:clrMap bg1="lt1" tx1="dk1" bg2="lt2" tx2="dk2" accent1="accent1" accent2="accent2" accent3="accent3" accent4="accent4" accent5="accent5" accent6="accent6" hlink="hlink" folHlink="folHlink"/>
   <p:sldLayoutIdLst>
-    <p:sldLayoutId xmlns:r="http://schemas.openxmlformats.org/officeDocument/2006/relationships" id="2147483649" r:id="R6010e68871fa4f00"/>
-    <p:sldLayoutId xmlns:r="http://schemas.openxmlformats.org/officeDocument/2006/relationships" id="2147483650" r:id="Ra4a80ed0470f4be7"/>
-    <p:sldLayoutId xmlns:r="http://schemas.openxmlformats.org/officeDocument/2006/relationships" id="2147483651" r:id="R54424864dc9143bd"/>
-    <p:sldLayoutId xmlns:r="http://schemas.openxmlformats.org/officeDocument/2006/relationships" id="2147483652" r:id="R65a26518b0a0463f"/>
-    <p:sldLayoutId xmlns:r="http://schemas.openxmlformats.org/officeDocument/2006/relationships" id="2147483653" r:id="Rf662897b17dc4bd1"/>
-    <p:sldLayoutId xmlns:r="http://schemas.openxmlformats.org/officeDocument/2006/relationships" id="2147483654" r:id="R731625add41b42de"/>
+    <p:sldLayoutId xmlns:r="http://schemas.openxmlformats.org/officeDocument/2006/relationships" id="2147483649" r:id="Rdcc54b0d2d1e4a2b"/>
+    <p:sldLayoutId xmlns:r="http://schemas.openxmlformats.org/officeDocument/2006/relationships" id="2147483650" r:id="R14b3fbc4ba204a6f"/>
+    <p:sldLayoutId xmlns:r="http://schemas.openxmlformats.org/officeDocument/2006/relationships" id="2147483651" r:id="R6c6a1769c7344e4b"/>
+    <p:sldLayoutId xmlns:r="http://schemas.openxmlformats.org/officeDocument/2006/relationships" id="2147483652" r:id="Rc62e6833bcf54121"/>
+    <p:sldLayoutId xmlns:r="http://schemas.openxmlformats.org/officeDocument/2006/relationships" id="2147483653" r:id="Reba0d9303f5b4bd4"/>
+    <p:sldLayoutId xmlns:r="http://schemas.openxmlformats.org/officeDocument/2006/relationships" id="2147483654" r:id="R1db6b410c72147a1"/>
   </p:sldLayoutIdLst>
   <p:txStyles>
     <p:titleStyle>
@@ -3833,6 +3975,7 @@
               </a:defRPr>
             </a:defPPr>
             <a:lvl1pPr>
+              <a:buNone/>
               <a:defRPr sz="1125" b="1">
                 <a:solidFill>
                   <a:srgbClr val="6145E6"/>
@@ -3843,6 +3986,7 @@
               </a:defRPr>
             </a:lvl1pPr>
             <a:lvl2pPr>
+              <a:buNone/>
               <a:defRPr sz="1125" b="1">
                 <a:solidFill>
                   <a:srgbClr val="6145E6"/>
@@ -3853,6 +3997,7 @@
               </a:defRPr>
             </a:lvl2pPr>
             <a:lvl3pPr>
+              <a:buNone/>
               <a:defRPr sz="1125" b="1">
                 <a:solidFill>
                   <a:srgbClr val="6145E6"/>
@@ -3863,6 +4008,7 @@
               </a:defRPr>
             </a:lvl3pPr>
             <a:lvl4pPr>
+              <a:buNone/>
               <a:defRPr sz="1125" b="1">
                 <a:solidFill>
                   <a:srgbClr val="6145E6"/>
@@ -3873,6 +4019,7 @@
               </a:defRPr>
             </a:lvl4pPr>
             <a:lvl5pPr>
+              <a:buNone/>
               <a:defRPr sz="1125" b="1">
                 <a:solidFill>
                   <a:srgbClr val="6145E6"/>
@@ -3883,6 +4030,7 @@
               </a:defRPr>
             </a:lvl5pPr>
             <a:lvl6pPr>
+              <a:buNone/>
               <a:defRPr sz="1125" b="1">
                 <a:solidFill>
                   <a:srgbClr val="6145E6"/>
@@ -3893,6 +4041,7 @@
               </a:defRPr>
             </a:lvl6pPr>
             <a:lvl7pPr>
+              <a:buNone/>
               <a:defRPr sz="1125" b="1">
                 <a:solidFill>
                   <a:srgbClr val="6145E6"/>
@@ -3903,6 +4052,7 @@
               </a:defRPr>
             </a:lvl7pPr>
             <a:lvl8pPr>
+              <a:buNone/>
               <a:defRPr sz="1125" b="1">
                 <a:solidFill>
                   <a:srgbClr val="6145E6"/>
@@ -3913,6 +4063,7 @@
               </a:defRPr>
             </a:lvl8pPr>
             <a:lvl9pPr>
+              <a:buNone/>
               <a:defRPr sz="1125" b="1">
                 <a:solidFill>
                   <a:srgbClr val="6145E6"/>
@@ -3925,6 +4076,7 @@
           </a:lstStyle>
           <a:p xmlns:a="http://schemas.openxmlformats.org/drawingml/2006/main">
             <a:pPr>
+              <a:buNone/>
               <a:defRPr sz="1125" b="1">
                 <a:solidFill>
                   <a:srgbClr val="6145E6"/>
@@ -3990,6 +4142,7 @@
               </a:defRPr>
             </a:defPPr>
             <a:lvl1pPr>
+              <a:buNone/>
               <a:defRPr sz="3600" b="1">
                 <a:solidFill>
                   <a:srgbClr val="252638"/>
@@ -4000,6 +4153,7 @@
               </a:defRPr>
             </a:lvl1pPr>
             <a:lvl2pPr>
+              <a:buNone/>
               <a:defRPr sz="3600" b="1">
                 <a:solidFill>
                   <a:srgbClr val="252638"/>
@@ -4010,6 +4164,7 @@
               </a:defRPr>
             </a:lvl2pPr>
             <a:lvl3pPr>
+              <a:buNone/>
               <a:defRPr sz="3600" b="1">
                 <a:solidFill>
                   <a:srgbClr val="252638"/>
@@ -4020,6 +4175,7 @@
               </a:defRPr>
             </a:lvl3pPr>
             <a:lvl4pPr>
+              <a:buNone/>
               <a:defRPr sz="3600" b="1">
                 <a:solidFill>
                   <a:srgbClr val="252638"/>
@@ -4030,6 +4186,7 @@
               </a:defRPr>
             </a:lvl4pPr>
             <a:lvl5pPr>
+              <a:buNone/>
               <a:defRPr sz="3600" b="1">
                 <a:solidFill>
                   <a:srgbClr val="252638"/>
@@ -4040,6 +4197,7 @@
               </a:defRPr>
             </a:lvl5pPr>
             <a:lvl6pPr>
+              <a:buNone/>
               <a:defRPr sz="3600" b="1">
                 <a:solidFill>
                   <a:srgbClr val="252638"/>
@@ -4050,6 +4208,7 @@
               </a:defRPr>
             </a:lvl6pPr>
             <a:lvl7pPr>
+              <a:buNone/>
               <a:defRPr sz="3600" b="1">
                 <a:solidFill>
                   <a:srgbClr val="252638"/>
@@ -4060,6 +4219,7 @@
               </a:defRPr>
             </a:lvl7pPr>
             <a:lvl8pPr>
+              <a:buNone/>
               <a:defRPr sz="3600" b="1">
                 <a:solidFill>
                   <a:srgbClr val="252638"/>
@@ -4070,6 +4230,7 @@
               </a:defRPr>
             </a:lvl8pPr>
             <a:lvl9pPr>
+              <a:buNone/>
               <a:defRPr sz="3600" b="1">
                 <a:solidFill>
                   <a:srgbClr val="252638"/>
@@ -4082,6 +4243,7 @@
           </a:lstStyle>
           <a:p xmlns:a="http://schemas.openxmlformats.org/drawingml/2006/main">
             <a:pPr>
+              <a:buNone/>
               <a:defRPr sz="3600" b="1">
                 <a:solidFill>
                   <a:srgbClr val="252638"/>
@@ -4147,6 +4309,7 @@
               </a:defRPr>
             </a:defPPr>
             <a:lvl1pPr>
+              <a:buNone/>
               <a:defRPr sz="1200" b="0">
                 <a:solidFill>
                   <a:srgbClr val="858393"/>
@@ -4157,6 +4320,7 @@
               </a:defRPr>
             </a:lvl1pPr>
             <a:lvl2pPr>
+              <a:buNone/>
               <a:defRPr sz="1200" b="0">
                 <a:solidFill>
                   <a:srgbClr val="858393"/>
@@ -4167,6 +4331,7 @@
               </a:defRPr>
             </a:lvl2pPr>
             <a:lvl3pPr>
+              <a:buNone/>
               <a:defRPr sz="1200" b="0">
                 <a:solidFill>
                   <a:srgbClr val="858393"/>
@@ -4177,6 +4342,7 @@
               </a:defRPr>
             </a:lvl3pPr>
             <a:lvl4pPr>
+              <a:buNone/>
               <a:defRPr sz="1200" b="0">
                 <a:solidFill>
                   <a:srgbClr val="858393"/>
@@ -4187,6 +4353,7 @@
               </a:defRPr>
             </a:lvl4pPr>
             <a:lvl5pPr>
+              <a:buNone/>
               <a:defRPr sz="1200" b="0">
                 <a:solidFill>
                   <a:srgbClr val="858393"/>
@@ -4197,6 +4364,7 @@
               </a:defRPr>
             </a:lvl5pPr>
             <a:lvl6pPr>
+              <a:buNone/>
               <a:defRPr sz="1200" b="0">
                 <a:solidFill>
                   <a:srgbClr val="858393"/>
@@ -4207,6 +4375,7 @@
               </a:defRPr>
             </a:lvl6pPr>
             <a:lvl7pPr>
+              <a:buNone/>
               <a:defRPr sz="1200" b="0">
                 <a:solidFill>
                   <a:srgbClr val="858393"/>
@@ -4217,6 +4386,7 @@
               </a:defRPr>
             </a:lvl7pPr>
             <a:lvl8pPr>
+              <a:buNone/>
               <a:defRPr sz="1200" b="0">
                 <a:solidFill>
                   <a:srgbClr val="858393"/>
@@ -4227,6 +4397,7 @@
               </a:defRPr>
             </a:lvl8pPr>
             <a:lvl9pPr>
+              <a:buNone/>
               <a:defRPr sz="1200" b="0">
                 <a:solidFill>
                   <a:srgbClr val="858393"/>
@@ -4239,6 +4410,7 @@
           </a:lstStyle>
           <a:p xmlns:a="http://schemas.openxmlformats.org/drawingml/2006/main">
             <a:pPr>
+              <a:buNone/>
               <a:defRPr sz="1200" b="0">
                 <a:solidFill>
                   <a:srgbClr val="858393"/>
@@ -4279,7 +4451,7 @@
         <p:spPr>
           <a:xfrm xmlns:a="http://schemas.openxmlformats.org/drawingml/2006/main">
             <a:off x="609600" y="2286000"/>
-            <a:ext cx="10287000" cy="1524000"/>
+            <a:ext cx="10287000" cy="1809750"/>
           </a:xfrm>
           <a:prstGeom xmlns:a="http://schemas.openxmlformats.org/drawingml/2006/main" prst="rect">
             <a:avLst/>
@@ -4294,7 +4466,7 @@
           <a:bodyPr xmlns:a="http://schemas.openxmlformats.org/drawingml/2006/main" anchor="t"/>
           <a:lstStyle xmlns:a="http://schemas.openxmlformats.org/drawingml/2006/main">
             <a:defPPr>
-              <a:defRPr sz="3000" b="0">
+              <a:defRPr sz="2625" b="0">
                 <a:solidFill>
                   <a:srgbClr val="252638"/>
                 </a:solidFill>
@@ -4304,6 +4476,7 @@
               </a:defRPr>
             </a:defPPr>
             <a:lvl1pPr>
+              <a:buNone/>
               <a:defRPr sz="3000" b="0">
                 <a:solidFill>
                   <a:srgbClr val="252638"/>
@@ -4314,6 +4487,7 @@
               </a:defRPr>
             </a:lvl1pPr>
             <a:lvl2pPr>
+              <a:buNone/>
               <a:defRPr sz="3000" b="0">
                 <a:solidFill>
                   <a:srgbClr val="252638"/>
@@ -4324,6 +4498,7 @@
               </a:defRPr>
             </a:lvl2pPr>
             <a:lvl3pPr>
+              <a:buNone/>
               <a:defRPr sz="3000" b="0">
                 <a:solidFill>
                   <a:srgbClr val="252638"/>
@@ -4334,6 +4509,7 @@
               </a:defRPr>
             </a:lvl3pPr>
             <a:lvl4pPr>
+              <a:buNone/>
               <a:defRPr sz="3000" b="0">
                 <a:solidFill>
                   <a:srgbClr val="252638"/>
@@ -4344,6 +4520,7 @@
               </a:defRPr>
             </a:lvl4pPr>
             <a:lvl5pPr>
+              <a:buNone/>
               <a:defRPr sz="3000" b="0">
                 <a:solidFill>
                   <a:srgbClr val="252638"/>
@@ -4354,6 +4531,7 @@
               </a:defRPr>
             </a:lvl5pPr>
             <a:lvl6pPr>
+              <a:buNone/>
               <a:defRPr sz="3000" b="0">
                 <a:solidFill>
                   <a:srgbClr val="252638"/>
@@ -4364,6 +4542,7 @@
               </a:defRPr>
             </a:lvl6pPr>
             <a:lvl7pPr>
+              <a:buNone/>
               <a:defRPr sz="3000" b="0">
                 <a:solidFill>
                   <a:srgbClr val="252638"/>
@@ -4374,6 +4553,7 @@
               </a:defRPr>
             </a:lvl7pPr>
             <a:lvl8pPr>
+              <a:buNone/>
               <a:defRPr sz="3000" b="0">
                 <a:solidFill>
                   <a:srgbClr val="252638"/>
@@ -4384,6 +4564,7 @@
               </a:defRPr>
             </a:lvl8pPr>
             <a:lvl9pPr>
+              <a:buNone/>
               <a:defRPr sz="3000" b="0">
                 <a:solidFill>
                   <a:srgbClr val="252638"/>
@@ -4396,6 +4577,7 @@
           </a:lstStyle>
           <a:p xmlns:a="http://schemas.openxmlformats.org/drawingml/2006/main">
             <a:pPr>
+              <a:buNone/>
               <a:defRPr sz="3000" b="0">
                 <a:solidFill>
                   <a:srgbClr val="252638"/>
@@ -4406,7 +4588,7 @@
               </a:defRPr>
             </a:pPr>
             <a:r>
-              <a:rPr sz="3000" b="0">
+              <a:rPr sz="2625" b="0">
                 <a:solidFill>
                   <a:srgbClr val="252638"/>
                 </a:solidFill>
@@ -4414,11 +4596,12 @@
                 <a:ea typeface="DejaVu Sans"/>
                 <a:cs typeface="DejaVu Sans"/>
               </a:rPr>
-              <a:t>Преподаватели публикуют курсы.</a:t>
+              <a:t>Веб-платформа бесплатных учебных курсов.</a:t>
             </a:r>
           </a:p>
           <a:p xmlns:a="http://schemas.openxmlformats.org/drawingml/2006/main">
             <a:pPr>
+              <a:buNone/>
               <a:defRPr sz="3000" b="0">
                 <a:solidFill>
                   <a:srgbClr val="252638"/>
@@ -4429,7 +4612,7 @@
               </a:defRPr>
             </a:pPr>
             <a:r>
-              <a:rPr sz="3000" b="0">
+              <a:rPr sz="2625" b="0">
                 <a:solidFill>
                   <a:srgbClr val="252638"/>
                 </a:solidFill>
@@ -4437,7 +4620,31 @@
                 <a:ea typeface="DejaVu Sans"/>
                 <a:cs typeface="DejaVu Sans"/>
               </a:rPr>
-              <a:t>Студенты учатся и сохраняют прогресс.</a:t>
+              <a:t>Преподаватель создаёт уроки и тесты,</a:t>
+            </a:r>
+          </a:p>
+          <a:p xmlns:a="http://schemas.openxmlformats.org/drawingml/2006/main">
+            <a:pPr>
+              <a:buNone/>
+              <a:defRPr sz="3000" b="0">
+                <a:solidFill>
+                  <a:srgbClr val="252638"/>
+                </a:solidFill>
+                <a:latin typeface="DejaVu Sans"/>
+                <a:ea typeface="DejaVu Sans"/>
+                <a:cs typeface="DejaVu Sans"/>
+              </a:defRPr>
+            </a:pPr>
+            <a:r>
+              <a:rPr sz="2625" b="0">
+                <a:solidFill>
+                  <a:srgbClr val="252638"/>
+                </a:solidFill>
+                <a:latin typeface="DejaVu Sans"/>
+                <a:ea typeface="DejaVu Sans"/>
+                <a:cs typeface="DejaVu Sans"/>
+              </a:rPr>
+              <a:t>студент проходит программу и видит прогресс.</a:t>
             </a:r>
           </a:p>
         </p:txBody>
@@ -4458,8 +4665,8 @@
         </p:nvSpPr>
         <p:spPr>
           <a:xfrm xmlns:a="http://schemas.openxmlformats.org/drawingml/2006/main">
-            <a:off x="609600" y="4810125"/>
-            <a:ext cx="9525000" cy="952500"/>
+            <a:off x="609600" y="4857750"/>
+            <a:ext cx="9525000" cy="1047750"/>
           </a:xfrm>
           <a:prstGeom xmlns:a="http://schemas.openxmlformats.org/drawingml/2006/main" prst="rect">
             <a:avLst/>
@@ -4474,7 +4681,7 @@
           <a:bodyPr xmlns:a="http://schemas.openxmlformats.org/drawingml/2006/main" anchor="t"/>
           <a:lstStyle xmlns:a="http://schemas.openxmlformats.org/drawingml/2006/main">
             <a:defPPr>
-              <a:defRPr sz="1800" b="0">
+              <a:defRPr sz="1725" b="0">
                 <a:solidFill>
                   <a:srgbClr val="777383"/>
                 </a:solidFill>
@@ -4484,6 +4691,7 @@
               </a:defRPr>
             </a:defPPr>
             <a:lvl1pPr>
+              <a:buNone/>
               <a:defRPr sz="1800" b="0">
                 <a:solidFill>
                   <a:srgbClr val="777383"/>
@@ -4494,6 +4702,7 @@
               </a:defRPr>
             </a:lvl1pPr>
             <a:lvl2pPr>
+              <a:buNone/>
               <a:defRPr sz="1800" b="0">
                 <a:solidFill>
                   <a:srgbClr val="777383"/>
@@ -4504,6 +4713,7 @@
               </a:defRPr>
             </a:lvl2pPr>
             <a:lvl3pPr>
+              <a:buNone/>
               <a:defRPr sz="1800" b="0">
                 <a:solidFill>
                   <a:srgbClr val="777383"/>
@@ -4514,6 +4724,7 @@
               </a:defRPr>
             </a:lvl3pPr>
             <a:lvl4pPr>
+              <a:buNone/>
               <a:defRPr sz="1800" b="0">
                 <a:solidFill>
                   <a:srgbClr val="777383"/>
@@ -4524,6 +4735,7 @@
               </a:defRPr>
             </a:lvl4pPr>
             <a:lvl5pPr>
+              <a:buNone/>
               <a:defRPr sz="1800" b="0">
                 <a:solidFill>
                   <a:srgbClr val="777383"/>
@@ -4534,6 +4746,7 @@
               </a:defRPr>
             </a:lvl5pPr>
             <a:lvl6pPr>
+              <a:buNone/>
               <a:defRPr sz="1800" b="0">
                 <a:solidFill>
                   <a:srgbClr val="777383"/>
@@ -4544,6 +4757,7 @@
               </a:defRPr>
             </a:lvl6pPr>
             <a:lvl7pPr>
+              <a:buNone/>
               <a:defRPr sz="1800" b="0">
                 <a:solidFill>
                   <a:srgbClr val="777383"/>
@@ -4554,6 +4768,7 @@
               </a:defRPr>
             </a:lvl7pPr>
             <a:lvl8pPr>
+              <a:buNone/>
               <a:defRPr sz="1800" b="0">
                 <a:solidFill>
                   <a:srgbClr val="777383"/>
@@ -4564,6 +4779,7 @@
               </a:defRPr>
             </a:lvl8pPr>
             <a:lvl9pPr>
+              <a:buNone/>
               <a:defRPr sz="1800" b="0">
                 <a:solidFill>
                   <a:srgbClr val="777383"/>
@@ -4576,6 +4792,7 @@
           </a:lstStyle>
           <a:p xmlns:a="http://schemas.openxmlformats.org/drawingml/2006/main">
             <a:pPr>
+              <a:buNone/>
               <a:defRPr sz="1800" b="0">
                 <a:solidFill>
                   <a:srgbClr val="777383"/>
@@ -4586,7 +4803,7 @@
               </a:defRPr>
             </a:pPr>
             <a:r>
-              <a:rPr sz="1800" b="0">
+              <a:rPr sz="1725" b="0">
                 <a:solidFill>
                   <a:srgbClr val="777383"/>
                 </a:solidFill>
@@ -4594,11 +4811,12 @@
                 <a:ea typeface="DejaVu Sans"/>
                 <a:cs typeface="DejaVu Sans"/>
               </a:rPr>
-              <a:t>ТЗ 2.0 и первый HTML-прототип</a:t>
+              <a:t>Учебный MVP: каталог, обучение, квизы и личный кабинет</a:t>
             </a:r>
           </a:p>
           <a:p xmlns:a="http://schemas.openxmlformats.org/drawingml/2006/main">
             <a:pPr>
+              <a:buNone/>
               <a:defRPr sz="1800" b="0">
                 <a:solidFill>
                   <a:srgbClr val="777383"/>
@@ -4609,7 +4827,7 @@
               </a:defRPr>
             </a:pPr>
             <a:r>
-              <a:rPr sz="1800" b="0">
+              <a:rPr sz="1725" b="0">
                 <a:solidFill>
                   <a:srgbClr val="777383"/>
                 </a:solidFill>
@@ -4617,7 +4835,31 @@
                 <a:ea typeface="DejaVu Sans"/>
                 <a:cs typeface="DejaVu Sans"/>
               </a:rPr>
-              <a:t>Статус на 24 октября 2026 года</a:t>
+              <a:t>Отчёт о прошедшей неделе и текущем результате</a:t>
+            </a:r>
+          </a:p>
+          <a:p xmlns:a="http://schemas.openxmlformats.org/drawingml/2006/main">
+            <a:pPr>
+              <a:buNone/>
+              <a:defRPr sz="1800" b="0">
+                <a:solidFill>
+                  <a:srgbClr val="777383"/>
+                </a:solidFill>
+                <a:latin typeface="DejaVu Sans"/>
+                <a:ea typeface="DejaVu Sans"/>
+                <a:cs typeface="DejaVu Sans"/>
+              </a:defRPr>
+            </a:pPr>
+            <a:r>
+              <a:rPr sz="1725" b="0">
+                <a:solidFill>
+                  <a:srgbClr val="777383"/>
+                </a:solidFill>
+                <a:latin typeface="DejaVu Sans"/>
+                <a:ea typeface="DejaVu Sans"/>
+                <a:cs typeface="DejaVu Sans"/>
+              </a:rPr>
+              <a:t>24 октября 2026 года</a:t>
             </a:r>
           </a:p>
         </p:txBody>
@@ -4693,6 +4935,7 @@
               </a:defRPr>
             </a:defPPr>
             <a:lvl1pPr>
+              <a:buNone/>
               <a:defRPr sz="1125" b="1">
                 <a:solidFill>
                   <a:srgbClr val="6145E6"/>
@@ -4703,6 +4946,7 @@
               </a:defRPr>
             </a:lvl1pPr>
             <a:lvl2pPr>
+              <a:buNone/>
               <a:defRPr sz="1125" b="1">
                 <a:solidFill>
                   <a:srgbClr val="6145E6"/>
@@ -4713,6 +4957,7 @@
               </a:defRPr>
             </a:lvl2pPr>
             <a:lvl3pPr>
+              <a:buNone/>
               <a:defRPr sz="1125" b="1">
                 <a:solidFill>
                   <a:srgbClr val="6145E6"/>
@@ -4723,6 +4968,7 @@
               </a:defRPr>
             </a:lvl3pPr>
             <a:lvl4pPr>
+              <a:buNone/>
               <a:defRPr sz="1125" b="1">
                 <a:solidFill>
                   <a:srgbClr val="6145E6"/>
@@ -4733,6 +4979,7 @@
               </a:defRPr>
             </a:lvl4pPr>
             <a:lvl5pPr>
+              <a:buNone/>
               <a:defRPr sz="1125" b="1">
                 <a:solidFill>
                   <a:srgbClr val="6145E6"/>
@@ -4743,6 +4990,7 @@
               </a:defRPr>
             </a:lvl5pPr>
             <a:lvl6pPr>
+              <a:buNone/>
               <a:defRPr sz="1125" b="1">
                 <a:solidFill>
                   <a:srgbClr val="6145E6"/>
@@ -4753,6 +5001,7 @@
               </a:defRPr>
             </a:lvl6pPr>
             <a:lvl7pPr>
+              <a:buNone/>
               <a:defRPr sz="1125" b="1">
                 <a:solidFill>
                   <a:srgbClr val="6145E6"/>
@@ -4763,6 +5012,7 @@
               </a:defRPr>
             </a:lvl7pPr>
             <a:lvl8pPr>
+              <a:buNone/>
               <a:defRPr sz="1125" b="1">
                 <a:solidFill>
                   <a:srgbClr val="6145E6"/>
@@ -4773,6 +5023,7 @@
               </a:defRPr>
             </a:lvl8pPr>
             <a:lvl9pPr>
+              <a:buNone/>
               <a:defRPr sz="1125" b="1">
                 <a:solidFill>
                   <a:srgbClr val="6145E6"/>
@@ -4785,6 +5036,7 @@
           </a:lstStyle>
           <a:p xmlns:a="http://schemas.openxmlformats.org/drawingml/2006/main">
             <a:pPr>
+              <a:buNone/>
               <a:defRPr sz="1125" b="1">
                 <a:solidFill>
                   <a:srgbClr val="6145E6"/>
@@ -4850,6 +5102,7 @@
               </a:defRPr>
             </a:defPPr>
             <a:lvl1pPr>
+              <a:buNone/>
               <a:defRPr sz="3600" b="1">
                 <a:solidFill>
                   <a:srgbClr val="252638"/>
@@ -4860,6 +5113,7 @@
               </a:defRPr>
             </a:lvl1pPr>
             <a:lvl2pPr>
+              <a:buNone/>
               <a:defRPr sz="3600" b="1">
                 <a:solidFill>
                   <a:srgbClr val="252638"/>
@@ -4870,6 +5124,7 @@
               </a:defRPr>
             </a:lvl2pPr>
             <a:lvl3pPr>
+              <a:buNone/>
               <a:defRPr sz="3600" b="1">
                 <a:solidFill>
                   <a:srgbClr val="252638"/>
@@ -4880,6 +5135,7 @@
               </a:defRPr>
             </a:lvl3pPr>
             <a:lvl4pPr>
+              <a:buNone/>
               <a:defRPr sz="3600" b="1">
                 <a:solidFill>
                   <a:srgbClr val="252638"/>
@@ -4890,6 +5146,7 @@
               </a:defRPr>
             </a:lvl4pPr>
             <a:lvl5pPr>
+              <a:buNone/>
               <a:defRPr sz="3600" b="1">
                 <a:solidFill>
                   <a:srgbClr val="252638"/>
@@ -4900,6 +5157,7 @@
               </a:defRPr>
             </a:lvl5pPr>
             <a:lvl6pPr>
+              <a:buNone/>
               <a:defRPr sz="3600" b="1">
                 <a:solidFill>
                   <a:srgbClr val="252638"/>
@@ -4910,6 +5168,7 @@
               </a:defRPr>
             </a:lvl6pPr>
             <a:lvl7pPr>
+              <a:buNone/>
               <a:defRPr sz="3600" b="1">
                 <a:solidFill>
                   <a:srgbClr val="252638"/>
@@ -4920,6 +5179,7 @@
               </a:defRPr>
             </a:lvl7pPr>
             <a:lvl8pPr>
+              <a:buNone/>
               <a:defRPr sz="3600" b="1">
                 <a:solidFill>
                   <a:srgbClr val="252638"/>
@@ -4930,6 +5190,7 @@
               </a:defRPr>
             </a:lvl8pPr>
             <a:lvl9pPr>
+              <a:buNone/>
               <a:defRPr sz="3600" b="1">
                 <a:solidFill>
                   <a:srgbClr val="252638"/>
@@ -4942,6 +5203,7 @@
           </a:lstStyle>
           <a:p xmlns:a="http://schemas.openxmlformats.org/drawingml/2006/main">
             <a:pPr>
+              <a:buNone/>
               <a:defRPr sz="3600" b="1">
                 <a:solidFill>
                   <a:srgbClr val="252638"/>
@@ -5007,6 +5269,7 @@
               </a:defRPr>
             </a:defPPr>
             <a:lvl1pPr>
+              <a:buNone/>
               <a:defRPr sz="1200" b="0">
                 <a:solidFill>
                   <a:srgbClr val="858393"/>
@@ -5017,6 +5280,7 @@
               </a:defRPr>
             </a:lvl1pPr>
             <a:lvl2pPr>
+              <a:buNone/>
               <a:defRPr sz="1200" b="0">
                 <a:solidFill>
                   <a:srgbClr val="858393"/>
@@ -5027,6 +5291,7 @@
               </a:defRPr>
             </a:lvl2pPr>
             <a:lvl3pPr>
+              <a:buNone/>
               <a:defRPr sz="1200" b="0">
                 <a:solidFill>
                   <a:srgbClr val="858393"/>
@@ -5037,6 +5302,7 @@
               </a:defRPr>
             </a:lvl3pPr>
             <a:lvl4pPr>
+              <a:buNone/>
               <a:defRPr sz="1200" b="0">
                 <a:solidFill>
                   <a:srgbClr val="858393"/>
@@ -5047,6 +5313,7 @@
               </a:defRPr>
             </a:lvl4pPr>
             <a:lvl5pPr>
+              <a:buNone/>
               <a:defRPr sz="1200" b="0">
                 <a:solidFill>
                   <a:srgbClr val="858393"/>
@@ -5057,6 +5324,7 @@
               </a:defRPr>
             </a:lvl5pPr>
             <a:lvl6pPr>
+              <a:buNone/>
               <a:defRPr sz="1200" b="0">
                 <a:solidFill>
                   <a:srgbClr val="858393"/>
@@ -5067,6 +5335,7 @@
               </a:defRPr>
             </a:lvl6pPr>
             <a:lvl7pPr>
+              <a:buNone/>
               <a:defRPr sz="1200" b="0">
                 <a:solidFill>
                   <a:srgbClr val="858393"/>
@@ -5077,6 +5346,7 @@
               </a:defRPr>
             </a:lvl7pPr>
             <a:lvl8pPr>
+              <a:buNone/>
               <a:defRPr sz="1200" b="0">
                 <a:solidFill>
                   <a:srgbClr val="858393"/>
@@ -5087,6 +5357,7 @@
               </a:defRPr>
             </a:lvl8pPr>
             <a:lvl9pPr>
+              <a:buNone/>
               <a:defRPr sz="1200" b="0">
                 <a:solidFill>
                   <a:srgbClr val="858393"/>
@@ -5099,6 +5370,7 @@
           </a:lstStyle>
           <a:p xmlns:a="http://schemas.openxmlformats.org/drawingml/2006/main">
             <a:pPr>
+              <a:buNone/>
               <a:defRPr sz="1200" b="0">
                 <a:solidFill>
                   <a:srgbClr val="858393"/>
@@ -5164,6 +5436,7 @@
               </a:defRPr>
             </a:defPPr>
             <a:lvl1pPr>
+              <a:buNone/>
               <a:defRPr sz="2100" b="1">
                 <a:solidFill>
                   <a:srgbClr val="252638"/>
@@ -5174,6 +5447,7 @@
               </a:defRPr>
             </a:lvl1pPr>
             <a:lvl2pPr>
+              <a:buNone/>
               <a:defRPr sz="2100" b="1">
                 <a:solidFill>
                   <a:srgbClr val="252638"/>
@@ -5184,6 +5458,7 @@
               </a:defRPr>
             </a:lvl2pPr>
             <a:lvl3pPr>
+              <a:buNone/>
               <a:defRPr sz="2100" b="1">
                 <a:solidFill>
                   <a:srgbClr val="252638"/>
@@ -5194,6 +5469,7 @@
               </a:defRPr>
             </a:lvl3pPr>
             <a:lvl4pPr>
+              <a:buNone/>
               <a:defRPr sz="2100" b="1">
                 <a:solidFill>
                   <a:srgbClr val="252638"/>
@@ -5204,6 +5480,7 @@
               </a:defRPr>
             </a:lvl4pPr>
             <a:lvl5pPr>
+              <a:buNone/>
               <a:defRPr sz="2100" b="1">
                 <a:solidFill>
                   <a:srgbClr val="252638"/>
@@ -5214,6 +5491,7 @@
               </a:defRPr>
             </a:lvl5pPr>
             <a:lvl6pPr>
+              <a:buNone/>
               <a:defRPr sz="2100" b="1">
                 <a:solidFill>
                   <a:srgbClr val="252638"/>
@@ -5224,6 +5502,7 @@
               </a:defRPr>
             </a:lvl6pPr>
             <a:lvl7pPr>
+              <a:buNone/>
               <a:defRPr sz="2100" b="1">
                 <a:solidFill>
                   <a:srgbClr val="252638"/>
@@ -5234,6 +5513,7 @@
               </a:defRPr>
             </a:lvl7pPr>
             <a:lvl8pPr>
+              <a:buNone/>
               <a:defRPr sz="2100" b="1">
                 <a:solidFill>
                   <a:srgbClr val="252638"/>
@@ -5244,6 +5524,7 @@
               </a:defRPr>
             </a:lvl8pPr>
             <a:lvl9pPr>
+              <a:buNone/>
               <a:defRPr sz="2100" b="1">
                 <a:solidFill>
                   <a:srgbClr val="252638"/>
@@ -5256,6 +5537,7 @@
           </a:lstStyle>
           <a:p xmlns:a="http://schemas.openxmlformats.org/drawingml/2006/main">
             <a:pPr>
+              <a:buNone/>
               <a:defRPr sz="2100" b="1">
                 <a:solidFill>
                   <a:srgbClr val="252638"/>
@@ -5321,6 +5603,7 @@
               </a:defRPr>
             </a:defPPr>
             <a:lvl1pPr>
+              <a:buNone/>
               <a:defRPr sz="1950" b="1">
                 <a:solidFill>
                   <a:srgbClr val="6145E6"/>
@@ -5331,6 +5614,7 @@
               </a:defRPr>
             </a:lvl1pPr>
             <a:lvl2pPr>
+              <a:buNone/>
               <a:defRPr sz="1950" b="1">
                 <a:solidFill>
                   <a:srgbClr val="6145E6"/>
@@ -5341,6 +5625,7 @@
               </a:defRPr>
             </a:lvl2pPr>
             <a:lvl3pPr>
+              <a:buNone/>
               <a:defRPr sz="1950" b="1">
                 <a:solidFill>
                   <a:srgbClr val="6145E6"/>
@@ -5351,6 +5636,7 @@
               </a:defRPr>
             </a:lvl3pPr>
             <a:lvl4pPr>
+              <a:buNone/>
               <a:defRPr sz="1950" b="1">
                 <a:solidFill>
                   <a:srgbClr val="6145E6"/>
@@ -5361,6 +5647,7 @@
               </a:defRPr>
             </a:lvl4pPr>
             <a:lvl5pPr>
+              <a:buNone/>
               <a:defRPr sz="1950" b="1">
                 <a:solidFill>
                   <a:srgbClr val="6145E6"/>
@@ -5371,6 +5658,7 @@
               </a:defRPr>
             </a:lvl5pPr>
             <a:lvl6pPr>
+              <a:buNone/>
               <a:defRPr sz="1950" b="1">
                 <a:solidFill>
                   <a:srgbClr val="6145E6"/>
@@ -5381,6 +5669,7 @@
               </a:defRPr>
             </a:lvl6pPr>
             <a:lvl7pPr>
+              <a:buNone/>
               <a:defRPr sz="1950" b="1">
                 <a:solidFill>
                   <a:srgbClr val="6145E6"/>
@@ -5391,6 +5680,7 @@
               </a:defRPr>
             </a:lvl7pPr>
             <a:lvl8pPr>
+              <a:buNone/>
               <a:defRPr sz="1950" b="1">
                 <a:solidFill>
                   <a:srgbClr val="6145E6"/>
@@ -5401,6 +5691,7 @@
               </a:defRPr>
             </a:lvl8pPr>
             <a:lvl9pPr>
+              <a:buNone/>
               <a:defRPr sz="1950" b="1">
                 <a:solidFill>
                   <a:srgbClr val="6145E6"/>
@@ -5413,6 +5704,7 @@
           </a:lstStyle>
           <a:p xmlns:a="http://schemas.openxmlformats.org/drawingml/2006/main">
             <a:pPr>
+              <a:buNone/>
               <a:defRPr sz="1950" b="1">
                 <a:solidFill>
                   <a:srgbClr val="6145E6"/>
@@ -5453,7 +5745,7 @@
         <p:spPr>
           <a:xfrm xmlns:a="http://schemas.openxmlformats.org/drawingml/2006/main">
             <a:off x="6191250" y="2686050"/>
-            <a:ext cx="5334000" cy="523875"/>
+            <a:ext cx="5334000" cy="628650"/>
           </a:xfrm>
           <a:prstGeom xmlns:a="http://schemas.openxmlformats.org/drawingml/2006/main" prst="rect">
             <a:avLst/>
@@ -5468,7 +5760,7 @@
           <a:bodyPr xmlns:a="http://schemas.openxmlformats.org/drawingml/2006/main" anchor="t"/>
           <a:lstStyle xmlns:a="http://schemas.openxmlformats.org/drawingml/2006/main">
             <a:defPPr>
-              <a:defRPr sz="1650" b="0">
+              <a:defRPr sz="1575" b="0">
                 <a:solidFill>
                   <a:srgbClr val="777383"/>
                 </a:solidFill>
@@ -5478,6 +5770,7 @@
               </a:defRPr>
             </a:defPPr>
             <a:lvl1pPr>
+              <a:buNone/>
               <a:defRPr sz="1650" b="0">
                 <a:solidFill>
                   <a:srgbClr val="777383"/>
@@ -5488,6 +5781,7 @@
               </a:defRPr>
             </a:lvl1pPr>
             <a:lvl2pPr>
+              <a:buNone/>
               <a:defRPr sz="1650" b="0">
                 <a:solidFill>
                   <a:srgbClr val="777383"/>
@@ -5498,6 +5792,7 @@
               </a:defRPr>
             </a:lvl2pPr>
             <a:lvl3pPr>
+              <a:buNone/>
               <a:defRPr sz="1650" b="0">
                 <a:solidFill>
                   <a:srgbClr val="777383"/>
@@ -5508,6 +5803,7 @@
               </a:defRPr>
             </a:lvl3pPr>
             <a:lvl4pPr>
+              <a:buNone/>
               <a:defRPr sz="1650" b="0">
                 <a:solidFill>
                   <a:srgbClr val="777383"/>
@@ -5518,6 +5814,7 @@
               </a:defRPr>
             </a:lvl4pPr>
             <a:lvl5pPr>
+              <a:buNone/>
               <a:defRPr sz="1650" b="0">
                 <a:solidFill>
                   <a:srgbClr val="777383"/>
@@ -5528,6 +5825,7 @@
               </a:defRPr>
             </a:lvl5pPr>
             <a:lvl6pPr>
+              <a:buNone/>
               <a:defRPr sz="1650" b="0">
                 <a:solidFill>
                   <a:srgbClr val="777383"/>
@@ -5538,6 +5836,7 @@
               </a:defRPr>
             </a:lvl6pPr>
             <a:lvl7pPr>
+              <a:buNone/>
               <a:defRPr sz="1650" b="0">
                 <a:solidFill>
                   <a:srgbClr val="777383"/>
@@ -5548,6 +5847,7 @@
               </a:defRPr>
             </a:lvl7pPr>
             <a:lvl8pPr>
+              <a:buNone/>
               <a:defRPr sz="1650" b="0">
                 <a:solidFill>
                   <a:srgbClr val="777383"/>
@@ -5558,6 +5858,7 @@
               </a:defRPr>
             </a:lvl8pPr>
             <a:lvl9pPr>
+              <a:buNone/>
               <a:defRPr sz="1650" b="0">
                 <a:solidFill>
                   <a:srgbClr val="777383"/>
@@ -5570,6 +5871,7 @@
           </a:lstStyle>
           <a:p xmlns:a="http://schemas.openxmlformats.org/drawingml/2006/main">
             <a:pPr>
+              <a:buNone/>
               <a:defRPr sz="1650" b="0">
                 <a:solidFill>
                   <a:srgbClr val="777383"/>
@@ -5580,7 +5882,7 @@
               </a:defRPr>
             </a:pPr>
             <a:r>
-              <a:rPr sz="1650" b="0">
+              <a:rPr sz="1575" b="0">
                 <a:solidFill>
                   <a:srgbClr val="777383"/>
                 </a:solidFill>
@@ -5588,7 +5890,31 @@
                 <a:ea typeface="DejaVu Sans"/>
                 <a:cs typeface="DejaVu Sans"/>
               </a:rPr>
-              <a:t>Интерфейс, API, база данных</a:t>
+              <a:t>Разрабатывает интерфейс и серверную часть.</a:t>
+            </a:r>
+          </a:p>
+          <a:p xmlns:a="http://schemas.openxmlformats.org/drawingml/2006/main">
+            <a:pPr>
+              <a:buNone/>
+              <a:defRPr sz="1650" b="0">
+                <a:solidFill>
+                  <a:srgbClr val="777383"/>
+                </a:solidFill>
+                <a:latin typeface="DejaVu Sans"/>
+                <a:ea typeface="DejaVu Sans"/>
+                <a:cs typeface="DejaVu Sans"/>
+              </a:defRPr>
+            </a:pPr>
+            <a:r>
+              <a:rPr sz="1575" b="0">
+                <a:solidFill>
+                  <a:srgbClr val="777383"/>
+                </a:solidFill>
+                <a:latin typeface="DejaVu Sans"/>
+                <a:ea typeface="DejaVu Sans"/>
+                <a:cs typeface="DejaVu Sans"/>
+              </a:rPr>
+              <a:t>Отвечает за БД, запуск и исправление ошибок.</a:t>
             </a:r>
           </a:p>
         </p:txBody>
@@ -5635,6 +5961,7 @@
               </a:defRPr>
             </a:defPPr>
             <a:lvl1pPr>
+              <a:buNone/>
               <a:defRPr sz="2100" b="1">
                 <a:solidFill>
                   <a:srgbClr val="252638"/>
@@ -5645,6 +5972,7 @@
               </a:defRPr>
             </a:lvl1pPr>
             <a:lvl2pPr>
+              <a:buNone/>
               <a:defRPr sz="2100" b="1">
                 <a:solidFill>
                   <a:srgbClr val="252638"/>
@@ -5655,6 +5983,7 @@
               </a:defRPr>
             </a:lvl2pPr>
             <a:lvl3pPr>
+              <a:buNone/>
               <a:defRPr sz="2100" b="1">
                 <a:solidFill>
                   <a:srgbClr val="252638"/>
@@ -5665,6 +5994,7 @@
               </a:defRPr>
             </a:lvl3pPr>
             <a:lvl4pPr>
+              <a:buNone/>
               <a:defRPr sz="2100" b="1">
                 <a:solidFill>
                   <a:srgbClr val="252638"/>
@@ -5675,6 +6005,7 @@
               </a:defRPr>
             </a:lvl4pPr>
             <a:lvl5pPr>
+              <a:buNone/>
               <a:defRPr sz="2100" b="1">
                 <a:solidFill>
                   <a:srgbClr val="252638"/>
@@ -5685,6 +6016,7 @@
               </a:defRPr>
             </a:lvl5pPr>
             <a:lvl6pPr>
+              <a:buNone/>
               <a:defRPr sz="2100" b="1">
                 <a:solidFill>
                   <a:srgbClr val="252638"/>
@@ -5695,6 +6027,7 @@
               </a:defRPr>
             </a:lvl6pPr>
             <a:lvl7pPr>
+              <a:buNone/>
               <a:defRPr sz="2100" b="1">
                 <a:solidFill>
                   <a:srgbClr val="252638"/>
@@ -5705,6 +6038,7 @@
               </a:defRPr>
             </a:lvl7pPr>
             <a:lvl8pPr>
+              <a:buNone/>
               <a:defRPr sz="2100" b="1">
                 <a:solidFill>
                   <a:srgbClr val="252638"/>
@@ -5715,6 +6049,7 @@
               </a:defRPr>
             </a:lvl8pPr>
             <a:lvl9pPr>
+              <a:buNone/>
               <a:defRPr sz="2100" b="1">
                 <a:solidFill>
                   <a:srgbClr val="252638"/>
@@ -5727,6 +6062,7 @@
           </a:lstStyle>
           <a:p xmlns:a="http://schemas.openxmlformats.org/drawingml/2006/main">
             <a:pPr>
+              <a:buNone/>
               <a:defRPr sz="2100" b="1">
                 <a:solidFill>
                   <a:srgbClr val="252638"/>
@@ -5792,6 +6128,7 @@
               </a:defRPr>
             </a:defPPr>
             <a:lvl1pPr>
+              <a:buNone/>
               <a:defRPr sz="1950" b="1">
                 <a:solidFill>
                   <a:srgbClr val="6145E6"/>
@@ -5802,6 +6139,7 @@
               </a:defRPr>
             </a:lvl1pPr>
             <a:lvl2pPr>
+              <a:buNone/>
               <a:defRPr sz="1950" b="1">
                 <a:solidFill>
                   <a:srgbClr val="6145E6"/>
@@ -5812,6 +6150,7 @@
               </a:defRPr>
             </a:lvl2pPr>
             <a:lvl3pPr>
+              <a:buNone/>
               <a:defRPr sz="1950" b="1">
                 <a:solidFill>
                   <a:srgbClr val="6145E6"/>
@@ -5822,6 +6161,7 @@
               </a:defRPr>
             </a:lvl3pPr>
             <a:lvl4pPr>
+              <a:buNone/>
               <a:defRPr sz="1950" b="1">
                 <a:solidFill>
                   <a:srgbClr val="6145E6"/>
@@ -5832,6 +6172,7 @@
               </a:defRPr>
             </a:lvl4pPr>
             <a:lvl5pPr>
+              <a:buNone/>
               <a:defRPr sz="1950" b="1">
                 <a:solidFill>
                   <a:srgbClr val="6145E6"/>
@@ -5842,6 +6183,7 @@
               </a:defRPr>
             </a:lvl5pPr>
             <a:lvl6pPr>
+              <a:buNone/>
               <a:defRPr sz="1950" b="1">
                 <a:solidFill>
                   <a:srgbClr val="6145E6"/>
@@ -5852,6 +6194,7 @@
               </a:defRPr>
             </a:lvl6pPr>
             <a:lvl7pPr>
+              <a:buNone/>
               <a:defRPr sz="1950" b="1">
                 <a:solidFill>
                   <a:srgbClr val="6145E6"/>
@@ -5862,6 +6205,7 @@
               </a:defRPr>
             </a:lvl7pPr>
             <a:lvl8pPr>
+              <a:buNone/>
               <a:defRPr sz="1950" b="1">
                 <a:solidFill>
                   <a:srgbClr val="6145E6"/>
@@ -5872,6 +6216,7 @@
               </a:defRPr>
             </a:lvl8pPr>
             <a:lvl9pPr>
+              <a:buNone/>
               <a:defRPr sz="1950" b="1">
                 <a:solidFill>
                   <a:srgbClr val="6145E6"/>
@@ -5884,6 +6229,7 @@
           </a:lstStyle>
           <a:p xmlns:a="http://schemas.openxmlformats.org/drawingml/2006/main">
             <a:pPr>
+              <a:buNone/>
               <a:defRPr sz="1950" b="1">
                 <a:solidFill>
                   <a:srgbClr val="6145E6"/>
@@ -5924,7 +6270,7 @@
         <p:spPr>
           <a:xfrm xmlns:a="http://schemas.openxmlformats.org/drawingml/2006/main">
             <a:off x="6191250" y="3876675"/>
-            <a:ext cx="5334000" cy="523875"/>
+            <a:ext cx="5334000" cy="628650"/>
           </a:xfrm>
           <a:prstGeom xmlns:a="http://schemas.openxmlformats.org/drawingml/2006/main" prst="rect">
             <a:avLst/>
@@ -5939,7 +6285,7 @@
           <a:bodyPr xmlns:a="http://schemas.openxmlformats.org/drawingml/2006/main" anchor="t"/>
           <a:lstStyle xmlns:a="http://schemas.openxmlformats.org/drawingml/2006/main">
             <a:defPPr>
-              <a:defRPr sz="1650" b="0">
+              <a:defRPr sz="1575" b="0">
                 <a:solidFill>
                   <a:srgbClr val="777383"/>
                 </a:solidFill>
@@ -5949,6 +6295,7 @@
               </a:defRPr>
             </a:defPPr>
             <a:lvl1pPr>
+              <a:buNone/>
               <a:defRPr sz="1650" b="0">
                 <a:solidFill>
                   <a:srgbClr val="777383"/>
@@ -5959,6 +6306,7 @@
               </a:defRPr>
             </a:lvl1pPr>
             <a:lvl2pPr>
+              <a:buNone/>
               <a:defRPr sz="1650" b="0">
                 <a:solidFill>
                   <a:srgbClr val="777383"/>
@@ -5969,6 +6317,7 @@
               </a:defRPr>
             </a:lvl2pPr>
             <a:lvl3pPr>
+              <a:buNone/>
               <a:defRPr sz="1650" b="0">
                 <a:solidFill>
                   <a:srgbClr val="777383"/>
@@ -5979,6 +6328,7 @@
               </a:defRPr>
             </a:lvl3pPr>
             <a:lvl4pPr>
+              <a:buNone/>
               <a:defRPr sz="1650" b="0">
                 <a:solidFill>
                   <a:srgbClr val="777383"/>
@@ -5989,6 +6339,7 @@
               </a:defRPr>
             </a:lvl4pPr>
             <a:lvl5pPr>
+              <a:buNone/>
               <a:defRPr sz="1650" b="0">
                 <a:solidFill>
                   <a:srgbClr val="777383"/>
@@ -5999,6 +6350,7 @@
               </a:defRPr>
             </a:lvl5pPr>
             <a:lvl6pPr>
+              <a:buNone/>
               <a:defRPr sz="1650" b="0">
                 <a:solidFill>
                   <a:srgbClr val="777383"/>
@@ -6009,6 +6361,7 @@
               </a:defRPr>
             </a:lvl6pPr>
             <a:lvl7pPr>
+              <a:buNone/>
               <a:defRPr sz="1650" b="0">
                 <a:solidFill>
                   <a:srgbClr val="777383"/>
@@ -6019,6 +6372,7 @@
               </a:defRPr>
             </a:lvl7pPr>
             <a:lvl8pPr>
+              <a:buNone/>
               <a:defRPr sz="1650" b="0">
                 <a:solidFill>
                   <a:srgbClr val="777383"/>
@@ -6029,6 +6383,7 @@
               </a:defRPr>
             </a:lvl8pPr>
             <a:lvl9pPr>
+              <a:buNone/>
               <a:defRPr sz="1650" b="0">
                 <a:solidFill>
                   <a:srgbClr val="777383"/>
@@ -6041,6 +6396,7 @@
           </a:lstStyle>
           <a:p xmlns:a="http://schemas.openxmlformats.org/drawingml/2006/main">
             <a:pPr>
+              <a:buNone/>
               <a:defRPr sz="1650" b="0">
                 <a:solidFill>
                   <a:srgbClr val="777383"/>
@@ -6051,7 +6407,7 @@
               </a:defRPr>
             </a:pPr>
             <a:r>
-              <a:rPr sz="1650" b="0">
+              <a:rPr sz="1575" b="0">
                 <a:solidFill>
                   <a:srgbClr val="777383"/>
                 </a:solidFill>
@@ -6059,7 +6415,31 @@
                 <a:ea typeface="DejaVu Sans"/>
                 <a:cs typeface="DejaVu Sans"/>
               </a:rPr>
-              <a:t>Сценарии, дефекты, повторная проверка</a:t>
+              <a:t>Готовит тестовые сценарии, проверяет функции.</a:t>
+            </a:r>
+          </a:p>
+          <a:p xmlns:a="http://schemas.openxmlformats.org/drawingml/2006/main">
+            <a:pPr>
+              <a:buNone/>
+              <a:defRPr sz="1650" b="0">
+                <a:solidFill>
+                  <a:srgbClr val="777383"/>
+                </a:solidFill>
+                <a:latin typeface="DejaVu Sans"/>
+                <a:ea typeface="DejaVu Sans"/>
+                <a:cs typeface="DejaVu Sans"/>
+              </a:defRPr>
+            </a:pPr>
+            <a:r>
+              <a:rPr sz="1575" b="0">
+                <a:solidFill>
+                  <a:srgbClr val="777383"/>
+                </a:solidFill>
+                <a:latin typeface="DejaVu Sans"/>
+                <a:ea typeface="DejaVu Sans"/>
+                <a:cs typeface="DejaVu Sans"/>
+              </a:rPr>
+              <a:t>Фиксирует дефекты и проверяет исправления.</a:t>
             </a:r>
           </a:p>
         </p:txBody>
@@ -6106,6 +6486,7 @@
               </a:defRPr>
             </a:defPPr>
             <a:lvl1pPr>
+              <a:buNone/>
               <a:defRPr sz="2100" b="1">
                 <a:solidFill>
                   <a:srgbClr val="252638"/>
@@ -6116,6 +6497,7 @@
               </a:defRPr>
             </a:lvl1pPr>
             <a:lvl2pPr>
+              <a:buNone/>
               <a:defRPr sz="2100" b="1">
                 <a:solidFill>
                   <a:srgbClr val="252638"/>
@@ -6126,6 +6508,7 @@
               </a:defRPr>
             </a:lvl2pPr>
             <a:lvl3pPr>
+              <a:buNone/>
               <a:defRPr sz="2100" b="1">
                 <a:solidFill>
                   <a:srgbClr val="252638"/>
@@ -6136,6 +6519,7 @@
               </a:defRPr>
             </a:lvl3pPr>
             <a:lvl4pPr>
+              <a:buNone/>
               <a:defRPr sz="2100" b="1">
                 <a:solidFill>
                   <a:srgbClr val="252638"/>
@@ -6146,6 +6530,7 @@
               </a:defRPr>
             </a:lvl4pPr>
             <a:lvl5pPr>
+              <a:buNone/>
               <a:defRPr sz="2100" b="1">
                 <a:solidFill>
                   <a:srgbClr val="252638"/>
@@ -6156,6 +6541,7 @@
               </a:defRPr>
             </a:lvl5pPr>
             <a:lvl6pPr>
+              <a:buNone/>
               <a:defRPr sz="2100" b="1">
                 <a:solidFill>
                   <a:srgbClr val="252638"/>
@@ -6166,6 +6552,7 @@
               </a:defRPr>
             </a:lvl6pPr>
             <a:lvl7pPr>
+              <a:buNone/>
               <a:defRPr sz="2100" b="1">
                 <a:solidFill>
                   <a:srgbClr val="252638"/>
@@ -6176,6 +6563,7 @@
               </a:defRPr>
             </a:lvl7pPr>
             <a:lvl8pPr>
+              <a:buNone/>
               <a:defRPr sz="2100" b="1">
                 <a:solidFill>
                   <a:srgbClr val="252638"/>
@@ -6186,6 +6574,7 @@
               </a:defRPr>
             </a:lvl8pPr>
             <a:lvl9pPr>
+              <a:buNone/>
               <a:defRPr sz="2100" b="1">
                 <a:solidFill>
                   <a:srgbClr val="252638"/>
@@ -6198,6 +6587,7 @@
           </a:lstStyle>
           <a:p xmlns:a="http://schemas.openxmlformats.org/drawingml/2006/main">
             <a:pPr>
+              <a:buNone/>
               <a:defRPr sz="2100" b="1">
                 <a:solidFill>
                   <a:srgbClr val="252638"/>
@@ -6263,6 +6653,7 @@
               </a:defRPr>
             </a:defPPr>
             <a:lvl1pPr>
+              <a:buNone/>
               <a:defRPr sz="1950" b="1">
                 <a:solidFill>
                   <a:srgbClr val="6145E6"/>
@@ -6273,6 +6664,7 @@
               </a:defRPr>
             </a:lvl1pPr>
             <a:lvl2pPr>
+              <a:buNone/>
               <a:defRPr sz="1950" b="1">
                 <a:solidFill>
                   <a:srgbClr val="6145E6"/>
@@ -6283,6 +6675,7 @@
               </a:defRPr>
             </a:lvl2pPr>
             <a:lvl3pPr>
+              <a:buNone/>
               <a:defRPr sz="1950" b="1">
                 <a:solidFill>
                   <a:srgbClr val="6145E6"/>
@@ -6293,6 +6686,7 @@
               </a:defRPr>
             </a:lvl3pPr>
             <a:lvl4pPr>
+              <a:buNone/>
               <a:defRPr sz="1950" b="1">
                 <a:solidFill>
                   <a:srgbClr val="6145E6"/>
@@ -6303,6 +6697,7 @@
               </a:defRPr>
             </a:lvl4pPr>
             <a:lvl5pPr>
+              <a:buNone/>
               <a:defRPr sz="1950" b="1">
                 <a:solidFill>
                   <a:srgbClr val="6145E6"/>
@@ -6313,6 +6708,7 @@
               </a:defRPr>
             </a:lvl5pPr>
             <a:lvl6pPr>
+              <a:buNone/>
               <a:defRPr sz="1950" b="1">
                 <a:solidFill>
                   <a:srgbClr val="6145E6"/>
@@ -6323,6 +6719,7 @@
               </a:defRPr>
             </a:lvl6pPr>
             <a:lvl7pPr>
+              <a:buNone/>
               <a:defRPr sz="1950" b="1">
                 <a:solidFill>
                   <a:srgbClr val="6145E6"/>
@@ -6333,6 +6730,7 @@
               </a:defRPr>
             </a:lvl7pPr>
             <a:lvl8pPr>
+              <a:buNone/>
               <a:defRPr sz="1950" b="1">
                 <a:solidFill>
                   <a:srgbClr val="6145E6"/>
@@ -6343,6 +6741,7 @@
               </a:defRPr>
             </a:lvl8pPr>
             <a:lvl9pPr>
+              <a:buNone/>
               <a:defRPr sz="1950" b="1">
                 <a:solidFill>
                   <a:srgbClr val="6145E6"/>
@@ -6355,6 +6754,7 @@
           </a:lstStyle>
           <a:p xmlns:a="http://schemas.openxmlformats.org/drawingml/2006/main">
             <a:pPr>
+              <a:buNone/>
               <a:defRPr sz="1950" b="1">
                 <a:solidFill>
                   <a:srgbClr val="6145E6"/>
@@ -6395,7 +6795,7 @@
         <p:spPr>
           <a:xfrm xmlns:a="http://schemas.openxmlformats.org/drawingml/2006/main">
             <a:off x="6191250" y="5067300"/>
-            <a:ext cx="5334000" cy="523875"/>
+            <a:ext cx="5334000" cy="628650"/>
           </a:xfrm>
           <a:prstGeom xmlns:a="http://schemas.openxmlformats.org/drawingml/2006/main" prst="rect">
             <a:avLst/>
@@ -6410,7 +6810,7 @@
           <a:bodyPr xmlns:a="http://schemas.openxmlformats.org/drawingml/2006/main" anchor="t"/>
           <a:lstStyle xmlns:a="http://schemas.openxmlformats.org/drawingml/2006/main">
             <a:defPPr>
-              <a:defRPr sz="1650" b="0">
+              <a:defRPr sz="1575" b="0">
                 <a:solidFill>
                   <a:srgbClr val="777383"/>
                 </a:solidFill>
@@ -6420,6 +6820,7 @@
               </a:defRPr>
             </a:defPPr>
             <a:lvl1pPr>
+              <a:buNone/>
               <a:defRPr sz="1650" b="0">
                 <a:solidFill>
                   <a:srgbClr val="777383"/>
@@ -6430,6 +6831,7 @@
               </a:defRPr>
             </a:lvl1pPr>
             <a:lvl2pPr>
+              <a:buNone/>
               <a:defRPr sz="1650" b="0">
                 <a:solidFill>
                   <a:srgbClr val="777383"/>
@@ -6440,6 +6842,7 @@
               </a:defRPr>
             </a:lvl2pPr>
             <a:lvl3pPr>
+              <a:buNone/>
               <a:defRPr sz="1650" b="0">
                 <a:solidFill>
                   <a:srgbClr val="777383"/>
@@ -6450,6 +6853,7 @@
               </a:defRPr>
             </a:lvl3pPr>
             <a:lvl4pPr>
+              <a:buNone/>
               <a:defRPr sz="1650" b="0">
                 <a:solidFill>
                   <a:srgbClr val="777383"/>
@@ -6460,6 +6864,7 @@
               </a:defRPr>
             </a:lvl4pPr>
             <a:lvl5pPr>
+              <a:buNone/>
               <a:defRPr sz="1650" b="0">
                 <a:solidFill>
                   <a:srgbClr val="777383"/>
@@ -6470,6 +6875,7 @@
               </a:defRPr>
             </a:lvl5pPr>
             <a:lvl6pPr>
+              <a:buNone/>
               <a:defRPr sz="1650" b="0">
                 <a:solidFill>
                   <a:srgbClr val="777383"/>
@@ -6480,6 +6886,7 @@
               </a:defRPr>
             </a:lvl6pPr>
             <a:lvl7pPr>
+              <a:buNone/>
               <a:defRPr sz="1650" b="0">
                 <a:solidFill>
                   <a:srgbClr val="777383"/>
@@ -6490,6 +6897,7 @@
               </a:defRPr>
             </a:lvl7pPr>
             <a:lvl8pPr>
+              <a:buNone/>
               <a:defRPr sz="1650" b="0">
                 <a:solidFill>
                   <a:srgbClr val="777383"/>
@@ -6500,6 +6908,7 @@
               </a:defRPr>
             </a:lvl8pPr>
             <a:lvl9pPr>
+              <a:buNone/>
               <a:defRPr sz="1650" b="0">
                 <a:solidFill>
                   <a:srgbClr val="777383"/>
@@ -6512,6 +6921,7 @@
           </a:lstStyle>
           <a:p xmlns:a="http://schemas.openxmlformats.org/drawingml/2006/main">
             <a:pPr>
+              <a:buNone/>
               <a:defRPr sz="1650" b="0">
                 <a:solidFill>
                   <a:srgbClr val="777383"/>
@@ -6522,7 +6932,7 @@
               </a:defRPr>
             </a:pPr>
             <a:r>
-              <a:rPr sz="1650" b="0">
+              <a:rPr sz="1575" b="0">
                 <a:solidFill>
                   <a:srgbClr val="777383"/>
                 </a:solidFill>
@@ -6530,7 +6940,188 @@
                 <a:ea typeface="DejaVu Sans"/>
                 <a:cs typeface="DejaVu Sans"/>
               </a:rPr>
-              <a:t>Требования, сроки, приёмка</a:t>
+              <a:t>Уточняет требования, ведёт Trello и сроки.</a:t>
+            </a:r>
+          </a:p>
+          <a:p xmlns:a="http://schemas.openxmlformats.org/drawingml/2006/main">
+            <a:pPr>
+              <a:buNone/>
+              <a:defRPr sz="1650" b="0">
+                <a:solidFill>
+                  <a:srgbClr val="777383"/>
+                </a:solidFill>
+                <a:latin typeface="DejaVu Sans"/>
+                <a:ea typeface="DejaVu Sans"/>
+                <a:cs typeface="DejaVu Sans"/>
+              </a:defRPr>
+            </a:pPr>
+            <a:r>
+              <a:rPr sz="1575" b="0">
+                <a:solidFill>
+                  <a:srgbClr val="777383"/>
+                </a:solidFill>
+                <a:latin typeface="DejaVu Sans"/>
+                <a:ea typeface="DejaVu Sans"/>
+                <a:cs typeface="DejaVu Sans"/>
+              </a:rPr>
+              <a:t>Организует согласование и приёмку результата.</a:t>
+            </a:r>
+          </a:p>
+        </p:txBody>
+      </p:sp>
+      <p:sp>
+        <p:nvSpPr>
+          <p:cNvPr id="14" name="shared">
+            <a:extLst xmlns:a="http://schemas.openxmlformats.org/drawingml/2006/main">
+              <a:ext uri="{FF2B5EF4-FFF2-40B4-BE49-F238E27FC236}">
+                <a16:creationId xmlns:a16="http://schemas.microsoft.com/office/drawing/2014/main" id="{8BF506F3-2FC3-41A9-BD21-FB31076B83BE}"/>
+              </a:ext>
+            </a:extLst>
+          </p:cNvPr>
+          <p:cNvSpPr>
+            <a:spLocks xmlns:a="http://schemas.openxmlformats.org/drawingml/2006/main" noGrp="1"/>
+          </p:cNvSpPr>
+          <p:nvPr/>
+        </p:nvSpPr>
+        <p:spPr>
+          <a:xfrm xmlns:a="http://schemas.openxmlformats.org/drawingml/2006/main">
+            <a:off x="609600" y="5905500"/>
+            <a:ext cx="10668000" cy="333375"/>
+          </a:xfrm>
+          <a:prstGeom xmlns:a="http://schemas.openxmlformats.org/drawingml/2006/main" prst="rect">
+            <a:avLst/>
+          </a:prstGeom>
+          <a:noFill xmlns:a="http://schemas.openxmlformats.org/drawingml/2006/main"/>
+          <a:ln xmlns:a="http://schemas.openxmlformats.org/drawingml/2006/main" w="0">
+            <a:noFill/>
+            <a:prstDash val="solid"/>
+          </a:ln>
+        </p:spPr>
+        <p:txBody>
+          <a:bodyPr xmlns:a="http://schemas.openxmlformats.org/drawingml/2006/main" anchor="t"/>
+          <a:lstStyle xmlns:a="http://schemas.openxmlformats.org/drawingml/2006/main">
+            <a:defPPr>
+              <a:defRPr sz="1500">
+                <a:solidFill>
+                  <a:srgbClr val="777383"/>
+                </a:solidFill>
+                <a:latin typeface="DejaVu Sans"/>
+                <a:ea typeface="DejaVu Sans"/>
+                <a:cs typeface="DejaVu Sans"/>
+              </a:defRPr>
+            </a:defPPr>
+            <a:lvl1pPr>
+              <a:defRPr sz="1500">
+                <a:solidFill>
+                  <a:srgbClr val="777383"/>
+                </a:solidFill>
+                <a:latin typeface="DejaVu Sans"/>
+                <a:ea typeface="DejaVu Sans"/>
+                <a:cs typeface="DejaVu Sans"/>
+              </a:defRPr>
+            </a:lvl1pPr>
+            <a:lvl2pPr>
+              <a:defRPr sz="1500">
+                <a:solidFill>
+                  <a:srgbClr val="777383"/>
+                </a:solidFill>
+                <a:latin typeface="DejaVu Sans"/>
+                <a:ea typeface="DejaVu Sans"/>
+                <a:cs typeface="DejaVu Sans"/>
+              </a:defRPr>
+            </a:lvl2pPr>
+            <a:lvl3pPr>
+              <a:defRPr sz="1500">
+                <a:solidFill>
+                  <a:srgbClr val="777383"/>
+                </a:solidFill>
+                <a:latin typeface="DejaVu Sans"/>
+                <a:ea typeface="DejaVu Sans"/>
+                <a:cs typeface="DejaVu Sans"/>
+              </a:defRPr>
+            </a:lvl3pPr>
+            <a:lvl4pPr>
+              <a:defRPr sz="1500">
+                <a:solidFill>
+                  <a:srgbClr val="777383"/>
+                </a:solidFill>
+                <a:latin typeface="DejaVu Sans"/>
+                <a:ea typeface="DejaVu Sans"/>
+                <a:cs typeface="DejaVu Sans"/>
+              </a:defRPr>
+            </a:lvl4pPr>
+            <a:lvl5pPr>
+              <a:defRPr sz="1500">
+                <a:solidFill>
+                  <a:srgbClr val="777383"/>
+                </a:solidFill>
+                <a:latin typeface="DejaVu Sans"/>
+                <a:ea typeface="DejaVu Sans"/>
+                <a:cs typeface="DejaVu Sans"/>
+              </a:defRPr>
+            </a:lvl5pPr>
+            <a:lvl6pPr>
+              <a:defRPr sz="1500">
+                <a:solidFill>
+                  <a:srgbClr val="777383"/>
+                </a:solidFill>
+                <a:latin typeface="DejaVu Sans"/>
+                <a:ea typeface="DejaVu Sans"/>
+                <a:cs typeface="DejaVu Sans"/>
+              </a:defRPr>
+            </a:lvl6pPr>
+            <a:lvl7pPr>
+              <a:defRPr sz="1500">
+                <a:solidFill>
+                  <a:srgbClr val="777383"/>
+                </a:solidFill>
+                <a:latin typeface="DejaVu Sans"/>
+                <a:ea typeface="DejaVu Sans"/>
+                <a:cs typeface="DejaVu Sans"/>
+              </a:defRPr>
+            </a:lvl7pPr>
+            <a:lvl8pPr>
+              <a:defRPr sz="1500">
+                <a:solidFill>
+                  <a:srgbClr val="777383"/>
+                </a:solidFill>
+                <a:latin typeface="DejaVu Sans"/>
+                <a:ea typeface="DejaVu Sans"/>
+                <a:cs typeface="DejaVu Sans"/>
+              </a:defRPr>
+            </a:lvl8pPr>
+            <a:lvl9pPr>
+              <a:defRPr sz="1500">
+                <a:solidFill>
+                  <a:srgbClr val="777383"/>
+                </a:solidFill>
+                <a:latin typeface="DejaVu Sans"/>
+                <a:ea typeface="DejaVu Sans"/>
+                <a:cs typeface="DejaVu Sans"/>
+              </a:defRPr>
+            </a:lvl9pPr>
+          </a:lstStyle>
+          <a:p xmlns:a="http://schemas.openxmlformats.org/drawingml/2006/main">
+            <a:pPr>
+              <a:defRPr sz="1500">
+                <a:solidFill>
+                  <a:srgbClr val="777383"/>
+                </a:solidFill>
+                <a:latin typeface="DejaVu Sans"/>
+                <a:ea typeface="DejaVu Sans"/>
+                <a:cs typeface="DejaVu Sans"/>
+              </a:defRPr>
+            </a:pPr>
+            <a:r>
+              <a:rPr sz="1500">
+                <a:solidFill>
+                  <a:srgbClr val="777383"/>
+                </a:solidFill>
+                <a:latin typeface="DejaVu Sans"/>
+                <a:ea typeface="DejaVu Sans"/>
+                <a:cs typeface="DejaVu Sans"/>
+              </a:rPr>
+              <a:t>Для каждого модуля отдельно определены разработка, проверка и критерии приёмки.</a:t>
             </a:r>
           </a:p>
         </p:txBody>
@@ -6546,6 +7137,1300 @@
 </file>
 
 <file path=ppt/slides/slide3.xml><?xml version="1.0" encoding="utf-8"?>
+<p:sld xmlns:p="http://schemas.openxmlformats.org/presentationml/2006/main">
+  <p:cSld>
+    <p:bg>
+      <p:bgPr>
+        <a:solidFill xmlns:a="http://schemas.openxmlformats.org/drawingml/2006/main">
+          <a:srgbClr val="FAF9FF"/>
+        </a:solidFill>
+      </p:bgPr>
+    </p:bg>
+    <p:spTree>
+      <p:nvGrpSpPr>
+        <p:cNvPr id="1" name=""/>
+        <p:cNvGrpSpPr/>
+        <p:nvPr/>
+      </p:nvGrpSpPr>
+      <p:grpSpPr>
+        <a:xfrm xmlns:a="http://schemas.openxmlformats.org/drawingml/2006/main"/>
+      </p:grpSpPr>
+      <p:sp>
+        <p:nvSpPr>
+          <p:cNvPr id="8" name="series">
+            <a:extLst xmlns:a="http://schemas.openxmlformats.org/drawingml/2006/main">
+              <a:ext uri="{FF2B5EF4-FFF2-40B4-BE49-F238E27FC236}">
+                <a16:creationId xmlns:a16="http://schemas.microsoft.com/office/drawing/2014/main" id="{9E3D0ACC-32FB-4388-AAC1-6879AFA9239B}"/>
+              </a:ext>
+            </a:extLst>
+          </p:cNvPr>
+          <p:cNvSpPr>
+            <a:spLocks xmlns:a="http://schemas.openxmlformats.org/drawingml/2006/main" noGrp="1"/>
+          </p:cNvSpPr>
+          <p:nvPr/>
+        </p:nvSpPr>
+        <p:spPr>
+          <a:xfrm xmlns:a="http://schemas.openxmlformats.org/drawingml/2006/main">
+            <a:off x="609600" y="285750"/>
+            <a:ext cx="10477500" cy="285750"/>
+          </a:xfrm>
+          <a:prstGeom xmlns:a="http://schemas.openxmlformats.org/drawingml/2006/main" prst="rect">
+            <a:avLst/>
+          </a:prstGeom>
+          <a:noFill xmlns:a="http://schemas.openxmlformats.org/drawingml/2006/main"/>
+          <a:ln xmlns:a="http://schemas.openxmlformats.org/drawingml/2006/main" w="0">
+            <a:noFill/>
+            <a:prstDash val="solid"/>
+          </a:ln>
+        </p:spPr>
+        <p:txBody>
+          <a:bodyPr xmlns:a="http://schemas.openxmlformats.org/drawingml/2006/main" anchor="t"/>
+          <a:lstStyle xmlns:a="http://schemas.openxmlformats.org/drawingml/2006/main">
+            <a:defPPr>
+              <a:defRPr sz="1125" b="1">
+                <a:solidFill>
+                  <a:srgbClr val="6145E6"/>
+                </a:solidFill>
+                <a:latin typeface="DejaVu Sans"/>
+                <a:ea typeface="DejaVu Sans"/>
+                <a:cs typeface="DejaVu Sans"/>
+              </a:defRPr>
+            </a:defPPr>
+            <a:lvl1pPr>
+              <a:buNone/>
+              <a:defRPr sz="1125" b="1">
+                <a:solidFill>
+                  <a:srgbClr val="6145E6"/>
+                </a:solidFill>
+                <a:latin typeface="DejaVu Sans"/>
+                <a:ea typeface="DejaVu Sans"/>
+                <a:cs typeface="DejaVu Sans"/>
+              </a:defRPr>
+            </a:lvl1pPr>
+            <a:lvl2pPr>
+              <a:buNone/>
+              <a:defRPr sz="1125" b="1">
+                <a:solidFill>
+                  <a:srgbClr val="6145E6"/>
+                </a:solidFill>
+                <a:latin typeface="DejaVu Sans"/>
+                <a:ea typeface="DejaVu Sans"/>
+                <a:cs typeface="DejaVu Sans"/>
+              </a:defRPr>
+            </a:lvl2pPr>
+            <a:lvl3pPr>
+              <a:buNone/>
+              <a:defRPr sz="1125" b="1">
+                <a:solidFill>
+                  <a:srgbClr val="6145E6"/>
+                </a:solidFill>
+                <a:latin typeface="DejaVu Sans"/>
+                <a:ea typeface="DejaVu Sans"/>
+                <a:cs typeface="DejaVu Sans"/>
+              </a:defRPr>
+            </a:lvl3pPr>
+            <a:lvl4pPr>
+              <a:buNone/>
+              <a:defRPr sz="1125" b="1">
+                <a:solidFill>
+                  <a:srgbClr val="6145E6"/>
+                </a:solidFill>
+                <a:latin typeface="DejaVu Sans"/>
+                <a:ea typeface="DejaVu Sans"/>
+                <a:cs typeface="DejaVu Sans"/>
+              </a:defRPr>
+            </a:lvl4pPr>
+            <a:lvl5pPr>
+              <a:buNone/>
+              <a:defRPr sz="1125" b="1">
+                <a:solidFill>
+                  <a:srgbClr val="6145E6"/>
+                </a:solidFill>
+                <a:latin typeface="DejaVu Sans"/>
+                <a:ea typeface="DejaVu Sans"/>
+                <a:cs typeface="DejaVu Sans"/>
+              </a:defRPr>
+            </a:lvl5pPr>
+            <a:lvl6pPr>
+              <a:buNone/>
+              <a:defRPr sz="1125" b="1">
+                <a:solidFill>
+                  <a:srgbClr val="6145E6"/>
+                </a:solidFill>
+                <a:latin typeface="DejaVu Sans"/>
+                <a:ea typeface="DejaVu Sans"/>
+                <a:cs typeface="DejaVu Sans"/>
+              </a:defRPr>
+            </a:lvl6pPr>
+            <a:lvl7pPr>
+              <a:buNone/>
+              <a:defRPr sz="1125" b="1">
+                <a:solidFill>
+                  <a:srgbClr val="6145E6"/>
+                </a:solidFill>
+                <a:latin typeface="DejaVu Sans"/>
+                <a:ea typeface="DejaVu Sans"/>
+                <a:cs typeface="DejaVu Sans"/>
+              </a:defRPr>
+            </a:lvl7pPr>
+            <a:lvl8pPr>
+              <a:buNone/>
+              <a:defRPr sz="1125" b="1">
+                <a:solidFill>
+                  <a:srgbClr val="6145E6"/>
+                </a:solidFill>
+                <a:latin typeface="DejaVu Sans"/>
+                <a:ea typeface="DejaVu Sans"/>
+                <a:cs typeface="DejaVu Sans"/>
+              </a:defRPr>
+            </a:lvl8pPr>
+            <a:lvl9pPr>
+              <a:buNone/>
+              <a:defRPr sz="1125" b="1">
+                <a:solidFill>
+                  <a:srgbClr val="6145E6"/>
+                </a:solidFill>
+                <a:latin typeface="DejaVu Sans"/>
+                <a:ea typeface="DejaVu Sans"/>
+                <a:cs typeface="DejaVu Sans"/>
+              </a:defRPr>
+            </a:lvl9pPr>
+          </a:lstStyle>
+          <a:p xmlns:a="http://schemas.openxmlformats.org/drawingml/2006/main">
+            <a:pPr>
+              <a:buNone/>
+              <a:defRPr sz="1125" b="1">
+                <a:solidFill>
+                  <a:srgbClr val="6145E6"/>
+                </a:solidFill>
+                <a:latin typeface="DejaVu Sans"/>
+                <a:ea typeface="DejaVu Sans"/>
+                <a:cs typeface="DejaVu Sans"/>
+              </a:defRPr>
+            </a:pPr>
+            <a:r>
+              <a:rPr sz="1125" b="1">
+                <a:solidFill>
+                  <a:srgbClr val="6145E6"/>
+                </a:solidFill>
+                <a:latin typeface="DejaVu Sans"/>
+                <a:ea typeface="DejaVu Sans"/>
+                <a:cs typeface="DejaVu Sans"/>
+              </a:rPr>
+              <a:t>ОНЛАЙН КУРСЫ / УЧЕБНЫЙ ПРОЕКТ</a:t>
+            </a:r>
+          </a:p>
+        </p:txBody>
+      </p:sp>
+      <p:sp>
+        <p:nvSpPr>
+          <p:cNvPr id="2" name="title">
+            <a:extLst xmlns:a="http://schemas.openxmlformats.org/drawingml/2006/main">
+              <a:ext uri="{FF2B5EF4-FFF2-40B4-BE49-F238E27FC236}">
+                <a16:creationId xmlns:a16="http://schemas.microsoft.com/office/drawing/2014/main" id="{0A0FED90-7599-4671-B59A-7CD6174A012F}"/>
+              </a:ext>
+            </a:extLst>
+          </p:cNvPr>
+          <p:cNvSpPr>
+            <a:spLocks xmlns:a="http://schemas.openxmlformats.org/drawingml/2006/main" noGrp="1"/>
+          </p:cNvSpPr>
+          <p:nvPr/>
+        </p:nvSpPr>
+        <p:spPr>
+          <a:xfrm xmlns:a="http://schemas.openxmlformats.org/drawingml/2006/main">
+            <a:off x="609600" y="895350"/>
+            <a:ext cx="10953750" cy="1143000"/>
+          </a:xfrm>
+          <a:prstGeom xmlns:a="http://schemas.openxmlformats.org/drawingml/2006/main" prst="rect">
+            <a:avLst/>
+          </a:prstGeom>
+          <a:noFill xmlns:a="http://schemas.openxmlformats.org/drawingml/2006/main"/>
+          <a:ln xmlns:a="http://schemas.openxmlformats.org/drawingml/2006/main" w="0">
+            <a:noFill/>
+            <a:prstDash val="solid"/>
+          </a:ln>
+        </p:spPr>
+        <p:txBody>
+          <a:bodyPr xmlns:a="http://schemas.openxmlformats.org/drawingml/2006/main" anchor="t"/>
+          <a:lstStyle xmlns:a="http://schemas.openxmlformats.org/drawingml/2006/main">
+            <a:defPPr>
+              <a:defRPr sz="3150" b="1">
+                <a:solidFill>
+                  <a:srgbClr val="252638"/>
+                </a:solidFill>
+                <a:latin typeface="DejaVu Sans"/>
+                <a:ea typeface="DejaVu Sans"/>
+                <a:cs typeface="DejaVu Sans"/>
+              </a:defRPr>
+            </a:defPPr>
+            <a:lvl1pPr>
+              <a:buNone/>
+              <a:defRPr sz="3600" b="1">
+                <a:solidFill>
+                  <a:srgbClr val="252638"/>
+                </a:solidFill>
+                <a:latin typeface="DejaVu Sans"/>
+                <a:ea typeface="DejaVu Sans"/>
+                <a:cs typeface="DejaVu Sans"/>
+              </a:defRPr>
+            </a:lvl1pPr>
+            <a:lvl2pPr>
+              <a:buNone/>
+              <a:defRPr sz="3600" b="1">
+                <a:solidFill>
+                  <a:srgbClr val="252638"/>
+                </a:solidFill>
+                <a:latin typeface="DejaVu Sans"/>
+                <a:ea typeface="DejaVu Sans"/>
+                <a:cs typeface="DejaVu Sans"/>
+              </a:defRPr>
+            </a:lvl2pPr>
+            <a:lvl3pPr>
+              <a:buNone/>
+              <a:defRPr sz="3600" b="1">
+                <a:solidFill>
+                  <a:srgbClr val="252638"/>
+                </a:solidFill>
+                <a:latin typeface="DejaVu Sans"/>
+                <a:ea typeface="DejaVu Sans"/>
+                <a:cs typeface="DejaVu Sans"/>
+              </a:defRPr>
+            </a:lvl3pPr>
+            <a:lvl4pPr>
+              <a:buNone/>
+              <a:defRPr sz="3600" b="1">
+                <a:solidFill>
+                  <a:srgbClr val="252638"/>
+                </a:solidFill>
+                <a:latin typeface="DejaVu Sans"/>
+                <a:ea typeface="DejaVu Sans"/>
+                <a:cs typeface="DejaVu Sans"/>
+              </a:defRPr>
+            </a:lvl4pPr>
+            <a:lvl5pPr>
+              <a:buNone/>
+              <a:defRPr sz="3600" b="1">
+                <a:solidFill>
+                  <a:srgbClr val="252638"/>
+                </a:solidFill>
+                <a:latin typeface="DejaVu Sans"/>
+                <a:ea typeface="DejaVu Sans"/>
+                <a:cs typeface="DejaVu Sans"/>
+              </a:defRPr>
+            </a:lvl5pPr>
+            <a:lvl6pPr>
+              <a:buNone/>
+              <a:defRPr sz="3600" b="1">
+                <a:solidFill>
+                  <a:srgbClr val="252638"/>
+                </a:solidFill>
+                <a:latin typeface="DejaVu Sans"/>
+                <a:ea typeface="DejaVu Sans"/>
+                <a:cs typeface="DejaVu Sans"/>
+              </a:defRPr>
+            </a:lvl6pPr>
+            <a:lvl7pPr>
+              <a:buNone/>
+              <a:defRPr sz="3600" b="1">
+                <a:solidFill>
+                  <a:srgbClr val="252638"/>
+                </a:solidFill>
+                <a:latin typeface="DejaVu Sans"/>
+                <a:ea typeface="DejaVu Sans"/>
+                <a:cs typeface="DejaVu Sans"/>
+              </a:defRPr>
+            </a:lvl7pPr>
+            <a:lvl8pPr>
+              <a:buNone/>
+              <a:defRPr sz="3600" b="1">
+                <a:solidFill>
+                  <a:srgbClr val="252638"/>
+                </a:solidFill>
+                <a:latin typeface="DejaVu Sans"/>
+                <a:ea typeface="DejaVu Sans"/>
+                <a:cs typeface="DejaVu Sans"/>
+              </a:defRPr>
+            </a:lvl8pPr>
+            <a:lvl9pPr>
+              <a:buNone/>
+              <a:defRPr sz="3600" b="1">
+                <a:solidFill>
+                  <a:srgbClr val="252638"/>
+                </a:solidFill>
+                <a:latin typeface="DejaVu Sans"/>
+                <a:ea typeface="DejaVu Sans"/>
+                <a:cs typeface="DejaVu Sans"/>
+              </a:defRPr>
+            </a:lvl9pPr>
+          </a:lstStyle>
+          <a:p xmlns:a="http://schemas.openxmlformats.org/drawingml/2006/main">
+            <a:pPr>
+              <a:buNone/>
+              <a:defRPr sz="3600" b="1">
+                <a:solidFill>
+                  <a:srgbClr val="252638"/>
+                </a:solidFill>
+                <a:latin typeface="DejaVu Sans"/>
+                <a:ea typeface="DejaVu Sans"/>
+                <a:cs typeface="DejaVu Sans"/>
+              </a:defRPr>
+            </a:pPr>
+            <a:r>
+              <a:rPr sz="3150" b="1">
+                <a:solidFill>
+                  <a:srgbClr val="252638"/>
+                </a:solidFill>
+                <a:latin typeface="DejaVu Sans"/>
+                <a:ea typeface="DejaVu Sans"/>
+                <a:cs typeface="DejaVu Sans"/>
+              </a:rPr>
+              <a:t>Прошедшая неделя: организация проекта</a:t>
+            </a:r>
+          </a:p>
+        </p:txBody>
+      </p:sp>
+      <p:sp>
+        <p:nvSpPr>
+          <p:cNvPr id="3" name="page">
+            <a:extLst xmlns:a="http://schemas.openxmlformats.org/drawingml/2006/main">
+              <a:ext uri="{FF2B5EF4-FFF2-40B4-BE49-F238E27FC236}">
+                <a16:creationId xmlns:a16="http://schemas.microsoft.com/office/drawing/2014/main" id="{D16B2D9A-B78F-48EE-9AD9-CDDEB123ECA9}"/>
+              </a:ext>
+            </a:extLst>
+          </p:cNvPr>
+          <p:cNvSpPr>
+            <a:spLocks xmlns:a="http://schemas.openxmlformats.org/drawingml/2006/main" noGrp="1"/>
+          </p:cNvSpPr>
+          <p:nvPr/>
+        </p:nvSpPr>
+        <p:spPr>
+          <a:xfrm xmlns:a="http://schemas.openxmlformats.org/drawingml/2006/main">
+            <a:off x="11049000" y="6286500"/>
+            <a:ext cx="571500" cy="266700"/>
+          </a:xfrm>
+          <a:prstGeom xmlns:a="http://schemas.openxmlformats.org/drawingml/2006/main" prst="rect">
+            <a:avLst/>
+          </a:prstGeom>
+          <a:noFill xmlns:a="http://schemas.openxmlformats.org/drawingml/2006/main"/>
+          <a:ln xmlns:a="http://schemas.openxmlformats.org/drawingml/2006/main" w="0">
+            <a:noFill/>
+            <a:prstDash val="solid"/>
+          </a:ln>
+        </p:spPr>
+        <p:txBody>
+          <a:bodyPr xmlns:a="http://schemas.openxmlformats.org/drawingml/2006/main" anchor="t"/>
+          <a:lstStyle xmlns:a="http://schemas.openxmlformats.org/drawingml/2006/main">
+            <a:defPPr>
+              <a:defRPr sz="1200" b="0">
+                <a:solidFill>
+                  <a:srgbClr val="858393"/>
+                </a:solidFill>
+                <a:latin typeface="DejaVu Sans"/>
+                <a:ea typeface="DejaVu Sans"/>
+                <a:cs typeface="DejaVu Sans"/>
+              </a:defRPr>
+            </a:defPPr>
+            <a:lvl1pPr>
+              <a:buNone/>
+              <a:defRPr sz="1200" b="0">
+                <a:solidFill>
+                  <a:srgbClr val="858393"/>
+                </a:solidFill>
+                <a:latin typeface="DejaVu Sans"/>
+                <a:ea typeface="DejaVu Sans"/>
+                <a:cs typeface="DejaVu Sans"/>
+              </a:defRPr>
+            </a:lvl1pPr>
+            <a:lvl2pPr>
+              <a:buNone/>
+              <a:defRPr sz="1200" b="0">
+                <a:solidFill>
+                  <a:srgbClr val="858393"/>
+                </a:solidFill>
+                <a:latin typeface="DejaVu Sans"/>
+                <a:ea typeface="DejaVu Sans"/>
+                <a:cs typeface="DejaVu Sans"/>
+              </a:defRPr>
+            </a:lvl2pPr>
+            <a:lvl3pPr>
+              <a:buNone/>
+              <a:defRPr sz="1200" b="0">
+                <a:solidFill>
+                  <a:srgbClr val="858393"/>
+                </a:solidFill>
+                <a:latin typeface="DejaVu Sans"/>
+                <a:ea typeface="DejaVu Sans"/>
+                <a:cs typeface="DejaVu Sans"/>
+              </a:defRPr>
+            </a:lvl3pPr>
+            <a:lvl4pPr>
+              <a:buNone/>
+              <a:defRPr sz="1200" b="0">
+                <a:solidFill>
+                  <a:srgbClr val="858393"/>
+                </a:solidFill>
+                <a:latin typeface="DejaVu Sans"/>
+                <a:ea typeface="DejaVu Sans"/>
+                <a:cs typeface="DejaVu Sans"/>
+              </a:defRPr>
+            </a:lvl4pPr>
+            <a:lvl5pPr>
+              <a:buNone/>
+              <a:defRPr sz="1200" b="0">
+                <a:solidFill>
+                  <a:srgbClr val="858393"/>
+                </a:solidFill>
+                <a:latin typeface="DejaVu Sans"/>
+                <a:ea typeface="DejaVu Sans"/>
+                <a:cs typeface="DejaVu Sans"/>
+              </a:defRPr>
+            </a:lvl5pPr>
+            <a:lvl6pPr>
+              <a:buNone/>
+              <a:defRPr sz="1200" b="0">
+                <a:solidFill>
+                  <a:srgbClr val="858393"/>
+                </a:solidFill>
+                <a:latin typeface="DejaVu Sans"/>
+                <a:ea typeface="DejaVu Sans"/>
+                <a:cs typeface="DejaVu Sans"/>
+              </a:defRPr>
+            </a:lvl6pPr>
+            <a:lvl7pPr>
+              <a:buNone/>
+              <a:defRPr sz="1200" b="0">
+                <a:solidFill>
+                  <a:srgbClr val="858393"/>
+                </a:solidFill>
+                <a:latin typeface="DejaVu Sans"/>
+                <a:ea typeface="DejaVu Sans"/>
+                <a:cs typeface="DejaVu Sans"/>
+              </a:defRPr>
+            </a:lvl7pPr>
+            <a:lvl8pPr>
+              <a:buNone/>
+              <a:defRPr sz="1200" b="0">
+                <a:solidFill>
+                  <a:srgbClr val="858393"/>
+                </a:solidFill>
+                <a:latin typeface="DejaVu Sans"/>
+                <a:ea typeface="DejaVu Sans"/>
+                <a:cs typeface="DejaVu Sans"/>
+              </a:defRPr>
+            </a:lvl8pPr>
+            <a:lvl9pPr>
+              <a:buNone/>
+              <a:defRPr sz="1200" b="0">
+                <a:solidFill>
+                  <a:srgbClr val="858393"/>
+                </a:solidFill>
+                <a:latin typeface="DejaVu Sans"/>
+                <a:ea typeface="DejaVu Sans"/>
+                <a:cs typeface="DejaVu Sans"/>
+              </a:defRPr>
+            </a:lvl9pPr>
+          </a:lstStyle>
+          <a:p xmlns:a="http://schemas.openxmlformats.org/drawingml/2006/main">
+            <a:pPr>
+              <a:buNone/>
+              <a:defRPr sz="1200" b="0">
+                <a:solidFill>
+                  <a:srgbClr val="858393"/>
+                </a:solidFill>
+                <a:latin typeface="DejaVu Sans"/>
+                <a:ea typeface="DejaVu Sans"/>
+                <a:cs typeface="DejaVu Sans"/>
+              </a:defRPr>
+            </a:pPr>
+            <a:r>
+              <a:rPr sz="1200" b="0">
+                <a:solidFill>
+                  <a:srgbClr val="858393"/>
+                </a:solidFill>
+                <a:latin typeface="DejaVu Sans"/>
+                <a:ea typeface="DejaVu Sans"/>
+                <a:cs typeface="DejaVu Sans"/>
+              </a:rPr>
+              <a:t>03</a:t>
+            </a:r>
+          </a:p>
+        </p:txBody>
+      </p:sp>
+      <p:sp>
+        <p:nvSpPr>
+          <p:cNvPr id="4" name="past">
+            <a:extLst xmlns:a="http://schemas.openxmlformats.org/drawingml/2006/main">
+              <a:ext uri="{FF2B5EF4-FFF2-40B4-BE49-F238E27FC236}">
+                <a16:creationId xmlns:a16="http://schemas.microsoft.com/office/drawing/2014/main" id="{435726DC-E1F5-4CAA-B236-9EB6A38F701C}"/>
+              </a:ext>
+            </a:extLst>
+          </p:cNvPr>
+          <p:cNvSpPr>
+            <a:spLocks xmlns:a="http://schemas.openxmlformats.org/drawingml/2006/main" noGrp="1"/>
+          </p:cNvSpPr>
+          <p:nvPr/>
+        </p:nvSpPr>
+        <p:spPr>
+          <a:xfrm xmlns:a="http://schemas.openxmlformats.org/drawingml/2006/main">
+            <a:off x="609600" y="2190750"/>
+            <a:ext cx="10096500" cy="476250"/>
+          </a:xfrm>
+          <a:prstGeom xmlns:a="http://schemas.openxmlformats.org/drawingml/2006/main" prst="rect">
+            <a:avLst/>
+          </a:prstGeom>
+          <a:noFill xmlns:a="http://schemas.openxmlformats.org/drawingml/2006/main"/>
+          <a:ln xmlns:a="http://schemas.openxmlformats.org/drawingml/2006/main" w="0">
+            <a:noFill/>
+            <a:prstDash val="solid"/>
+          </a:ln>
+        </p:spPr>
+        <p:txBody>
+          <a:bodyPr xmlns:a="http://schemas.openxmlformats.org/drawingml/2006/main" anchor="t"/>
+          <a:lstStyle xmlns:a="http://schemas.openxmlformats.org/drawingml/2006/main">
+            <a:defPPr>
+              <a:defRPr sz="2250" b="1">
+                <a:solidFill>
+                  <a:srgbClr val="252638"/>
+                </a:solidFill>
+                <a:latin typeface="DejaVu Sans"/>
+                <a:ea typeface="DejaVu Sans"/>
+                <a:cs typeface="DejaVu Sans"/>
+              </a:defRPr>
+            </a:defPPr>
+            <a:lvl1pPr>
+              <a:buNone/>
+              <a:defRPr sz="2250" b="1">
+                <a:solidFill>
+                  <a:srgbClr val="252638"/>
+                </a:solidFill>
+                <a:latin typeface="DejaVu Sans"/>
+                <a:ea typeface="DejaVu Sans"/>
+                <a:cs typeface="DejaVu Sans"/>
+              </a:defRPr>
+            </a:lvl1pPr>
+            <a:lvl2pPr>
+              <a:buNone/>
+              <a:defRPr sz="2250" b="1">
+                <a:solidFill>
+                  <a:srgbClr val="252638"/>
+                </a:solidFill>
+                <a:latin typeface="DejaVu Sans"/>
+                <a:ea typeface="DejaVu Sans"/>
+                <a:cs typeface="DejaVu Sans"/>
+              </a:defRPr>
+            </a:lvl2pPr>
+            <a:lvl3pPr>
+              <a:buNone/>
+              <a:defRPr sz="2250" b="1">
+                <a:solidFill>
+                  <a:srgbClr val="252638"/>
+                </a:solidFill>
+                <a:latin typeface="DejaVu Sans"/>
+                <a:ea typeface="DejaVu Sans"/>
+                <a:cs typeface="DejaVu Sans"/>
+              </a:defRPr>
+            </a:lvl3pPr>
+            <a:lvl4pPr>
+              <a:buNone/>
+              <a:defRPr sz="2250" b="1">
+                <a:solidFill>
+                  <a:srgbClr val="252638"/>
+                </a:solidFill>
+                <a:latin typeface="DejaVu Sans"/>
+                <a:ea typeface="DejaVu Sans"/>
+                <a:cs typeface="DejaVu Sans"/>
+              </a:defRPr>
+            </a:lvl4pPr>
+            <a:lvl5pPr>
+              <a:buNone/>
+              <a:defRPr sz="2250" b="1">
+                <a:solidFill>
+                  <a:srgbClr val="252638"/>
+                </a:solidFill>
+                <a:latin typeface="DejaVu Sans"/>
+                <a:ea typeface="DejaVu Sans"/>
+                <a:cs typeface="DejaVu Sans"/>
+              </a:defRPr>
+            </a:lvl5pPr>
+            <a:lvl6pPr>
+              <a:buNone/>
+              <a:defRPr sz="2250" b="1">
+                <a:solidFill>
+                  <a:srgbClr val="252638"/>
+                </a:solidFill>
+                <a:latin typeface="DejaVu Sans"/>
+                <a:ea typeface="DejaVu Sans"/>
+                <a:cs typeface="DejaVu Sans"/>
+              </a:defRPr>
+            </a:lvl6pPr>
+            <a:lvl7pPr>
+              <a:buNone/>
+              <a:defRPr sz="2250" b="1">
+                <a:solidFill>
+                  <a:srgbClr val="252638"/>
+                </a:solidFill>
+                <a:latin typeface="DejaVu Sans"/>
+                <a:ea typeface="DejaVu Sans"/>
+                <a:cs typeface="DejaVu Sans"/>
+              </a:defRPr>
+            </a:lvl7pPr>
+            <a:lvl8pPr>
+              <a:buNone/>
+              <a:defRPr sz="2250" b="1">
+                <a:solidFill>
+                  <a:srgbClr val="252638"/>
+                </a:solidFill>
+                <a:latin typeface="DejaVu Sans"/>
+                <a:ea typeface="DejaVu Sans"/>
+                <a:cs typeface="DejaVu Sans"/>
+              </a:defRPr>
+            </a:lvl8pPr>
+            <a:lvl9pPr>
+              <a:buNone/>
+              <a:defRPr sz="2250" b="1">
+                <a:solidFill>
+                  <a:srgbClr val="252638"/>
+                </a:solidFill>
+                <a:latin typeface="DejaVu Sans"/>
+                <a:ea typeface="DejaVu Sans"/>
+                <a:cs typeface="DejaVu Sans"/>
+              </a:defRPr>
+            </a:lvl9pPr>
+          </a:lstStyle>
+          <a:p xmlns:a="http://schemas.openxmlformats.org/drawingml/2006/main">
+            <a:pPr>
+              <a:buNone/>
+              <a:defRPr sz="2250" b="1">
+                <a:solidFill>
+                  <a:srgbClr val="252638"/>
+                </a:solidFill>
+                <a:latin typeface="DejaVu Sans"/>
+                <a:ea typeface="DejaVu Sans"/>
+                <a:cs typeface="DejaVu Sans"/>
+              </a:defRPr>
+            </a:pPr>
+            <a:r>
+              <a:rPr sz="2250" b="1">
+                <a:solidFill>
+                  <a:srgbClr val="252638"/>
+                </a:solidFill>
+                <a:latin typeface="DejaVu Sans"/>
+                <a:ea typeface="DejaVu Sans"/>
+                <a:cs typeface="DejaVu Sans"/>
+              </a:rPr>
+              <a:t>Что сделали</a:t>
+            </a:r>
+          </a:p>
+        </p:txBody>
+      </p:sp>
+      <p:sp>
+        <p:nvSpPr>
+          <p:cNvPr id="5" name="pastbody">
+            <a:extLst xmlns:a="http://schemas.openxmlformats.org/drawingml/2006/main">
+              <a:ext uri="{FF2B5EF4-FFF2-40B4-BE49-F238E27FC236}">
+                <a16:creationId xmlns:a16="http://schemas.microsoft.com/office/drawing/2014/main" id="{B6FECD1A-1DEF-4002-B646-604AFB89F92E}"/>
+              </a:ext>
+            </a:extLst>
+          </p:cNvPr>
+          <p:cNvSpPr>
+            <a:spLocks xmlns:a="http://schemas.openxmlformats.org/drawingml/2006/main" noGrp="1"/>
+          </p:cNvSpPr>
+          <p:nvPr/>
+        </p:nvSpPr>
+        <p:spPr>
+          <a:xfrm xmlns:a="http://schemas.openxmlformats.org/drawingml/2006/main">
+            <a:off x="609600" y="2762250"/>
+            <a:ext cx="10668000" cy="1238250"/>
+          </a:xfrm>
+          <a:prstGeom xmlns:a="http://schemas.openxmlformats.org/drawingml/2006/main" prst="rect">
+            <a:avLst/>
+          </a:prstGeom>
+          <a:noFill xmlns:a="http://schemas.openxmlformats.org/drawingml/2006/main"/>
+          <a:ln xmlns:a="http://schemas.openxmlformats.org/drawingml/2006/main" w="0">
+            <a:noFill/>
+            <a:prstDash val="solid"/>
+          </a:ln>
+        </p:spPr>
+        <p:txBody>
+          <a:bodyPr xmlns:a="http://schemas.openxmlformats.org/drawingml/2006/main" anchor="t"/>
+          <a:lstStyle xmlns:a="http://schemas.openxmlformats.org/drawingml/2006/main">
+            <a:defPPr>
+              <a:defRPr sz="1950" b="0">
+                <a:solidFill>
+                  <a:srgbClr val="777383"/>
+                </a:solidFill>
+                <a:latin typeface="DejaVu Sans"/>
+                <a:ea typeface="DejaVu Sans"/>
+                <a:cs typeface="DejaVu Sans"/>
+              </a:defRPr>
+            </a:defPPr>
+            <a:lvl1pPr>
+              <a:buNone/>
+              <a:defRPr sz="2175" b="0">
+                <a:solidFill>
+                  <a:srgbClr val="777383"/>
+                </a:solidFill>
+                <a:latin typeface="DejaVu Sans"/>
+                <a:ea typeface="DejaVu Sans"/>
+                <a:cs typeface="DejaVu Sans"/>
+              </a:defRPr>
+            </a:lvl1pPr>
+            <a:lvl2pPr>
+              <a:buNone/>
+              <a:defRPr sz="2175" b="0">
+                <a:solidFill>
+                  <a:srgbClr val="777383"/>
+                </a:solidFill>
+                <a:latin typeface="DejaVu Sans"/>
+                <a:ea typeface="DejaVu Sans"/>
+                <a:cs typeface="DejaVu Sans"/>
+              </a:defRPr>
+            </a:lvl2pPr>
+            <a:lvl3pPr>
+              <a:buNone/>
+              <a:defRPr sz="2175" b="0">
+                <a:solidFill>
+                  <a:srgbClr val="777383"/>
+                </a:solidFill>
+                <a:latin typeface="DejaVu Sans"/>
+                <a:ea typeface="DejaVu Sans"/>
+                <a:cs typeface="DejaVu Sans"/>
+              </a:defRPr>
+            </a:lvl3pPr>
+            <a:lvl4pPr>
+              <a:buNone/>
+              <a:defRPr sz="2175" b="0">
+                <a:solidFill>
+                  <a:srgbClr val="777383"/>
+                </a:solidFill>
+                <a:latin typeface="DejaVu Sans"/>
+                <a:ea typeface="DejaVu Sans"/>
+                <a:cs typeface="DejaVu Sans"/>
+              </a:defRPr>
+            </a:lvl4pPr>
+            <a:lvl5pPr>
+              <a:buNone/>
+              <a:defRPr sz="2175" b="0">
+                <a:solidFill>
+                  <a:srgbClr val="777383"/>
+                </a:solidFill>
+                <a:latin typeface="DejaVu Sans"/>
+                <a:ea typeface="DejaVu Sans"/>
+                <a:cs typeface="DejaVu Sans"/>
+              </a:defRPr>
+            </a:lvl5pPr>
+            <a:lvl6pPr>
+              <a:buNone/>
+              <a:defRPr sz="2175" b="0">
+                <a:solidFill>
+                  <a:srgbClr val="777383"/>
+                </a:solidFill>
+                <a:latin typeface="DejaVu Sans"/>
+                <a:ea typeface="DejaVu Sans"/>
+                <a:cs typeface="DejaVu Sans"/>
+              </a:defRPr>
+            </a:lvl6pPr>
+            <a:lvl7pPr>
+              <a:buNone/>
+              <a:defRPr sz="2175" b="0">
+                <a:solidFill>
+                  <a:srgbClr val="777383"/>
+                </a:solidFill>
+                <a:latin typeface="DejaVu Sans"/>
+                <a:ea typeface="DejaVu Sans"/>
+                <a:cs typeface="DejaVu Sans"/>
+              </a:defRPr>
+            </a:lvl7pPr>
+            <a:lvl8pPr>
+              <a:buNone/>
+              <a:defRPr sz="2175" b="0">
+                <a:solidFill>
+                  <a:srgbClr val="777383"/>
+                </a:solidFill>
+                <a:latin typeface="DejaVu Sans"/>
+                <a:ea typeface="DejaVu Sans"/>
+                <a:cs typeface="DejaVu Sans"/>
+              </a:defRPr>
+            </a:lvl8pPr>
+            <a:lvl9pPr>
+              <a:buNone/>
+              <a:defRPr sz="2175" b="0">
+                <a:solidFill>
+                  <a:srgbClr val="777383"/>
+                </a:solidFill>
+                <a:latin typeface="DejaVu Sans"/>
+                <a:ea typeface="DejaVu Sans"/>
+                <a:cs typeface="DejaVu Sans"/>
+              </a:defRPr>
+            </a:lvl9pPr>
+          </a:lstStyle>
+          <a:p xmlns:a="http://schemas.openxmlformats.org/drawingml/2006/main">
+            <a:pPr>
+              <a:buNone/>
+              <a:defRPr sz="2175" b="0">
+                <a:solidFill>
+                  <a:srgbClr val="777383"/>
+                </a:solidFill>
+                <a:latin typeface="DejaVu Sans"/>
+                <a:ea typeface="DejaVu Sans"/>
+                <a:cs typeface="DejaVu Sans"/>
+              </a:defRPr>
+            </a:pPr>
+            <a:r>
+              <a:rPr sz="1950" b="0">
+                <a:solidFill>
+                  <a:srgbClr val="777383"/>
+                </a:solidFill>
+                <a:latin typeface="DejaVu Sans"/>
+                <a:ea typeface="DejaVu Sans"/>
+                <a:cs typeface="DejaVu Sans"/>
+              </a:rPr>
+              <a:t>Создали доску Trello и внесли задачи по основным модулям.</a:t>
+            </a:r>
+          </a:p>
+          <a:p xmlns:a="http://schemas.openxmlformats.org/drawingml/2006/main">
+            <a:pPr>
+              <a:buNone/>
+              <a:defRPr sz="2175" b="0">
+                <a:solidFill>
+                  <a:srgbClr val="777383"/>
+                </a:solidFill>
+                <a:latin typeface="DejaVu Sans"/>
+                <a:ea typeface="DejaVu Sans"/>
+                <a:cs typeface="DejaVu Sans"/>
+              </a:defRPr>
+            </a:pPr>
+            <a:r>
+              <a:rPr sz="1950" b="0">
+                <a:solidFill>
+                  <a:srgbClr val="777383"/>
+                </a:solidFill>
+                <a:latin typeface="DejaVu Sans"/>
+                <a:ea typeface="DejaVu Sans"/>
+                <a:cs typeface="DejaVu Sans"/>
+              </a:rPr>
+              <a:t>Использовали исходное ТЗ как основу первоначального бэклога.</a:t>
+            </a:r>
+          </a:p>
+          <a:p xmlns:a="http://schemas.openxmlformats.org/drawingml/2006/main">
+            <a:pPr>
+              <a:buNone/>
+              <a:defRPr sz="2175" b="0">
+                <a:solidFill>
+                  <a:srgbClr val="777383"/>
+                </a:solidFill>
+                <a:latin typeface="DejaVu Sans"/>
+                <a:ea typeface="DejaVu Sans"/>
+                <a:cs typeface="DejaVu Sans"/>
+              </a:defRPr>
+            </a:pPr>
+            <a:r>
+              <a:rPr sz="1950" b="0">
+                <a:solidFill>
+                  <a:srgbClr val="777383"/>
+                </a:solidFill>
+                <a:latin typeface="DejaVu Sans"/>
+                <a:ea typeface="DejaVu Sans"/>
+                <a:cs typeface="DejaVu Sans"/>
+              </a:rPr>
+              <a:t>Для обсуждения интерфейса взяли пример главной страницы в Figma.</a:t>
+            </a:r>
+          </a:p>
+        </p:txBody>
+      </p:sp>
+      <p:sp>
+        <p:nvSpPr>
+          <p:cNvPr id="6" name="gate">
+            <a:extLst xmlns:a="http://schemas.openxmlformats.org/drawingml/2006/main">
+              <a:ext uri="{FF2B5EF4-FFF2-40B4-BE49-F238E27FC236}">
+                <a16:creationId xmlns:a16="http://schemas.microsoft.com/office/drawing/2014/main" id="{F3265356-DD03-4E73-8B7F-BBE0E30173BD}"/>
+              </a:ext>
+            </a:extLst>
+          </p:cNvPr>
+          <p:cNvSpPr>
+            <a:spLocks xmlns:a="http://schemas.openxmlformats.org/drawingml/2006/main" noGrp="1"/>
+          </p:cNvSpPr>
+          <p:nvPr/>
+        </p:nvSpPr>
+        <p:spPr>
+          <a:xfrm xmlns:a="http://schemas.openxmlformats.org/drawingml/2006/main">
+            <a:off x="609600" y="4333875"/>
+            <a:ext cx="10477500" cy="476250"/>
+          </a:xfrm>
+          <a:prstGeom xmlns:a="http://schemas.openxmlformats.org/drawingml/2006/main" prst="rect">
+            <a:avLst/>
+          </a:prstGeom>
+          <a:noFill xmlns:a="http://schemas.openxmlformats.org/drawingml/2006/main"/>
+          <a:ln xmlns:a="http://schemas.openxmlformats.org/drawingml/2006/main" w="0">
+            <a:noFill/>
+            <a:prstDash val="solid"/>
+          </a:ln>
+        </p:spPr>
+        <p:txBody>
+          <a:bodyPr xmlns:a="http://schemas.openxmlformats.org/drawingml/2006/main" anchor="t"/>
+          <a:lstStyle xmlns:a="http://schemas.openxmlformats.org/drawingml/2006/main">
+            <a:defPPr>
+              <a:defRPr sz="2250" b="1">
+                <a:solidFill>
+                  <a:srgbClr val="6145E6"/>
+                </a:solidFill>
+                <a:latin typeface="DejaVu Sans"/>
+                <a:ea typeface="DejaVu Sans"/>
+                <a:cs typeface="DejaVu Sans"/>
+              </a:defRPr>
+            </a:defPPr>
+            <a:lvl1pPr>
+              <a:buNone/>
+              <a:defRPr sz="2250" b="1">
+                <a:solidFill>
+                  <a:srgbClr val="6145E6"/>
+                </a:solidFill>
+                <a:latin typeface="DejaVu Sans"/>
+                <a:ea typeface="DejaVu Sans"/>
+                <a:cs typeface="DejaVu Sans"/>
+              </a:defRPr>
+            </a:lvl1pPr>
+            <a:lvl2pPr>
+              <a:buNone/>
+              <a:defRPr sz="2250" b="1">
+                <a:solidFill>
+                  <a:srgbClr val="6145E6"/>
+                </a:solidFill>
+                <a:latin typeface="DejaVu Sans"/>
+                <a:ea typeface="DejaVu Sans"/>
+                <a:cs typeface="DejaVu Sans"/>
+              </a:defRPr>
+            </a:lvl2pPr>
+            <a:lvl3pPr>
+              <a:buNone/>
+              <a:defRPr sz="2250" b="1">
+                <a:solidFill>
+                  <a:srgbClr val="6145E6"/>
+                </a:solidFill>
+                <a:latin typeface="DejaVu Sans"/>
+                <a:ea typeface="DejaVu Sans"/>
+                <a:cs typeface="DejaVu Sans"/>
+              </a:defRPr>
+            </a:lvl3pPr>
+            <a:lvl4pPr>
+              <a:buNone/>
+              <a:defRPr sz="2250" b="1">
+                <a:solidFill>
+                  <a:srgbClr val="6145E6"/>
+                </a:solidFill>
+                <a:latin typeface="DejaVu Sans"/>
+                <a:ea typeface="DejaVu Sans"/>
+                <a:cs typeface="DejaVu Sans"/>
+              </a:defRPr>
+            </a:lvl4pPr>
+            <a:lvl5pPr>
+              <a:buNone/>
+              <a:defRPr sz="2250" b="1">
+                <a:solidFill>
+                  <a:srgbClr val="6145E6"/>
+                </a:solidFill>
+                <a:latin typeface="DejaVu Sans"/>
+                <a:ea typeface="DejaVu Sans"/>
+                <a:cs typeface="DejaVu Sans"/>
+              </a:defRPr>
+            </a:lvl5pPr>
+            <a:lvl6pPr>
+              <a:buNone/>
+              <a:defRPr sz="2250" b="1">
+                <a:solidFill>
+                  <a:srgbClr val="6145E6"/>
+                </a:solidFill>
+                <a:latin typeface="DejaVu Sans"/>
+                <a:ea typeface="DejaVu Sans"/>
+                <a:cs typeface="DejaVu Sans"/>
+              </a:defRPr>
+            </a:lvl6pPr>
+            <a:lvl7pPr>
+              <a:buNone/>
+              <a:defRPr sz="2250" b="1">
+                <a:solidFill>
+                  <a:srgbClr val="6145E6"/>
+                </a:solidFill>
+                <a:latin typeface="DejaVu Sans"/>
+                <a:ea typeface="DejaVu Sans"/>
+                <a:cs typeface="DejaVu Sans"/>
+              </a:defRPr>
+            </a:lvl7pPr>
+            <a:lvl8pPr>
+              <a:buNone/>
+              <a:defRPr sz="2250" b="1">
+                <a:solidFill>
+                  <a:srgbClr val="6145E6"/>
+                </a:solidFill>
+                <a:latin typeface="DejaVu Sans"/>
+                <a:ea typeface="DejaVu Sans"/>
+                <a:cs typeface="DejaVu Sans"/>
+              </a:defRPr>
+            </a:lvl8pPr>
+            <a:lvl9pPr>
+              <a:buNone/>
+              <a:defRPr sz="2250" b="1">
+                <a:solidFill>
+                  <a:srgbClr val="6145E6"/>
+                </a:solidFill>
+                <a:latin typeface="DejaVu Sans"/>
+                <a:ea typeface="DejaVu Sans"/>
+                <a:cs typeface="DejaVu Sans"/>
+              </a:defRPr>
+            </a:lvl9pPr>
+          </a:lstStyle>
+          <a:p xmlns:a="http://schemas.openxmlformats.org/drawingml/2006/main">
+            <a:pPr>
+              <a:buNone/>
+              <a:defRPr sz="2250" b="1">
+                <a:solidFill>
+                  <a:srgbClr val="6145E6"/>
+                </a:solidFill>
+                <a:latin typeface="DejaVu Sans"/>
+                <a:ea typeface="DejaVu Sans"/>
+                <a:cs typeface="DejaVu Sans"/>
+              </a:defRPr>
+            </a:pPr>
+            <a:r>
+              <a:rPr sz="2250" b="1">
+                <a:solidFill>
+                  <a:srgbClr val="6145E6"/>
+                </a:solidFill>
+                <a:latin typeface="DejaVu Sans"/>
+                <a:ea typeface="DejaVu Sans"/>
+                <a:cs typeface="DejaVu Sans"/>
+              </a:rPr>
+              <a:t>С каким результатом завершили этап</a:t>
+            </a:r>
+          </a:p>
+        </p:txBody>
+      </p:sp>
+      <p:sp>
+        <p:nvSpPr>
+          <p:cNvPr id="7" name="gatebody">
+            <a:extLst xmlns:a="http://schemas.openxmlformats.org/drawingml/2006/main">
+              <a:ext uri="{FF2B5EF4-FFF2-40B4-BE49-F238E27FC236}">
+                <a16:creationId xmlns:a16="http://schemas.microsoft.com/office/drawing/2014/main" id="{80FFBCC7-B652-43E3-87AD-5BDF1725F020}"/>
+              </a:ext>
+            </a:extLst>
+          </p:cNvPr>
+          <p:cNvSpPr>
+            <a:spLocks xmlns:a="http://schemas.openxmlformats.org/drawingml/2006/main" noGrp="1"/>
+          </p:cNvSpPr>
+          <p:nvPr/>
+        </p:nvSpPr>
+        <p:spPr>
+          <a:xfrm xmlns:a="http://schemas.openxmlformats.org/drawingml/2006/main">
+            <a:off x="609600" y="4905375"/>
+            <a:ext cx="10477500" cy="1238250"/>
+          </a:xfrm>
+          <a:prstGeom xmlns:a="http://schemas.openxmlformats.org/drawingml/2006/main" prst="rect">
+            <a:avLst/>
+          </a:prstGeom>
+          <a:noFill xmlns:a="http://schemas.openxmlformats.org/drawingml/2006/main"/>
+          <a:ln xmlns:a="http://schemas.openxmlformats.org/drawingml/2006/main" w="0">
+            <a:noFill/>
+            <a:prstDash val="solid"/>
+          </a:ln>
+        </p:spPr>
+        <p:txBody>
+          <a:bodyPr xmlns:a="http://schemas.openxmlformats.org/drawingml/2006/main" anchor="t"/>
+          <a:lstStyle xmlns:a="http://schemas.openxmlformats.org/drawingml/2006/main">
+            <a:defPPr>
+              <a:defRPr sz="1875" b="0">
+                <a:solidFill>
+                  <a:srgbClr val="252638"/>
+                </a:solidFill>
+                <a:latin typeface="DejaVu Sans"/>
+                <a:ea typeface="DejaVu Sans"/>
+                <a:cs typeface="DejaVu Sans"/>
+              </a:defRPr>
+            </a:defPPr>
+            <a:lvl1pPr>
+              <a:buNone/>
+              <a:defRPr sz="2175" b="0">
+                <a:solidFill>
+                  <a:srgbClr val="252638"/>
+                </a:solidFill>
+                <a:latin typeface="DejaVu Sans"/>
+                <a:ea typeface="DejaVu Sans"/>
+                <a:cs typeface="DejaVu Sans"/>
+              </a:defRPr>
+            </a:lvl1pPr>
+            <a:lvl2pPr>
+              <a:buNone/>
+              <a:defRPr sz="2175" b="0">
+                <a:solidFill>
+                  <a:srgbClr val="252638"/>
+                </a:solidFill>
+                <a:latin typeface="DejaVu Sans"/>
+                <a:ea typeface="DejaVu Sans"/>
+                <a:cs typeface="DejaVu Sans"/>
+              </a:defRPr>
+            </a:lvl2pPr>
+            <a:lvl3pPr>
+              <a:buNone/>
+              <a:defRPr sz="2175" b="0">
+                <a:solidFill>
+                  <a:srgbClr val="252638"/>
+                </a:solidFill>
+                <a:latin typeface="DejaVu Sans"/>
+                <a:ea typeface="DejaVu Sans"/>
+                <a:cs typeface="DejaVu Sans"/>
+              </a:defRPr>
+            </a:lvl3pPr>
+            <a:lvl4pPr>
+              <a:buNone/>
+              <a:defRPr sz="2175" b="0">
+                <a:solidFill>
+                  <a:srgbClr val="252638"/>
+                </a:solidFill>
+                <a:latin typeface="DejaVu Sans"/>
+                <a:ea typeface="DejaVu Sans"/>
+                <a:cs typeface="DejaVu Sans"/>
+              </a:defRPr>
+            </a:lvl4pPr>
+            <a:lvl5pPr>
+              <a:buNone/>
+              <a:defRPr sz="2175" b="0">
+                <a:solidFill>
+                  <a:srgbClr val="252638"/>
+                </a:solidFill>
+                <a:latin typeface="DejaVu Sans"/>
+                <a:ea typeface="DejaVu Sans"/>
+                <a:cs typeface="DejaVu Sans"/>
+              </a:defRPr>
+            </a:lvl5pPr>
+            <a:lvl6pPr>
+              <a:buNone/>
+              <a:defRPr sz="2175" b="0">
+                <a:solidFill>
+                  <a:srgbClr val="252638"/>
+                </a:solidFill>
+                <a:latin typeface="DejaVu Sans"/>
+                <a:ea typeface="DejaVu Sans"/>
+                <a:cs typeface="DejaVu Sans"/>
+              </a:defRPr>
+            </a:lvl6pPr>
+            <a:lvl7pPr>
+              <a:buNone/>
+              <a:defRPr sz="2175" b="0">
+                <a:solidFill>
+                  <a:srgbClr val="252638"/>
+                </a:solidFill>
+                <a:latin typeface="DejaVu Sans"/>
+                <a:ea typeface="DejaVu Sans"/>
+                <a:cs typeface="DejaVu Sans"/>
+              </a:defRPr>
+            </a:lvl7pPr>
+            <a:lvl8pPr>
+              <a:buNone/>
+              <a:defRPr sz="2175" b="0">
+                <a:solidFill>
+                  <a:srgbClr val="252638"/>
+                </a:solidFill>
+                <a:latin typeface="DejaVu Sans"/>
+                <a:ea typeface="DejaVu Sans"/>
+                <a:cs typeface="DejaVu Sans"/>
+              </a:defRPr>
+            </a:lvl8pPr>
+            <a:lvl9pPr>
+              <a:buNone/>
+              <a:defRPr sz="2175" b="0">
+                <a:solidFill>
+                  <a:srgbClr val="252638"/>
+                </a:solidFill>
+                <a:latin typeface="DejaVu Sans"/>
+                <a:ea typeface="DejaVu Sans"/>
+                <a:cs typeface="DejaVu Sans"/>
+              </a:defRPr>
+            </a:lvl9pPr>
+          </a:lstStyle>
+          <a:p xmlns:a="http://schemas.openxmlformats.org/drawingml/2006/main">
+            <a:pPr>
+              <a:buNone/>
+              <a:defRPr sz="2175" b="0">
+                <a:solidFill>
+                  <a:srgbClr val="252638"/>
+                </a:solidFill>
+                <a:latin typeface="DejaVu Sans"/>
+                <a:ea typeface="DejaVu Sans"/>
+                <a:cs typeface="DejaVu Sans"/>
+              </a:defRPr>
+            </a:pPr>
+            <a:r>
+              <a:rPr sz="1875" b="0">
+                <a:solidFill>
+                  <a:srgbClr val="252638"/>
+                </a:solidFill>
+                <a:latin typeface="DejaVu Sans"/>
+                <a:ea typeface="DejaVu Sans"/>
+                <a:cs typeface="DejaVu Sans"/>
+              </a:rPr>
+              <a:t>К концу недели были доступны ТЗ, макет и список задач.</a:t>
+            </a:r>
+          </a:p>
+          <a:p xmlns:a="http://schemas.openxmlformats.org/drawingml/2006/main">
+            <a:pPr>
+              <a:buNone/>
+              <a:defRPr sz="2175" b="0">
+                <a:solidFill>
+                  <a:srgbClr val="252638"/>
+                </a:solidFill>
+                <a:latin typeface="DejaVu Sans"/>
+                <a:ea typeface="DejaVu Sans"/>
+                <a:cs typeface="DejaVu Sans"/>
+              </a:defRPr>
+            </a:pPr>
+            <a:r>
+              <a:rPr sz="1875" b="0">
+                <a:solidFill>
+                  <a:srgbClr val="252638"/>
+                </a:solidFill>
+                <a:latin typeface="DejaVu Sans"/>
+                <a:ea typeface="DejaVu Sans"/>
+                <a:cs typeface="DejaVu Sans"/>
+              </a:rPr>
+              <a:t>Оценки сложности и критерии готовности ещё не вели системно.</a:t>
+            </a:r>
+          </a:p>
+          <a:p xmlns:a="http://schemas.openxmlformats.org/drawingml/2006/main">
+            <a:pPr>
+              <a:buNone/>
+              <a:defRPr sz="2175" b="0">
+                <a:solidFill>
+                  <a:srgbClr val="252638"/>
+                </a:solidFill>
+                <a:latin typeface="DejaVu Sans"/>
+                <a:ea typeface="DejaVu Sans"/>
+                <a:cs typeface="DejaVu Sans"/>
+              </a:defRPr>
+            </a:pPr>
+            <a:r>
+              <a:rPr sz="1875" b="0">
+                <a:solidFill>
+                  <a:srgbClr val="252638"/>
+                </a:solidFill>
+                <a:latin typeface="DejaVu Sans"/>
+                <a:ea typeface="DejaVu Sans"/>
+                <a:cs typeface="DejaVu Sans"/>
+              </a:rPr>
+              <a:t>Подтверждённой реализации модулей и протоколов проверок не было.</a:t>
+            </a:r>
+          </a:p>
+        </p:txBody>
+      </p:sp>
+    </p:spTree>
+    <p:extLst>
+      <p:ext uri="{BB962C8B-B14F-4D97-AF65-F5344CB8AC3E}">
+        <p14:creationId xmlns:p14="http://schemas.microsoft.com/office/powerpoint/2010/main" val="46775566"/>
+      </p:ext>
+    </p:extLst>
+  </p:cSld>
+</p:sld>
+</file>
+
+<file path=ppt/slides/slide4.xml><?xml version="1.0" encoding="utf-8"?>
 <p:sld xmlns:p="http://schemas.openxmlformats.org/presentationml/2006/main">
   <p:cSld>
     <p:bg>
@@ -6606,6 +8491,7 @@
               </a:defRPr>
             </a:defPPr>
             <a:lvl1pPr>
+              <a:buNone/>
               <a:defRPr sz="1125" b="1">
                 <a:solidFill>
                   <a:srgbClr val="6145E6"/>
@@ -6616,6 +8502,7 @@
               </a:defRPr>
             </a:lvl1pPr>
             <a:lvl2pPr>
+              <a:buNone/>
               <a:defRPr sz="1125" b="1">
                 <a:solidFill>
                   <a:srgbClr val="6145E6"/>
@@ -6626,6 +8513,7 @@
               </a:defRPr>
             </a:lvl2pPr>
             <a:lvl3pPr>
+              <a:buNone/>
               <a:defRPr sz="1125" b="1">
                 <a:solidFill>
                   <a:srgbClr val="6145E6"/>
@@ -6636,6 +8524,7 @@
               </a:defRPr>
             </a:lvl3pPr>
             <a:lvl4pPr>
+              <a:buNone/>
               <a:defRPr sz="1125" b="1">
                 <a:solidFill>
                   <a:srgbClr val="6145E6"/>
@@ -6646,6 +8535,7 @@
               </a:defRPr>
             </a:lvl4pPr>
             <a:lvl5pPr>
+              <a:buNone/>
               <a:defRPr sz="1125" b="1">
                 <a:solidFill>
                   <a:srgbClr val="6145E6"/>
@@ -6656,6 +8546,7 @@
               </a:defRPr>
             </a:lvl5pPr>
             <a:lvl6pPr>
+              <a:buNone/>
               <a:defRPr sz="1125" b="1">
                 <a:solidFill>
                   <a:srgbClr val="6145E6"/>
@@ -6666,6 +8557,7 @@
               </a:defRPr>
             </a:lvl6pPr>
             <a:lvl7pPr>
+              <a:buNone/>
               <a:defRPr sz="1125" b="1">
                 <a:solidFill>
                   <a:srgbClr val="6145E6"/>
@@ -6676,6 +8568,7 @@
               </a:defRPr>
             </a:lvl7pPr>
             <a:lvl8pPr>
+              <a:buNone/>
               <a:defRPr sz="1125" b="1">
                 <a:solidFill>
                   <a:srgbClr val="6145E6"/>
@@ -6686,6 +8579,7 @@
               </a:defRPr>
             </a:lvl8pPr>
             <a:lvl9pPr>
+              <a:buNone/>
               <a:defRPr sz="1125" b="1">
                 <a:solidFill>
                   <a:srgbClr val="6145E6"/>
@@ -6698,6 +8592,7 @@
           </a:lstStyle>
           <a:p xmlns:a="http://schemas.openxmlformats.org/drawingml/2006/main">
             <a:pPr>
+              <a:buNone/>
               <a:defRPr sz="1125" b="1">
                 <a:solidFill>
                   <a:srgbClr val="6145E6"/>
@@ -6763,6 +8658,7 @@
               </a:defRPr>
             </a:defPPr>
             <a:lvl1pPr>
+              <a:buNone/>
               <a:defRPr sz="3600" b="1">
                 <a:solidFill>
                   <a:srgbClr val="252638"/>
@@ -6773,6 +8669,7 @@
               </a:defRPr>
             </a:lvl1pPr>
             <a:lvl2pPr>
+              <a:buNone/>
               <a:defRPr sz="3600" b="1">
                 <a:solidFill>
                   <a:srgbClr val="252638"/>
@@ -6783,6 +8680,7 @@
               </a:defRPr>
             </a:lvl2pPr>
             <a:lvl3pPr>
+              <a:buNone/>
               <a:defRPr sz="3600" b="1">
                 <a:solidFill>
                   <a:srgbClr val="252638"/>
@@ -6793,6 +8691,7 @@
               </a:defRPr>
             </a:lvl3pPr>
             <a:lvl4pPr>
+              <a:buNone/>
               <a:defRPr sz="3600" b="1">
                 <a:solidFill>
                   <a:srgbClr val="252638"/>
@@ -6803,6 +8702,7 @@
               </a:defRPr>
             </a:lvl4pPr>
             <a:lvl5pPr>
+              <a:buNone/>
               <a:defRPr sz="3600" b="1">
                 <a:solidFill>
                   <a:srgbClr val="252638"/>
@@ -6813,6 +8713,7 @@
               </a:defRPr>
             </a:lvl5pPr>
             <a:lvl6pPr>
+              <a:buNone/>
               <a:defRPr sz="3600" b="1">
                 <a:solidFill>
                   <a:srgbClr val="252638"/>
@@ -6823,6 +8724,7 @@
               </a:defRPr>
             </a:lvl6pPr>
             <a:lvl7pPr>
+              <a:buNone/>
               <a:defRPr sz="3600" b="1">
                 <a:solidFill>
                   <a:srgbClr val="252638"/>
@@ -6833,6 +8735,7 @@
               </a:defRPr>
             </a:lvl7pPr>
             <a:lvl8pPr>
+              <a:buNone/>
               <a:defRPr sz="3600" b="1">
                 <a:solidFill>
                   <a:srgbClr val="252638"/>
@@ -6843,6 +8746,7 @@
               </a:defRPr>
             </a:lvl8pPr>
             <a:lvl9pPr>
+              <a:buNone/>
               <a:defRPr sz="3600" b="1">
                 <a:solidFill>
                   <a:srgbClr val="252638"/>
@@ -6855,6 +8759,7 @@
           </a:lstStyle>
           <a:p xmlns:a="http://schemas.openxmlformats.org/drawingml/2006/main">
             <a:pPr>
+              <a:buNone/>
               <a:defRPr sz="3600" b="1">
                 <a:solidFill>
                   <a:srgbClr val="252638"/>
@@ -6920,6 +8825,7 @@
               </a:defRPr>
             </a:defPPr>
             <a:lvl1pPr>
+              <a:buNone/>
               <a:defRPr sz="1200" b="0">
                 <a:solidFill>
                   <a:srgbClr val="858393"/>
@@ -6930,6 +8836,7 @@
               </a:defRPr>
             </a:lvl1pPr>
             <a:lvl2pPr>
+              <a:buNone/>
               <a:defRPr sz="1200" b="0">
                 <a:solidFill>
                   <a:srgbClr val="858393"/>
@@ -6940,6 +8847,7 @@
               </a:defRPr>
             </a:lvl2pPr>
             <a:lvl3pPr>
+              <a:buNone/>
               <a:defRPr sz="1200" b="0">
                 <a:solidFill>
                   <a:srgbClr val="858393"/>
@@ -6950,6 +8858,7 @@
               </a:defRPr>
             </a:lvl3pPr>
             <a:lvl4pPr>
+              <a:buNone/>
               <a:defRPr sz="1200" b="0">
                 <a:solidFill>
                   <a:srgbClr val="858393"/>
@@ -6960,6 +8869,7 @@
               </a:defRPr>
             </a:lvl4pPr>
             <a:lvl5pPr>
+              <a:buNone/>
               <a:defRPr sz="1200" b="0">
                 <a:solidFill>
                   <a:srgbClr val="858393"/>
@@ -6970,6 +8880,7 @@
               </a:defRPr>
             </a:lvl5pPr>
             <a:lvl6pPr>
+              <a:buNone/>
               <a:defRPr sz="1200" b="0">
                 <a:solidFill>
                   <a:srgbClr val="858393"/>
@@ -6980,6 +8891,7 @@
               </a:defRPr>
             </a:lvl6pPr>
             <a:lvl7pPr>
+              <a:buNone/>
               <a:defRPr sz="1200" b="0">
                 <a:solidFill>
                   <a:srgbClr val="858393"/>
@@ -6990,6 +8902,7 @@
               </a:defRPr>
             </a:lvl7pPr>
             <a:lvl8pPr>
+              <a:buNone/>
               <a:defRPr sz="1200" b="0">
                 <a:solidFill>
                   <a:srgbClr val="858393"/>
@@ -7000,6 +8913,7 @@
               </a:defRPr>
             </a:lvl8pPr>
             <a:lvl9pPr>
+              <a:buNone/>
               <a:defRPr sz="1200" b="0">
                 <a:solidFill>
                   <a:srgbClr val="858393"/>
@@ -7012,6 +8926,7 @@
           </a:lstStyle>
           <a:p xmlns:a="http://schemas.openxmlformats.org/drawingml/2006/main">
             <a:pPr>
+              <a:buNone/>
               <a:defRPr sz="1200" b="0">
                 <a:solidFill>
                   <a:srgbClr val="858393"/>
@@ -7030,7 +8945,7 @@
                 <a:ea typeface="DejaVu Sans"/>
                 <a:cs typeface="DejaVu Sans"/>
               </a:rPr>
-              <a:t>03</a:t>
+              <a:t>04</a:t>
             </a:r>
           </a:p>
         </p:txBody>
@@ -7051,8 +8966,8 @@
         </p:nvSpPr>
         <p:spPr>
           <a:xfrm xmlns:a="http://schemas.openxmlformats.org/drawingml/2006/main">
-            <a:off x="609600" y="2143125"/>
-            <a:ext cx="10668000" cy="571500"/>
+            <a:off x="609600" y="2095500"/>
+            <a:ext cx="10668000" cy="723900"/>
           </a:xfrm>
           <a:prstGeom xmlns:a="http://schemas.openxmlformats.org/drawingml/2006/main" prst="rect">
             <a:avLst/>
@@ -7067,7 +8982,7 @@
           <a:bodyPr xmlns:a="http://schemas.openxmlformats.org/drawingml/2006/main" anchor="t"/>
           <a:lstStyle xmlns:a="http://schemas.openxmlformats.org/drawingml/2006/main">
             <a:defPPr>
-              <a:defRPr sz="2100" b="0">
+              <a:defRPr sz="1800" b="0">
                 <a:solidFill>
                   <a:srgbClr val="252638"/>
                 </a:solidFill>
@@ -7077,6 +8992,7 @@
               </a:defRPr>
             </a:defPPr>
             <a:lvl1pPr>
+              <a:buNone/>
               <a:defRPr sz="2100" b="0">
                 <a:solidFill>
                   <a:srgbClr val="252638"/>
@@ -7087,6 +9003,7 @@
               </a:defRPr>
             </a:lvl1pPr>
             <a:lvl2pPr>
+              <a:buNone/>
               <a:defRPr sz="2100" b="0">
                 <a:solidFill>
                   <a:srgbClr val="252638"/>
@@ -7097,6 +9014,7 @@
               </a:defRPr>
             </a:lvl2pPr>
             <a:lvl3pPr>
+              <a:buNone/>
               <a:defRPr sz="2100" b="0">
                 <a:solidFill>
                   <a:srgbClr val="252638"/>
@@ -7107,6 +9025,7 @@
               </a:defRPr>
             </a:lvl3pPr>
             <a:lvl4pPr>
+              <a:buNone/>
               <a:defRPr sz="2100" b="0">
                 <a:solidFill>
                   <a:srgbClr val="252638"/>
@@ -7117,6 +9036,7 @@
               </a:defRPr>
             </a:lvl4pPr>
             <a:lvl5pPr>
+              <a:buNone/>
               <a:defRPr sz="2100" b="0">
                 <a:solidFill>
                   <a:srgbClr val="252638"/>
@@ -7127,6 +9047,7 @@
               </a:defRPr>
             </a:lvl5pPr>
             <a:lvl6pPr>
+              <a:buNone/>
               <a:defRPr sz="2100" b="0">
                 <a:solidFill>
                   <a:srgbClr val="252638"/>
@@ -7137,6 +9058,7 @@
               </a:defRPr>
             </a:lvl6pPr>
             <a:lvl7pPr>
+              <a:buNone/>
               <a:defRPr sz="2100" b="0">
                 <a:solidFill>
                   <a:srgbClr val="252638"/>
@@ -7147,6 +9069,7 @@
               </a:defRPr>
             </a:lvl7pPr>
             <a:lvl8pPr>
+              <a:buNone/>
               <a:defRPr sz="2100" b="0">
                 <a:solidFill>
                   <a:srgbClr val="252638"/>
@@ -7157,6 +9080,7 @@
               </a:defRPr>
             </a:lvl8pPr>
             <a:lvl9pPr>
+              <a:buNone/>
               <a:defRPr sz="2100" b="0">
                 <a:solidFill>
                   <a:srgbClr val="252638"/>
@@ -7169,6 +9093,7 @@
           </a:lstStyle>
           <a:p xmlns:a="http://schemas.openxmlformats.org/drawingml/2006/main">
             <a:pPr>
+              <a:buNone/>
               <a:defRPr sz="2100" b="0">
                 <a:solidFill>
                   <a:srgbClr val="252638"/>
@@ -7179,7 +9104,7 @@
               </a:defRPr>
             </a:pPr>
             <a:r>
-              <a:rPr sz="2100" b="0">
+              <a:rPr sz="1800" b="0">
                 <a:solidFill>
                   <a:srgbClr val="252638"/>
                 </a:solidFill>
@@ -7187,7 +9112,7 @@
                 <a:ea typeface="DejaVu Sans"/>
                 <a:cs typeface="DejaVu Sans"/>
               </a:rPr>
-              <a:t>Обязательный admin и подтверждённый email</a:t>
+              <a:t>Администратор обязателен: модерирует курсы, управляет ролями и блокировками.</a:t>
             </a:r>
           </a:p>
         </p:txBody>
@@ -7209,7 +9134,7 @@
         <p:spPr>
           <a:xfrm xmlns:a="http://schemas.openxmlformats.org/drawingml/2006/main">
             <a:off x="609600" y="2867025"/>
-            <a:ext cx="10668000" cy="571500"/>
+            <a:ext cx="10668000" cy="723900"/>
           </a:xfrm>
           <a:prstGeom xmlns:a="http://schemas.openxmlformats.org/drawingml/2006/main" prst="rect">
             <a:avLst/>
@@ -7224,7 +9149,7 @@
           <a:bodyPr xmlns:a="http://schemas.openxmlformats.org/drawingml/2006/main" anchor="t"/>
           <a:lstStyle xmlns:a="http://schemas.openxmlformats.org/drawingml/2006/main">
             <a:defPPr>
-              <a:defRPr sz="2100" b="0">
+              <a:defRPr sz="1800" b="0">
                 <a:solidFill>
                   <a:srgbClr val="252638"/>
                 </a:solidFill>
@@ -7234,6 +9159,7 @@
               </a:defRPr>
             </a:defPPr>
             <a:lvl1pPr>
+              <a:buNone/>
               <a:defRPr sz="2100" b="0">
                 <a:solidFill>
                   <a:srgbClr val="252638"/>
@@ -7244,6 +9170,7 @@
               </a:defRPr>
             </a:lvl1pPr>
             <a:lvl2pPr>
+              <a:buNone/>
               <a:defRPr sz="2100" b="0">
                 <a:solidFill>
                   <a:srgbClr val="252638"/>
@@ -7254,6 +9181,7 @@
               </a:defRPr>
             </a:lvl2pPr>
             <a:lvl3pPr>
+              <a:buNone/>
               <a:defRPr sz="2100" b="0">
                 <a:solidFill>
                   <a:srgbClr val="252638"/>
@@ -7264,6 +9192,7 @@
               </a:defRPr>
             </a:lvl3pPr>
             <a:lvl4pPr>
+              <a:buNone/>
               <a:defRPr sz="2100" b="0">
                 <a:solidFill>
                   <a:srgbClr val="252638"/>
@@ -7274,6 +9203,7 @@
               </a:defRPr>
             </a:lvl4pPr>
             <a:lvl5pPr>
+              <a:buNone/>
               <a:defRPr sz="2100" b="0">
                 <a:solidFill>
                   <a:srgbClr val="252638"/>
@@ -7284,6 +9214,7 @@
               </a:defRPr>
             </a:lvl5pPr>
             <a:lvl6pPr>
+              <a:buNone/>
               <a:defRPr sz="2100" b="0">
                 <a:solidFill>
                   <a:srgbClr val="252638"/>
@@ -7294,6 +9225,7 @@
               </a:defRPr>
             </a:lvl6pPr>
             <a:lvl7pPr>
+              <a:buNone/>
               <a:defRPr sz="2100" b="0">
                 <a:solidFill>
                   <a:srgbClr val="252638"/>
@@ -7304,6 +9236,7 @@
               </a:defRPr>
             </a:lvl7pPr>
             <a:lvl8pPr>
+              <a:buNone/>
               <a:defRPr sz="2100" b="0">
                 <a:solidFill>
                   <a:srgbClr val="252638"/>
@@ -7314,6 +9247,7 @@
               </a:defRPr>
             </a:lvl8pPr>
             <a:lvl9pPr>
+              <a:buNone/>
               <a:defRPr sz="2100" b="0">
                 <a:solidFill>
                   <a:srgbClr val="252638"/>
@@ -7326,6 +9260,7 @@
           </a:lstStyle>
           <a:p xmlns:a="http://schemas.openxmlformats.org/drawingml/2006/main">
             <a:pPr>
+              <a:buNone/>
               <a:defRPr sz="2100" b="0">
                 <a:solidFill>
                   <a:srgbClr val="252638"/>
@@ -7336,7 +9271,7 @@
               </a:defRPr>
             </a:pPr>
             <a:r>
-              <a:rPr sz="2100" b="0">
+              <a:rPr sz="1800" b="0">
                 <a:solidFill>
                   <a:srgbClr val="252638"/>
                 </a:solidFill>
@@ -7344,7 +9279,7 @@
                 <a:ea typeface="DejaVu Sans"/>
                 <a:cs typeface="DejaVu Sans"/>
               </a:rPr>
-              <a:t>Teacher по заявке, редактирование своего курса</a:t>
+              <a:t>Регистрация требует подтверждения email. Права преподавателя выдаются по заявке.</a:t>
             </a:r>
           </a:p>
         </p:txBody>
@@ -7365,8 +9300,8 @@
         </p:nvSpPr>
         <p:spPr>
           <a:xfrm xmlns:a="http://schemas.openxmlformats.org/drawingml/2006/main">
-            <a:off x="609600" y="3590925"/>
-            <a:ext cx="10668000" cy="571500"/>
+            <a:off x="609600" y="3638550"/>
+            <a:ext cx="10668000" cy="723900"/>
           </a:xfrm>
           <a:prstGeom xmlns:a="http://schemas.openxmlformats.org/drawingml/2006/main" prst="rect">
             <a:avLst/>
@@ -7381,7 +9316,7 @@
           <a:bodyPr xmlns:a="http://schemas.openxmlformats.org/drawingml/2006/main" anchor="t"/>
           <a:lstStyle xmlns:a="http://schemas.openxmlformats.org/drawingml/2006/main">
             <a:defPPr>
-              <a:defRPr sz="2100" b="0">
+              <a:defRPr sz="1800" b="0">
                 <a:solidFill>
                   <a:srgbClr val="252638"/>
                 </a:solidFill>
@@ -7391,6 +9326,7 @@
               </a:defRPr>
             </a:defPPr>
             <a:lvl1pPr>
+              <a:buNone/>
               <a:defRPr sz="2100" b="0">
                 <a:solidFill>
                   <a:srgbClr val="252638"/>
@@ -7401,6 +9337,7 @@
               </a:defRPr>
             </a:lvl1pPr>
             <a:lvl2pPr>
+              <a:buNone/>
               <a:defRPr sz="2100" b="0">
                 <a:solidFill>
                   <a:srgbClr val="252638"/>
@@ -7411,6 +9348,7 @@
               </a:defRPr>
             </a:lvl2pPr>
             <a:lvl3pPr>
+              <a:buNone/>
               <a:defRPr sz="2100" b="0">
                 <a:solidFill>
                   <a:srgbClr val="252638"/>
@@ -7421,6 +9359,7 @@
               </a:defRPr>
             </a:lvl3pPr>
             <a:lvl4pPr>
+              <a:buNone/>
               <a:defRPr sz="2100" b="0">
                 <a:solidFill>
                   <a:srgbClr val="252638"/>
@@ -7431,6 +9370,7 @@
               </a:defRPr>
             </a:lvl4pPr>
             <a:lvl5pPr>
+              <a:buNone/>
               <a:defRPr sz="2100" b="0">
                 <a:solidFill>
                   <a:srgbClr val="252638"/>
@@ -7441,6 +9381,7 @@
               </a:defRPr>
             </a:lvl5pPr>
             <a:lvl6pPr>
+              <a:buNone/>
               <a:defRPr sz="2100" b="0">
                 <a:solidFill>
                   <a:srgbClr val="252638"/>
@@ -7451,6 +9392,7 @@
               </a:defRPr>
             </a:lvl6pPr>
             <a:lvl7pPr>
+              <a:buNone/>
               <a:defRPr sz="2100" b="0">
                 <a:solidFill>
                   <a:srgbClr val="252638"/>
@@ -7461,6 +9403,7 @@
               </a:defRPr>
             </a:lvl7pPr>
             <a:lvl8pPr>
+              <a:buNone/>
               <a:defRPr sz="2100" b="0">
                 <a:solidFill>
                   <a:srgbClr val="252638"/>
@@ -7471,6 +9414,7 @@
               </a:defRPr>
             </a:lvl8pPr>
             <a:lvl9pPr>
+              <a:buNone/>
               <a:defRPr sz="2100" b="0">
                 <a:solidFill>
                   <a:srgbClr val="252638"/>
@@ -7483,6 +9427,7 @@
           </a:lstStyle>
           <a:p xmlns:a="http://schemas.openxmlformats.org/drawingml/2006/main">
             <a:pPr>
+              <a:buNone/>
               <a:defRPr sz="2100" b="0">
                 <a:solidFill>
                   <a:srgbClr val="252638"/>
@@ -7493,7 +9438,7 @@
               </a:defRPr>
             </a:pPr>
             <a:r>
-              <a:rPr sz="2100" b="0">
+              <a:rPr sz="1800" b="0">
                 <a:solidFill>
                   <a:srgbClr val="252638"/>
                 </a:solidFill>
@@ -7501,7 +9446,7 @@
                 <a:ea typeface="DejaVu Sans"/>
                 <a:cs typeface="DejaVu Sans"/>
               </a:rPr>
-              <a:t>Статусы курса, архив и мягкое удаление</a:t>
+              <a:t>Для курса определены статусы, доступ студентов, архив и восстановление после удаления.</a:t>
             </a:r>
           </a:p>
         </p:txBody>
@@ -7522,8 +9467,8 @@
         </p:nvSpPr>
         <p:spPr>
           <a:xfrm xmlns:a="http://schemas.openxmlformats.org/drawingml/2006/main">
-            <a:off x="609600" y="4314825"/>
-            <a:ext cx="10668000" cy="571500"/>
+            <a:off x="609600" y="4410075"/>
+            <a:ext cx="10668000" cy="723900"/>
           </a:xfrm>
           <a:prstGeom xmlns:a="http://schemas.openxmlformats.org/drawingml/2006/main" prst="rect">
             <a:avLst/>
@@ -7538,7 +9483,7 @@
           <a:bodyPr xmlns:a="http://schemas.openxmlformats.org/drawingml/2006/main" anchor="t"/>
           <a:lstStyle xmlns:a="http://schemas.openxmlformats.org/drawingml/2006/main">
             <a:defPPr>
-              <a:defRPr sz="2100" b="0">
+              <a:defRPr sz="1800" b="0">
                 <a:solidFill>
                   <a:srgbClr val="252638"/>
                 </a:solidFill>
@@ -7548,6 +9493,7 @@
               </a:defRPr>
             </a:defPPr>
             <a:lvl1pPr>
+              <a:buNone/>
               <a:defRPr sz="2100" b="0">
                 <a:solidFill>
                   <a:srgbClr val="252638"/>
@@ -7558,6 +9504,7 @@
               </a:defRPr>
             </a:lvl1pPr>
             <a:lvl2pPr>
+              <a:buNone/>
               <a:defRPr sz="2100" b="0">
                 <a:solidFill>
                   <a:srgbClr val="252638"/>
@@ -7568,6 +9515,7 @@
               </a:defRPr>
             </a:lvl2pPr>
             <a:lvl3pPr>
+              <a:buNone/>
               <a:defRPr sz="2100" b="0">
                 <a:solidFill>
                   <a:srgbClr val="252638"/>
@@ -7578,6 +9526,7 @@
               </a:defRPr>
             </a:lvl3pPr>
             <a:lvl4pPr>
+              <a:buNone/>
               <a:defRPr sz="2100" b="0">
                 <a:solidFill>
                   <a:srgbClr val="252638"/>
@@ -7588,6 +9537,7 @@
               </a:defRPr>
             </a:lvl4pPr>
             <a:lvl5pPr>
+              <a:buNone/>
               <a:defRPr sz="2100" b="0">
                 <a:solidFill>
                   <a:srgbClr val="252638"/>
@@ -7598,6 +9548,7 @@
               </a:defRPr>
             </a:lvl5pPr>
             <a:lvl6pPr>
+              <a:buNone/>
               <a:defRPr sz="2100" b="0">
                 <a:solidFill>
                   <a:srgbClr val="252638"/>
@@ -7608,6 +9559,7 @@
               </a:defRPr>
             </a:lvl6pPr>
             <a:lvl7pPr>
+              <a:buNone/>
               <a:defRPr sz="2100" b="0">
                 <a:solidFill>
                   <a:srgbClr val="252638"/>
@@ -7618,6 +9570,7 @@
               </a:defRPr>
             </a:lvl7pPr>
             <a:lvl8pPr>
+              <a:buNone/>
               <a:defRPr sz="2100" b="0">
                 <a:solidFill>
                   <a:srgbClr val="252638"/>
@@ -7628,6 +9581,7 @@
               </a:defRPr>
             </a:lvl8pPr>
             <a:lvl9pPr>
+              <a:buNone/>
               <a:defRPr sz="2100" b="0">
                 <a:solidFill>
                   <a:srgbClr val="252638"/>
@@ -7640,6 +9594,7 @@
           </a:lstStyle>
           <a:p xmlns:a="http://schemas.openxmlformats.org/drawingml/2006/main">
             <a:pPr>
+              <a:buNone/>
               <a:defRPr sz="2100" b="0">
                 <a:solidFill>
                   <a:srgbClr val="252638"/>
@@ -7650,7 +9605,7 @@
               </a:defRPr>
             </a:pPr>
             <a:r>
-              <a:rPr sz="2100" b="0">
+              <a:rPr sz="1800" b="0">
                 <a:solidFill>
                   <a:srgbClr val="252638"/>
                 </a:solidFill>
@@ -7658,7 +9613,7 @@
                 <a:ea typeface="DejaVu Sans"/>
                 <a:cs typeface="DejaVu Sans"/>
               </a:rPr>
-              <a:t>Квиз: 3 попытки, 20 минут, порог 70%</a:t>
+              <a:t>Квиз: 3 попытки по 20 минут, порог 70%. Учитываем лучший балл и наличие успешной попытки.</a:t>
             </a:r>
           </a:p>
         </p:txBody>
@@ -7679,8 +9634,8 @@
         </p:nvSpPr>
         <p:spPr>
           <a:xfrm xmlns:a="http://schemas.openxmlformats.org/drawingml/2006/main">
-            <a:off x="609600" y="5038725"/>
-            <a:ext cx="10668000" cy="571500"/>
+            <a:off x="609600" y="5181600"/>
+            <a:ext cx="10668000" cy="723900"/>
           </a:xfrm>
           <a:prstGeom xmlns:a="http://schemas.openxmlformats.org/drawingml/2006/main" prst="rect">
             <a:avLst/>
@@ -7695,7 +9650,7 @@
           <a:bodyPr xmlns:a="http://schemas.openxmlformats.org/drawingml/2006/main" anchor="t"/>
           <a:lstStyle xmlns:a="http://schemas.openxmlformats.org/drawingml/2006/main">
             <a:defPPr>
-              <a:defRPr sz="2100" b="0">
+              <a:defRPr sz="1800" b="0">
                 <a:solidFill>
                   <a:srgbClr val="252638"/>
                 </a:solidFill>
@@ -7705,6 +9660,7 @@
               </a:defRPr>
             </a:defPPr>
             <a:lvl1pPr>
+              <a:buNone/>
               <a:defRPr sz="2100" b="0">
                 <a:solidFill>
                   <a:srgbClr val="252638"/>
@@ -7715,6 +9671,7 @@
               </a:defRPr>
             </a:lvl1pPr>
             <a:lvl2pPr>
+              <a:buNone/>
               <a:defRPr sz="2100" b="0">
                 <a:solidFill>
                   <a:srgbClr val="252638"/>
@@ -7725,6 +9682,7 @@
               </a:defRPr>
             </a:lvl2pPr>
             <a:lvl3pPr>
+              <a:buNone/>
               <a:defRPr sz="2100" b="0">
                 <a:solidFill>
                   <a:srgbClr val="252638"/>
@@ -7735,6 +9693,7 @@
               </a:defRPr>
             </a:lvl3pPr>
             <a:lvl4pPr>
+              <a:buNone/>
               <a:defRPr sz="2100" b="0">
                 <a:solidFill>
                   <a:srgbClr val="252638"/>
@@ -7745,6 +9704,7 @@
               </a:defRPr>
             </a:lvl4pPr>
             <a:lvl5pPr>
+              <a:buNone/>
               <a:defRPr sz="2100" b="0">
                 <a:solidFill>
                   <a:srgbClr val="252638"/>
@@ -7755,6 +9715,7 @@
               </a:defRPr>
             </a:lvl5pPr>
             <a:lvl6pPr>
+              <a:buNone/>
               <a:defRPr sz="2100" b="0">
                 <a:solidFill>
                   <a:srgbClr val="252638"/>
@@ -7765,6 +9726,7 @@
               </a:defRPr>
             </a:lvl6pPr>
             <a:lvl7pPr>
+              <a:buNone/>
               <a:defRPr sz="2100" b="0">
                 <a:solidFill>
                   <a:srgbClr val="252638"/>
@@ -7775,6 +9737,7 @@
               </a:defRPr>
             </a:lvl7pPr>
             <a:lvl8pPr>
+              <a:buNone/>
               <a:defRPr sz="2100" b="0">
                 <a:solidFill>
                   <a:srgbClr val="252638"/>
@@ -7785,6 +9748,7 @@
               </a:defRPr>
             </a:lvl8pPr>
             <a:lvl9pPr>
+              <a:buNone/>
               <a:defRPr sz="2100" b="0">
                 <a:solidFill>
                   <a:srgbClr val="252638"/>
@@ -7797,6 +9761,7 @@
           </a:lstStyle>
           <a:p xmlns:a="http://schemas.openxmlformats.org/drawingml/2006/main">
             <a:pPr>
+              <a:buNone/>
               <a:defRPr sz="2100" b="0">
                 <a:solidFill>
                   <a:srgbClr val="252638"/>
@@ -7807,7 +9772,7 @@
               </a:defRPr>
             </a:pPr>
             <a:r>
-              <a:rPr sz="2100" b="0">
+              <a:rPr sz="1800" b="0">
                 <a:solidFill>
                   <a:srgbClr val="252638"/>
                 </a:solidFill>
@@ -7815,7 +9780,7 @@
                 <a:ea typeface="DejaVu Sans"/>
                 <a:cs typeface="DejaVu Sans"/>
               </a:rPr>
-              <a:t>Сохранение истории и измеримая нагрузка</a:t>
+              <a:t>Отписка сохраняет историю. В ТЗ заданы лимиты материалов и профиль нагрузочных испытаний.</a:t>
             </a:r>
           </a:p>
         </p:txBody>
@@ -7830,7 +9795,7 @@
 </p:sld>
 </file>
 
-<file path=ppt/slides/slide4.xml><?xml version="1.0" encoding="utf-8"?>
+<file path=ppt/slides/slide5.xml><?xml version="1.0" encoding="utf-8"?>
 <p:sld xmlns:p="http://schemas.openxmlformats.org/presentationml/2006/main">
   <p:cSld>
     <p:bg>
@@ -7891,6 +9856,7 @@
               </a:defRPr>
             </a:defPPr>
             <a:lvl1pPr>
+              <a:buNone/>
               <a:defRPr sz="1125" b="1">
                 <a:solidFill>
                   <a:srgbClr val="6145E6"/>
@@ -7901,6 +9867,7 @@
               </a:defRPr>
             </a:lvl1pPr>
             <a:lvl2pPr>
+              <a:buNone/>
               <a:defRPr sz="1125" b="1">
                 <a:solidFill>
                   <a:srgbClr val="6145E6"/>
@@ -7911,6 +9878,7 @@
               </a:defRPr>
             </a:lvl2pPr>
             <a:lvl3pPr>
+              <a:buNone/>
               <a:defRPr sz="1125" b="1">
                 <a:solidFill>
                   <a:srgbClr val="6145E6"/>
@@ -7921,6 +9889,7 @@
               </a:defRPr>
             </a:lvl3pPr>
             <a:lvl4pPr>
+              <a:buNone/>
               <a:defRPr sz="1125" b="1">
                 <a:solidFill>
                   <a:srgbClr val="6145E6"/>
@@ -7931,6 +9900,7 @@
               </a:defRPr>
             </a:lvl4pPr>
             <a:lvl5pPr>
+              <a:buNone/>
               <a:defRPr sz="1125" b="1">
                 <a:solidFill>
                   <a:srgbClr val="6145E6"/>
@@ -7941,6 +9911,7 @@
               </a:defRPr>
             </a:lvl5pPr>
             <a:lvl6pPr>
+              <a:buNone/>
               <a:defRPr sz="1125" b="1">
                 <a:solidFill>
                   <a:srgbClr val="6145E6"/>
@@ -7951,6 +9922,7 @@
               </a:defRPr>
             </a:lvl6pPr>
             <a:lvl7pPr>
+              <a:buNone/>
               <a:defRPr sz="1125" b="1">
                 <a:solidFill>
                   <a:srgbClr val="6145E6"/>
@@ -7961,6 +9933,7 @@
               </a:defRPr>
             </a:lvl7pPr>
             <a:lvl8pPr>
+              <a:buNone/>
               <a:defRPr sz="1125" b="1">
                 <a:solidFill>
                   <a:srgbClr val="6145E6"/>
@@ -7971,6 +9944,7 @@
               </a:defRPr>
             </a:lvl8pPr>
             <a:lvl9pPr>
+              <a:buNone/>
               <a:defRPr sz="1125" b="1">
                 <a:solidFill>
                   <a:srgbClr val="6145E6"/>
@@ -7983,6 +9957,7 @@
           </a:lstStyle>
           <a:p xmlns:a="http://schemas.openxmlformats.org/drawingml/2006/main">
             <a:pPr>
+              <a:buNone/>
               <a:defRPr sz="1125" b="1">
                 <a:solidFill>
                   <a:srgbClr val="6145E6"/>
@@ -8048,6 +10023,7 @@
               </a:defRPr>
             </a:defPPr>
             <a:lvl1pPr>
+              <a:buNone/>
               <a:defRPr sz="3600" b="1">
                 <a:solidFill>
                   <a:srgbClr val="252638"/>
@@ -8058,6 +10034,7 @@
               </a:defRPr>
             </a:lvl1pPr>
             <a:lvl2pPr>
+              <a:buNone/>
               <a:defRPr sz="3600" b="1">
                 <a:solidFill>
                   <a:srgbClr val="252638"/>
@@ -8068,6 +10045,7 @@
               </a:defRPr>
             </a:lvl2pPr>
             <a:lvl3pPr>
+              <a:buNone/>
               <a:defRPr sz="3600" b="1">
                 <a:solidFill>
                   <a:srgbClr val="252638"/>
@@ -8078,6 +10056,7 @@
               </a:defRPr>
             </a:lvl3pPr>
             <a:lvl4pPr>
+              <a:buNone/>
               <a:defRPr sz="3600" b="1">
                 <a:solidFill>
                   <a:srgbClr val="252638"/>
@@ -8088,6 +10067,7 @@
               </a:defRPr>
             </a:lvl4pPr>
             <a:lvl5pPr>
+              <a:buNone/>
               <a:defRPr sz="3600" b="1">
                 <a:solidFill>
                   <a:srgbClr val="252638"/>
@@ -8098,6 +10078,7 @@
               </a:defRPr>
             </a:lvl5pPr>
             <a:lvl6pPr>
+              <a:buNone/>
               <a:defRPr sz="3600" b="1">
                 <a:solidFill>
                   <a:srgbClr val="252638"/>
@@ -8108,6 +10089,7 @@
               </a:defRPr>
             </a:lvl6pPr>
             <a:lvl7pPr>
+              <a:buNone/>
               <a:defRPr sz="3600" b="1">
                 <a:solidFill>
                   <a:srgbClr val="252638"/>
@@ -8118,6 +10100,7 @@
               </a:defRPr>
             </a:lvl7pPr>
             <a:lvl8pPr>
+              <a:buNone/>
               <a:defRPr sz="3600" b="1">
                 <a:solidFill>
                   <a:srgbClr val="252638"/>
@@ -8128,6 +10111,7 @@
               </a:defRPr>
             </a:lvl8pPr>
             <a:lvl9pPr>
+              <a:buNone/>
               <a:defRPr sz="3600" b="1">
                 <a:solidFill>
                   <a:srgbClr val="252638"/>
@@ -8140,6 +10124,7 @@
           </a:lstStyle>
           <a:p xmlns:a="http://schemas.openxmlformats.org/drawingml/2006/main">
             <a:pPr>
+              <a:buNone/>
               <a:defRPr sz="3600" b="1">
                 <a:solidFill>
                   <a:srgbClr val="252638"/>
@@ -8205,6 +10190,7 @@
               </a:defRPr>
             </a:defPPr>
             <a:lvl1pPr>
+              <a:buNone/>
               <a:defRPr sz="1200" b="0">
                 <a:solidFill>
                   <a:srgbClr val="858393"/>
@@ -8215,6 +10201,7 @@
               </a:defRPr>
             </a:lvl1pPr>
             <a:lvl2pPr>
+              <a:buNone/>
               <a:defRPr sz="1200" b="0">
                 <a:solidFill>
                   <a:srgbClr val="858393"/>
@@ -8225,6 +10212,7 @@
               </a:defRPr>
             </a:lvl2pPr>
             <a:lvl3pPr>
+              <a:buNone/>
               <a:defRPr sz="1200" b="0">
                 <a:solidFill>
                   <a:srgbClr val="858393"/>
@@ -8235,6 +10223,7 @@
               </a:defRPr>
             </a:lvl3pPr>
             <a:lvl4pPr>
+              <a:buNone/>
               <a:defRPr sz="1200" b="0">
                 <a:solidFill>
                   <a:srgbClr val="858393"/>
@@ -8245,6 +10234,7 @@
               </a:defRPr>
             </a:lvl4pPr>
             <a:lvl5pPr>
+              <a:buNone/>
               <a:defRPr sz="1200" b="0">
                 <a:solidFill>
                   <a:srgbClr val="858393"/>
@@ -8255,6 +10245,7 @@
               </a:defRPr>
             </a:lvl5pPr>
             <a:lvl6pPr>
+              <a:buNone/>
               <a:defRPr sz="1200" b="0">
                 <a:solidFill>
                   <a:srgbClr val="858393"/>
@@ -8265,6 +10256,7 @@
               </a:defRPr>
             </a:lvl6pPr>
             <a:lvl7pPr>
+              <a:buNone/>
               <a:defRPr sz="1200" b="0">
                 <a:solidFill>
                   <a:srgbClr val="858393"/>
@@ -8275,6 +10267,7 @@
               </a:defRPr>
             </a:lvl7pPr>
             <a:lvl8pPr>
+              <a:buNone/>
               <a:defRPr sz="1200" b="0">
                 <a:solidFill>
                   <a:srgbClr val="858393"/>
@@ -8285,6 +10278,7 @@
               </a:defRPr>
             </a:lvl8pPr>
             <a:lvl9pPr>
+              <a:buNone/>
               <a:defRPr sz="1200" b="0">
                 <a:solidFill>
                   <a:srgbClr val="858393"/>
@@ -8297,6 +10291,7 @@
           </a:lstStyle>
           <a:p xmlns:a="http://schemas.openxmlformats.org/drawingml/2006/main">
             <a:pPr>
+              <a:buNone/>
               <a:defRPr sz="1200" b="0">
                 <a:solidFill>
                   <a:srgbClr val="858393"/>
@@ -8315,7 +10310,7 @@
                 <a:ea typeface="DejaVu Sans"/>
                 <a:cs typeface="DejaVu Sans"/>
               </a:rPr>
-              <a:t>04</a:t>
+              <a:t>05</a:t>
             </a:r>
           </a:p>
         </p:txBody>
@@ -8362,6 +10357,7 @@
               </a:defRPr>
             </a:defPPr>
             <a:lvl1pPr>
+              <a:buNone/>
               <a:defRPr sz="2250" b="1">
                 <a:solidFill>
                   <a:srgbClr val="6145E6"/>
@@ -8372,6 +10368,7 @@
               </a:defRPr>
             </a:lvl1pPr>
             <a:lvl2pPr>
+              <a:buNone/>
               <a:defRPr sz="2250" b="1">
                 <a:solidFill>
                   <a:srgbClr val="6145E6"/>
@@ -8382,6 +10379,7 @@
               </a:defRPr>
             </a:lvl2pPr>
             <a:lvl3pPr>
+              <a:buNone/>
               <a:defRPr sz="2250" b="1">
                 <a:solidFill>
                   <a:srgbClr val="6145E6"/>
@@ -8392,6 +10390,7 @@
               </a:defRPr>
             </a:lvl3pPr>
             <a:lvl4pPr>
+              <a:buNone/>
               <a:defRPr sz="2250" b="1">
                 <a:solidFill>
                   <a:srgbClr val="6145E6"/>
@@ -8402,6 +10401,7 @@
               </a:defRPr>
             </a:lvl4pPr>
             <a:lvl5pPr>
+              <a:buNone/>
               <a:defRPr sz="2250" b="1">
                 <a:solidFill>
                   <a:srgbClr val="6145E6"/>
@@ -8412,6 +10412,7 @@
               </a:defRPr>
             </a:lvl5pPr>
             <a:lvl6pPr>
+              <a:buNone/>
               <a:defRPr sz="2250" b="1">
                 <a:solidFill>
                   <a:srgbClr val="6145E6"/>
@@ -8422,6 +10423,7 @@
               </a:defRPr>
             </a:lvl6pPr>
             <a:lvl7pPr>
+              <a:buNone/>
               <a:defRPr sz="2250" b="1">
                 <a:solidFill>
                   <a:srgbClr val="6145E6"/>
@@ -8432,6 +10434,7 @@
               </a:defRPr>
             </a:lvl7pPr>
             <a:lvl8pPr>
+              <a:buNone/>
               <a:defRPr sz="2250" b="1">
                 <a:solidFill>
                   <a:srgbClr val="6145E6"/>
@@ -8442,6 +10445,7 @@
               </a:defRPr>
             </a:lvl8pPr>
             <a:lvl9pPr>
+              <a:buNone/>
               <a:defRPr sz="2250" b="1">
                 <a:solidFill>
                   <a:srgbClr val="6145E6"/>
@@ -8454,6 +10458,7 @@
           </a:lstStyle>
           <a:p xmlns:a="http://schemas.openxmlformats.org/drawingml/2006/main">
             <a:pPr>
+              <a:buNone/>
               <a:defRPr sz="2250" b="1">
                 <a:solidFill>
                   <a:srgbClr val="6145E6"/>
@@ -8509,7 +10514,7 @@
           <a:bodyPr xmlns:a="http://schemas.openxmlformats.org/drawingml/2006/main" anchor="t"/>
           <a:lstStyle xmlns:a="http://schemas.openxmlformats.org/drawingml/2006/main">
             <a:defPPr>
-              <a:defRPr sz="2025" b="0">
+              <a:defRPr sz="1800" b="0">
                 <a:solidFill>
                   <a:srgbClr val="252638"/>
                 </a:solidFill>
@@ -8519,6 +10524,7 @@
               </a:defRPr>
             </a:defPPr>
             <a:lvl1pPr>
+              <a:buNone/>
               <a:defRPr sz="2025" b="0">
                 <a:solidFill>
                   <a:srgbClr val="252638"/>
@@ -8529,6 +10535,7 @@
               </a:defRPr>
             </a:lvl1pPr>
             <a:lvl2pPr>
+              <a:buNone/>
               <a:defRPr sz="2025" b="0">
                 <a:solidFill>
                   <a:srgbClr val="252638"/>
@@ -8539,6 +10546,7 @@
               </a:defRPr>
             </a:lvl2pPr>
             <a:lvl3pPr>
+              <a:buNone/>
               <a:defRPr sz="2025" b="0">
                 <a:solidFill>
                   <a:srgbClr val="252638"/>
@@ -8549,6 +10557,7 @@
               </a:defRPr>
             </a:lvl3pPr>
             <a:lvl4pPr>
+              <a:buNone/>
               <a:defRPr sz="2025" b="0">
                 <a:solidFill>
                   <a:srgbClr val="252638"/>
@@ -8559,6 +10568,7 @@
               </a:defRPr>
             </a:lvl4pPr>
             <a:lvl5pPr>
+              <a:buNone/>
               <a:defRPr sz="2025" b="0">
                 <a:solidFill>
                   <a:srgbClr val="252638"/>
@@ -8569,6 +10579,7 @@
               </a:defRPr>
             </a:lvl5pPr>
             <a:lvl6pPr>
+              <a:buNone/>
               <a:defRPr sz="2025" b="0">
                 <a:solidFill>
                   <a:srgbClr val="252638"/>
@@ -8579,6 +10590,7 @@
               </a:defRPr>
             </a:lvl6pPr>
             <a:lvl7pPr>
+              <a:buNone/>
               <a:defRPr sz="2025" b="0">
                 <a:solidFill>
                   <a:srgbClr val="252638"/>
@@ -8589,6 +10601,7 @@
               </a:defRPr>
             </a:lvl7pPr>
             <a:lvl8pPr>
+              <a:buNone/>
               <a:defRPr sz="2025" b="0">
                 <a:solidFill>
                   <a:srgbClr val="252638"/>
@@ -8599,6 +10612,7 @@
               </a:defRPr>
             </a:lvl8pPr>
             <a:lvl9pPr>
+              <a:buNone/>
               <a:defRPr sz="2025" b="0">
                 <a:solidFill>
                   <a:srgbClr val="252638"/>
@@ -8611,6 +10625,7 @@
           </a:lstStyle>
           <a:p xmlns:a="http://schemas.openxmlformats.org/drawingml/2006/main">
             <a:pPr>
+              <a:buNone/>
               <a:defRPr sz="2025" b="0">
                 <a:solidFill>
                   <a:srgbClr val="252638"/>
@@ -8621,7 +10636,7 @@
               </a:defRPr>
             </a:pPr>
             <a:r>
-              <a:rPr sz="2025" b="0">
+              <a:rPr sz="1800" b="0">
                 <a:solidFill>
                   <a:srgbClr val="252638"/>
                 </a:solidFill>
@@ -8629,11 +10644,12 @@
                 <a:ea typeface="DejaVu Sans"/>
                 <a:cs typeface="DejaVu Sans"/>
               </a:rPr>
-              <a:t>ТЗ 2.0 и задачи разработки/QA</a:t>
+              <a:t>Подготовлены ТЗ 2.0 и HTML-прототип.</a:t>
             </a:r>
           </a:p>
           <a:p xmlns:a="http://schemas.openxmlformats.org/drawingml/2006/main">
             <a:pPr>
+              <a:buNone/>
               <a:defRPr sz="2025" b="0">
                 <a:solidFill>
                   <a:srgbClr val="252638"/>
@@ -8644,7 +10660,7 @@
               </a:defRPr>
             </a:pPr>
             <a:r>
-              <a:rPr sz="2025" b="0">
+              <a:rPr sz="1800" b="0">
                 <a:solidFill>
                   <a:srgbClr val="252638"/>
                 </a:solidFill>
@@ -8652,11 +10668,12 @@
                 <a:ea typeface="DejaVu Sans"/>
                 <a:cs typeface="DejaVu Sans"/>
               </a:rPr>
-              <a:t>HTML-каталог и демообучение</a:t>
+              <a:t>Исходники и документы опубликованы в GitHub.</a:t>
             </a:r>
           </a:p>
           <a:p xmlns:a="http://schemas.openxmlformats.org/drawingml/2006/main">
             <a:pPr>
+              <a:buNone/>
               <a:defRPr sz="2025" b="0">
                 <a:solidFill>
                   <a:srgbClr val="252638"/>
@@ -8667,7 +10684,7 @@
               </a:defRPr>
             </a:pPr>
             <a:r>
-              <a:rPr sz="2025" b="0">
+              <a:rPr sz="1800" b="0">
                 <a:solidFill>
                   <a:srgbClr val="252638"/>
                 </a:solidFill>
@@ -8675,7 +10692,31 @@
                 <a:ea typeface="DejaVu Sans"/>
                 <a:cs typeface="DejaVu Sans"/>
               </a:rPr>
-              <a:t>Сценарии приёмочной проверки</a:t>
+              <a:t>В Trello связаны разработка и проверка.</a:t>
+            </a:r>
+          </a:p>
+          <a:p xmlns:a="http://schemas.openxmlformats.org/drawingml/2006/main">
+            <a:pPr>
+              <a:buNone/>
+              <a:defRPr sz="2025" b="0">
+                <a:solidFill>
+                  <a:srgbClr val="252638"/>
+                </a:solidFill>
+                <a:latin typeface="DejaVu Sans"/>
+                <a:ea typeface="DejaVu Sans"/>
+                <a:cs typeface="DejaVu Sans"/>
+              </a:defRPr>
+            </a:pPr>
+            <a:r>
+              <a:rPr sz="1800" b="0">
+                <a:solidFill>
+                  <a:srgbClr val="252638"/>
+                </a:solidFill>
+                <a:latin typeface="DejaVu Sans"/>
+                <a:ea typeface="DejaVu Sans"/>
+                <a:cs typeface="DejaVu Sans"/>
+              </a:rPr>
+              <a:t>Назначены ответственные на все 46 карточек.</a:t>
             </a:r>
           </a:p>
         </p:txBody>
@@ -8722,6 +10763,7 @@
               </a:defRPr>
             </a:defPPr>
             <a:lvl1pPr>
+              <a:buNone/>
               <a:defRPr sz="2250" b="1">
                 <a:solidFill>
                   <a:srgbClr val="252638"/>
@@ -8732,6 +10774,7 @@
               </a:defRPr>
             </a:lvl1pPr>
             <a:lvl2pPr>
+              <a:buNone/>
               <a:defRPr sz="2250" b="1">
                 <a:solidFill>
                   <a:srgbClr val="252638"/>
@@ -8742,6 +10785,7 @@
               </a:defRPr>
             </a:lvl2pPr>
             <a:lvl3pPr>
+              <a:buNone/>
               <a:defRPr sz="2250" b="1">
                 <a:solidFill>
                   <a:srgbClr val="252638"/>
@@ -8752,6 +10796,7 @@
               </a:defRPr>
             </a:lvl3pPr>
             <a:lvl4pPr>
+              <a:buNone/>
               <a:defRPr sz="2250" b="1">
                 <a:solidFill>
                   <a:srgbClr val="252638"/>
@@ -8762,6 +10807,7 @@
               </a:defRPr>
             </a:lvl4pPr>
             <a:lvl5pPr>
+              <a:buNone/>
               <a:defRPr sz="2250" b="1">
                 <a:solidFill>
                   <a:srgbClr val="252638"/>
@@ -8772,6 +10818,7 @@
               </a:defRPr>
             </a:lvl5pPr>
             <a:lvl6pPr>
+              <a:buNone/>
               <a:defRPr sz="2250" b="1">
                 <a:solidFill>
                   <a:srgbClr val="252638"/>
@@ -8782,6 +10829,7 @@
               </a:defRPr>
             </a:lvl6pPr>
             <a:lvl7pPr>
+              <a:buNone/>
               <a:defRPr sz="2250" b="1">
                 <a:solidFill>
                   <a:srgbClr val="252638"/>
@@ -8792,6 +10840,7 @@
               </a:defRPr>
             </a:lvl7pPr>
             <a:lvl8pPr>
+              <a:buNone/>
               <a:defRPr sz="2250" b="1">
                 <a:solidFill>
                   <a:srgbClr val="252638"/>
@@ -8802,6 +10851,7 @@
               </a:defRPr>
             </a:lvl8pPr>
             <a:lvl9pPr>
+              <a:buNone/>
               <a:defRPr sz="2250" b="1">
                 <a:solidFill>
                   <a:srgbClr val="252638"/>
@@ -8814,6 +10864,7 @@
           </a:lstStyle>
           <a:p xmlns:a="http://schemas.openxmlformats.org/drawingml/2006/main">
             <a:pPr>
+              <a:buNone/>
               <a:defRPr sz="2250" b="1">
                 <a:solidFill>
                   <a:srgbClr val="252638"/>
@@ -8854,7 +10905,7 @@
         <p:spPr>
           <a:xfrm xmlns:a="http://schemas.openxmlformats.org/drawingml/2006/main">
             <a:off x="609600" y="4953000"/>
-            <a:ext cx="6572250" cy="952500"/>
+            <a:ext cx="6572250" cy="1047750"/>
           </a:xfrm>
           <a:prstGeom xmlns:a="http://schemas.openxmlformats.org/drawingml/2006/main" prst="rect">
             <a:avLst/>
@@ -8869,7 +10920,7 @@
           <a:bodyPr xmlns:a="http://schemas.openxmlformats.org/drawingml/2006/main" anchor="t"/>
           <a:lstStyle xmlns:a="http://schemas.openxmlformats.org/drawingml/2006/main">
             <a:defPPr>
-              <a:defRPr sz="2025" b="0">
+              <a:defRPr sz="1800" b="0">
                 <a:solidFill>
                   <a:srgbClr val="777383"/>
                 </a:solidFill>
@@ -8879,6 +10930,7 @@
               </a:defRPr>
             </a:defPPr>
             <a:lvl1pPr>
+              <a:buNone/>
               <a:defRPr sz="2025" b="0">
                 <a:solidFill>
                   <a:srgbClr val="777383"/>
@@ -8889,6 +10941,7 @@
               </a:defRPr>
             </a:lvl1pPr>
             <a:lvl2pPr>
+              <a:buNone/>
               <a:defRPr sz="2025" b="0">
                 <a:solidFill>
                   <a:srgbClr val="777383"/>
@@ -8899,6 +10952,7 @@
               </a:defRPr>
             </a:lvl2pPr>
             <a:lvl3pPr>
+              <a:buNone/>
               <a:defRPr sz="2025" b="0">
                 <a:solidFill>
                   <a:srgbClr val="777383"/>
@@ -8909,6 +10963,7 @@
               </a:defRPr>
             </a:lvl3pPr>
             <a:lvl4pPr>
+              <a:buNone/>
               <a:defRPr sz="2025" b="0">
                 <a:solidFill>
                   <a:srgbClr val="777383"/>
@@ -8919,6 +10974,7 @@
               </a:defRPr>
             </a:lvl4pPr>
             <a:lvl5pPr>
+              <a:buNone/>
               <a:defRPr sz="2025" b="0">
                 <a:solidFill>
                   <a:srgbClr val="777383"/>
@@ -8929,6 +10985,7 @@
               </a:defRPr>
             </a:lvl5pPr>
             <a:lvl6pPr>
+              <a:buNone/>
               <a:defRPr sz="2025" b="0">
                 <a:solidFill>
                   <a:srgbClr val="777383"/>
@@ -8939,6 +10996,7 @@
               </a:defRPr>
             </a:lvl6pPr>
             <a:lvl7pPr>
+              <a:buNone/>
               <a:defRPr sz="2025" b="0">
                 <a:solidFill>
                   <a:srgbClr val="777383"/>
@@ -8949,6 +11007,7 @@
               </a:defRPr>
             </a:lvl7pPr>
             <a:lvl8pPr>
+              <a:buNone/>
               <a:defRPr sz="2025" b="0">
                 <a:solidFill>
                   <a:srgbClr val="777383"/>
@@ -8959,6 +11018,7 @@
               </a:defRPr>
             </a:lvl8pPr>
             <a:lvl9pPr>
+              <a:buNone/>
               <a:defRPr sz="2025" b="0">
                 <a:solidFill>
                   <a:srgbClr val="777383"/>
@@ -8971,6 +11031,7 @@
           </a:lstStyle>
           <a:p xmlns:a="http://schemas.openxmlformats.org/drawingml/2006/main">
             <a:pPr>
+              <a:buNone/>
               <a:defRPr sz="2025" b="0">
                 <a:solidFill>
                   <a:srgbClr val="777383"/>
@@ -8981,7 +11042,7 @@
               </a:defRPr>
             </a:pPr>
             <a:r>
-              <a:rPr sz="2025" b="0">
+              <a:rPr sz="1800" b="0">
                 <a:solidFill>
                   <a:srgbClr val="777383"/>
                 </a:solidFill>
@@ -8989,11 +11050,12 @@
                 <a:ea typeface="DejaVu Sans"/>
                 <a:cs typeface="DejaVu Sans"/>
               </a:rPr>
-              <a:t>Ревью прототипа, модель БД,</a:t>
+              <a:t>После ревью: схема БД, регистрация</a:t>
             </a:r>
           </a:p>
           <a:p xmlns:a="http://schemas.openxmlformats.org/drawingml/2006/main">
             <a:pPr>
+              <a:buNone/>
               <a:defRPr sz="2025" b="0">
                 <a:solidFill>
                   <a:srgbClr val="777383"/>
@@ -9004,7 +11066,7 @@
               </a:defRPr>
             </a:pPr>
             <a:r>
-              <a:rPr sz="2025" b="0">
+              <a:rPr sz="1800" b="0">
                 <a:solidFill>
                   <a:srgbClr val="777383"/>
                 </a:solidFill>
@@ -9012,7 +11074,31 @@
                 <a:ea typeface="DejaVu Sans"/>
                 <a:cs typeface="DejaVu Sans"/>
               </a:rPr>
-              <a:t>регистрация и серверные права</a:t>
+              <a:t>и серверная проверка прав.</a:t>
+            </a:r>
+          </a:p>
+          <a:p xmlns:a="http://schemas.openxmlformats.org/drawingml/2006/main">
+            <a:pPr>
+              <a:buNone/>
+              <a:defRPr sz="2025" b="0">
+                <a:solidFill>
+                  <a:srgbClr val="777383"/>
+                </a:solidFill>
+                <a:latin typeface="DejaVu Sans"/>
+                <a:ea typeface="DejaVu Sans"/>
+                <a:cs typeface="DejaVu Sans"/>
+              </a:defRPr>
+            </a:pPr>
+            <a:r>
+              <a:rPr sz="1800" b="0">
+                <a:solidFill>
+                  <a:srgbClr val="777383"/>
+                </a:solidFill>
+                <a:latin typeface="DejaVu Sans"/>
+                <a:ea typeface="DejaVu Sans"/>
+                <a:cs typeface="DejaVu Sans"/>
+              </a:rPr>
+              <a:t>Браузерный прогон прототипа ещё открыт.</a:t>
             </a:r>
           </a:p>
         </p:txBody>
@@ -9022,7 +11108,7 @@
           <p:cNvPr id="8" name="">
             <a:extLst xmlns:a="http://schemas.openxmlformats.org/drawingml/2006/main">
               <a:ext uri="{FF2B5EF4-FFF2-40B4-BE49-F238E27FC236}">
-                <a16:creationId xmlns:a16="http://schemas.microsoft.com/office/drawing/2014/main" id="{C5376190-6FB3-4E80-A021-D62852A24DB4}"/>
+                <a16:creationId xmlns:a16="http://schemas.microsoft.com/office/drawing/2014/main" id="{61B12F70-FD0D-498C-AFF2-7336E0519682}"/>
               </a:ext>
             </a:extLst>
           </p:cNvPr>
@@ -9032,7 +11118,7 @@
           <p:nvPr/>
         </p:nvPicPr>
         <p:blipFill>
-          <a:blip xmlns:r="http://schemas.openxmlformats.org/officeDocument/2006/relationships" xmlns:a="http://schemas.openxmlformats.org/drawingml/2006/main" r:embed="R68fc8246b75649bc"/>
+          <a:blip xmlns:r="http://schemas.openxmlformats.org/officeDocument/2006/relationships" xmlns:a="http://schemas.openxmlformats.org/drawingml/2006/main" r:embed="R5d58f458b53d44f4"/>
           <a:stretch xmlns:a="http://schemas.openxmlformats.org/drawingml/2006/main"/>
         </p:blipFill>
         <p:spPr>
@@ -9087,6 +11173,7 @@
               </a:defRPr>
             </a:defPPr>
             <a:lvl1pPr>
+              <a:buNone/>
               <a:defRPr sz="1200" b="0">
                 <a:solidFill>
                   <a:srgbClr val="777383"/>
@@ -9097,6 +11184,7 @@
               </a:defRPr>
             </a:lvl1pPr>
             <a:lvl2pPr>
+              <a:buNone/>
               <a:defRPr sz="1200" b="0">
                 <a:solidFill>
                   <a:srgbClr val="777383"/>
@@ -9107,6 +11195,7 @@
               </a:defRPr>
             </a:lvl2pPr>
             <a:lvl3pPr>
+              <a:buNone/>
               <a:defRPr sz="1200" b="0">
                 <a:solidFill>
                   <a:srgbClr val="777383"/>
@@ -9117,6 +11206,7 @@
               </a:defRPr>
             </a:lvl3pPr>
             <a:lvl4pPr>
+              <a:buNone/>
               <a:defRPr sz="1200" b="0">
                 <a:solidFill>
                   <a:srgbClr val="777383"/>
@@ -9127,6 +11217,7 @@
               </a:defRPr>
             </a:lvl4pPr>
             <a:lvl5pPr>
+              <a:buNone/>
               <a:defRPr sz="1200" b="0">
                 <a:solidFill>
                   <a:srgbClr val="777383"/>
@@ -9137,6 +11228,7 @@
               </a:defRPr>
             </a:lvl5pPr>
             <a:lvl6pPr>
+              <a:buNone/>
               <a:defRPr sz="1200" b="0">
                 <a:solidFill>
                   <a:srgbClr val="777383"/>
@@ -9147,6 +11239,7 @@
               </a:defRPr>
             </a:lvl6pPr>
             <a:lvl7pPr>
+              <a:buNone/>
               <a:defRPr sz="1200" b="0">
                 <a:solidFill>
                   <a:srgbClr val="777383"/>
@@ -9157,6 +11250,7 @@
               </a:defRPr>
             </a:lvl7pPr>
             <a:lvl8pPr>
+              <a:buNone/>
               <a:defRPr sz="1200" b="0">
                 <a:solidFill>
                   <a:srgbClr val="777383"/>
@@ -9167,6 +11261,7 @@
               </a:defRPr>
             </a:lvl8pPr>
             <a:lvl9pPr>
+              <a:buNone/>
               <a:defRPr sz="1200" b="0">
                 <a:solidFill>
                   <a:srgbClr val="777383"/>
@@ -9179,6 +11274,7 @@
           </a:lstStyle>
           <a:p xmlns:a="http://schemas.openxmlformats.org/drawingml/2006/main">
             <a:pPr>
+              <a:buNone/>
               <a:defRPr sz="1200" b="0">
                 <a:solidFill>
                   <a:srgbClr val="777383"/>
@@ -9212,7 +11308,7 @@
 </p:sld>
 </file>
 
-<file path=ppt/slides/slide5.xml><?xml version="1.0" encoding="utf-8"?>
+<file path=ppt/slides/slide6.xml><?xml version="1.0" encoding="utf-8"?>
 <p:sld xmlns:p="http://schemas.openxmlformats.org/presentationml/2006/main">
   <p:cSld>
     <p:bg>
@@ -9273,6 +11369,7 @@
               </a:defRPr>
             </a:defPPr>
             <a:lvl1pPr>
+              <a:buNone/>
               <a:defRPr sz="1125" b="1">
                 <a:solidFill>
                   <a:srgbClr val="6145E6"/>
@@ -9283,6 +11380,7 @@
               </a:defRPr>
             </a:lvl1pPr>
             <a:lvl2pPr>
+              <a:buNone/>
               <a:defRPr sz="1125" b="1">
                 <a:solidFill>
                   <a:srgbClr val="6145E6"/>
@@ -9293,6 +11391,7 @@
               </a:defRPr>
             </a:lvl2pPr>
             <a:lvl3pPr>
+              <a:buNone/>
               <a:defRPr sz="1125" b="1">
                 <a:solidFill>
                   <a:srgbClr val="6145E6"/>
@@ -9303,6 +11402,7 @@
               </a:defRPr>
             </a:lvl3pPr>
             <a:lvl4pPr>
+              <a:buNone/>
               <a:defRPr sz="1125" b="1">
                 <a:solidFill>
                   <a:srgbClr val="6145E6"/>
@@ -9313,6 +11413,7 @@
               </a:defRPr>
             </a:lvl4pPr>
             <a:lvl5pPr>
+              <a:buNone/>
               <a:defRPr sz="1125" b="1">
                 <a:solidFill>
                   <a:srgbClr val="6145E6"/>
@@ -9323,6 +11424,7 @@
               </a:defRPr>
             </a:lvl5pPr>
             <a:lvl6pPr>
+              <a:buNone/>
               <a:defRPr sz="1125" b="1">
                 <a:solidFill>
                   <a:srgbClr val="6145E6"/>
@@ -9333,6 +11435,7 @@
               </a:defRPr>
             </a:lvl6pPr>
             <a:lvl7pPr>
+              <a:buNone/>
               <a:defRPr sz="1125" b="1">
                 <a:solidFill>
                   <a:srgbClr val="6145E6"/>
@@ -9343,6 +11446,7 @@
               </a:defRPr>
             </a:lvl7pPr>
             <a:lvl8pPr>
+              <a:buNone/>
               <a:defRPr sz="1125" b="1">
                 <a:solidFill>
                   <a:srgbClr val="6145E6"/>
@@ -9353,6 +11457,7 @@
               </a:defRPr>
             </a:lvl8pPr>
             <a:lvl9pPr>
+              <a:buNone/>
               <a:defRPr sz="1125" b="1">
                 <a:solidFill>
                   <a:srgbClr val="6145E6"/>
@@ -9365,6 +11470,7 @@
           </a:lstStyle>
           <a:p xmlns:a="http://schemas.openxmlformats.org/drawingml/2006/main">
             <a:pPr>
+              <a:buNone/>
               <a:defRPr sz="1125" b="1">
                 <a:solidFill>
                   <a:srgbClr val="6145E6"/>
@@ -9430,6 +11536,7 @@
               </a:defRPr>
             </a:defPPr>
             <a:lvl1pPr>
+              <a:buNone/>
               <a:defRPr sz="3600" b="1">
                 <a:solidFill>
                   <a:srgbClr val="252638"/>
@@ -9440,6 +11547,7 @@
               </a:defRPr>
             </a:lvl1pPr>
             <a:lvl2pPr>
+              <a:buNone/>
               <a:defRPr sz="3600" b="1">
                 <a:solidFill>
                   <a:srgbClr val="252638"/>
@@ -9450,6 +11558,7 @@
               </a:defRPr>
             </a:lvl2pPr>
             <a:lvl3pPr>
+              <a:buNone/>
               <a:defRPr sz="3600" b="1">
                 <a:solidFill>
                   <a:srgbClr val="252638"/>
@@ -9460,6 +11569,7 @@
               </a:defRPr>
             </a:lvl3pPr>
             <a:lvl4pPr>
+              <a:buNone/>
               <a:defRPr sz="3600" b="1">
                 <a:solidFill>
                   <a:srgbClr val="252638"/>
@@ -9470,6 +11580,7 @@
               </a:defRPr>
             </a:lvl4pPr>
             <a:lvl5pPr>
+              <a:buNone/>
               <a:defRPr sz="3600" b="1">
                 <a:solidFill>
                   <a:srgbClr val="252638"/>
@@ -9480,6 +11591,7 @@
               </a:defRPr>
             </a:lvl5pPr>
             <a:lvl6pPr>
+              <a:buNone/>
               <a:defRPr sz="3600" b="1">
                 <a:solidFill>
                   <a:srgbClr val="252638"/>
@@ -9490,6 +11602,7 @@
               </a:defRPr>
             </a:lvl6pPr>
             <a:lvl7pPr>
+              <a:buNone/>
               <a:defRPr sz="3600" b="1">
                 <a:solidFill>
                   <a:srgbClr val="252638"/>
@@ -9500,6 +11613,7 @@
               </a:defRPr>
             </a:lvl7pPr>
             <a:lvl8pPr>
+              <a:buNone/>
               <a:defRPr sz="3600" b="1">
                 <a:solidFill>
                   <a:srgbClr val="252638"/>
@@ -9510,6 +11624,7 @@
               </a:defRPr>
             </a:lvl8pPr>
             <a:lvl9pPr>
+              <a:buNone/>
               <a:defRPr sz="3600" b="1">
                 <a:solidFill>
                   <a:srgbClr val="252638"/>
@@ -9522,6 +11637,7 @@
           </a:lstStyle>
           <a:p xmlns:a="http://schemas.openxmlformats.org/drawingml/2006/main">
             <a:pPr>
+              <a:buNone/>
               <a:defRPr sz="3600" b="1">
                 <a:solidFill>
                   <a:srgbClr val="252638"/>
@@ -9587,6 +11703,7 @@
               </a:defRPr>
             </a:defPPr>
             <a:lvl1pPr>
+              <a:buNone/>
               <a:defRPr sz="1200" b="0">
                 <a:solidFill>
                   <a:srgbClr val="858393"/>
@@ -9597,6 +11714,7 @@
               </a:defRPr>
             </a:lvl1pPr>
             <a:lvl2pPr>
+              <a:buNone/>
               <a:defRPr sz="1200" b="0">
                 <a:solidFill>
                   <a:srgbClr val="858393"/>
@@ -9607,6 +11725,7 @@
               </a:defRPr>
             </a:lvl2pPr>
             <a:lvl3pPr>
+              <a:buNone/>
               <a:defRPr sz="1200" b="0">
                 <a:solidFill>
                   <a:srgbClr val="858393"/>
@@ -9617,6 +11736,7 @@
               </a:defRPr>
             </a:lvl3pPr>
             <a:lvl4pPr>
+              <a:buNone/>
               <a:defRPr sz="1200" b="0">
                 <a:solidFill>
                   <a:srgbClr val="858393"/>
@@ -9627,6 +11747,7 @@
               </a:defRPr>
             </a:lvl4pPr>
             <a:lvl5pPr>
+              <a:buNone/>
               <a:defRPr sz="1200" b="0">
                 <a:solidFill>
                   <a:srgbClr val="858393"/>
@@ -9637,6 +11758,7 @@
               </a:defRPr>
             </a:lvl5pPr>
             <a:lvl6pPr>
+              <a:buNone/>
               <a:defRPr sz="1200" b="0">
                 <a:solidFill>
                   <a:srgbClr val="858393"/>
@@ -9647,6 +11769,7 @@
               </a:defRPr>
             </a:lvl6pPr>
             <a:lvl7pPr>
+              <a:buNone/>
               <a:defRPr sz="1200" b="0">
                 <a:solidFill>
                   <a:srgbClr val="858393"/>
@@ -9657,6 +11780,7 @@
               </a:defRPr>
             </a:lvl7pPr>
             <a:lvl8pPr>
+              <a:buNone/>
               <a:defRPr sz="1200" b="0">
                 <a:solidFill>
                   <a:srgbClr val="858393"/>
@@ -9667,6 +11791,7 @@
               </a:defRPr>
             </a:lvl8pPr>
             <a:lvl9pPr>
+              <a:buNone/>
               <a:defRPr sz="1200" b="0">
                 <a:solidFill>
                   <a:srgbClr val="858393"/>
@@ -9679,6 +11804,7 @@
           </a:lstStyle>
           <a:p xmlns:a="http://schemas.openxmlformats.org/drawingml/2006/main">
             <a:pPr>
+              <a:buNone/>
               <a:defRPr sz="1200" b="0">
                 <a:solidFill>
                   <a:srgbClr val="858393"/>
@@ -9697,7 +11823,7 @@
                 <a:ea typeface="DejaVu Sans"/>
                 <a:cs typeface="DejaVu Sans"/>
               </a:rPr>
-              <a:t>05</a:t>
+              <a:t>06</a:t>
             </a:r>
           </a:p>
         </p:txBody>
@@ -9744,6 +11870,7 @@
               </a:defRPr>
             </a:defPPr>
             <a:lvl1pPr>
+              <a:buNone/>
               <a:defRPr sz="2100" b="0">
                 <a:solidFill>
                   <a:srgbClr val="252638"/>
@@ -9754,6 +11881,7 @@
               </a:defRPr>
             </a:lvl1pPr>
             <a:lvl2pPr>
+              <a:buNone/>
               <a:defRPr sz="2100" b="0">
                 <a:solidFill>
                   <a:srgbClr val="252638"/>
@@ -9764,6 +11892,7 @@
               </a:defRPr>
             </a:lvl2pPr>
             <a:lvl3pPr>
+              <a:buNone/>
               <a:defRPr sz="2100" b="0">
                 <a:solidFill>
                   <a:srgbClr val="252638"/>
@@ -9774,6 +11903,7 @@
               </a:defRPr>
             </a:lvl3pPr>
             <a:lvl4pPr>
+              <a:buNone/>
               <a:defRPr sz="2100" b="0">
                 <a:solidFill>
                   <a:srgbClr val="252638"/>
@@ -9784,6 +11914,7 @@
               </a:defRPr>
             </a:lvl4pPr>
             <a:lvl5pPr>
+              <a:buNone/>
               <a:defRPr sz="2100" b="0">
                 <a:solidFill>
                   <a:srgbClr val="252638"/>
@@ -9794,6 +11925,7 @@
               </a:defRPr>
             </a:lvl5pPr>
             <a:lvl6pPr>
+              <a:buNone/>
               <a:defRPr sz="2100" b="0">
                 <a:solidFill>
                   <a:srgbClr val="252638"/>
@@ -9804,6 +11936,7 @@
               </a:defRPr>
             </a:lvl6pPr>
             <a:lvl7pPr>
+              <a:buNone/>
               <a:defRPr sz="2100" b="0">
                 <a:solidFill>
                   <a:srgbClr val="252638"/>
@@ -9814,6 +11947,7 @@
               </a:defRPr>
             </a:lvl7pPr>
             <a:lvl8pPr>
+              <a:buNone/>
               <a:defRPr sz="2100" b="0">
                 <a:solidFill>
                   <a:srgbClr val="252638"/>
@@ -9824,6 +11958,7 @@
               </a:defRPr>
             </a:lvl8pPr>
             <a:lvl9pPr>
+              <a:buNone/>
               <a:defRPr sz="2100" b="0">
                 <a:solidFill>
                   <a:srgbClr val="252638"/>
@@ -9836,6 +11971,7 @@
           </a:lstStyle>
           <a:p xmlns:a="http://schemas.openxmlformats.org/drawingml/2006/main">
             <a:pPr>
+              <a:buNone/>
               <a:defRPr sz="2100" b="0">
                 <a:solidFill>
                   <a:srgbClr val="252638"/>
@@ -9901,6 +12037,7 @@
               </a:defRPr>
             </a:defPPr>
             <a:lvl1pPr>
+              <a:buNone/>
               <a:defRPr sz="1950" b="0">
                 <a:solidFill>
                   <a:srgbClr val="777383"/>
@@ -9911,6 +12048,7 @@
               </a:defRPr>
             </a:lvl1pPr>
             <a:lvl2pPr>
+              <a:buNone/>
               <a:defRPr sz="1950" b="0">
                 <a:solidFill>
                   <a:srgbClr val="777383"/>
@@ -9921,6 +12059,7 @@
               </a:defRPr>
             </a:lvl2pPr>
             <a:lvl3pPr>
+              <a:buNone/>
               <a:defRPr sz="1950" b="0">
                 <a:solidFill>
                   <a:srgbClr val="777383"/>
@@ -9931,6 +12070,7 @@
               </a:defRPr>
             </a:lvl3pPr>
             <a:lvl4pPr>
+              <a:buNone/>
               <a:defRPr sz="1950" b="0">
                 <a:solidFill>
                   <a:srgbClr val="777383"/>
@@ -9941,6 +12081,7 @@
               </a:defRPr>
             </a:lvl4pPr>
             <a:lvl5pPr>
+              <a:buNone/>
               <a:defRPr sz="1950" b="0">
                 <a:solidFill>
                   <a:srgbClr val="777383"/>
@@ -9951,6 +12092,7 @@
               </a:defRPr>
             </a:lvl5pPr>
             <a:lvl6pPr>
+              <a:buNone/>
               <a:defRPr sz="1950" b="0">
                 <a:solidFill>
                   <a:srgbClr val="777383"/>
@@ -9961,6 +12103,7 @@
               </a:defRPr>
             </a:lvl6pPr>
             <a:lvl7pPr>
+              <a:buNone/>
               <a:defRPr sz="1950" b="0">
                 <a:solidFill>
                   <a:srgbClr val="777383"/>
@@ -9971,6 +12114,7 @@
               </a:defRPr>
             </a:lvl7pPr>
             <a:lvl8pPr>
+              <a:buNone/>
               <a:defRPr sz="1950" b="0">
                 <a:solidFill>
                   <a:srgbClr val="777383"/>
@@ -9981,6 +12125,7 @@
               </a:defRPr>
             </a:lvl8pPr>
             <a:lvl9pPr>
+              <a:buNone/>
               <a:defRPr sz="1950" b="0">
                 <a:solidFill>
                   <a:srgbClr val="777383"/>
@@ -9993,6 +12138,7 @@
           </a:lstStyle>
           <a:p xmlns:a="http://schemas.openxmlformats.org/drawingml/2006/main">
             <a:pPr>
+              <a:buNone/>
               <a:defRPr sz="1950" b="0">
                 <a:solidFill>
                   <a:srgbClr val="777383"/>
@@ -10058,6 +12204,7 @@
               </a:defRPr>
             </a:defPPr>
             <a:lvl1pPr>
+              <a:buNone/>
               <a:defRPr sz="2100" b="1">
                 <a:solidFill>
                   <a:srgbClr val="6145E6"/>
@@ -10068,6 +12215,7 @@
               </a:defRPr>
             </a:lvl1pPr>
             <a:lvl2pPr>
+              <a:buNone/>
               <a:defRPr sz="2100" b="1">
                 <a:solidFill>
                   <a:srgbClr val="6145E6"/>
@@ -10078,6 +12226,7 @@
               </a:defRPr>
             </a:lvl2pPr>
             <a:lvl3pPr>
+              <a:buNone/>
               <a:defRPr sz="2100" b="1">
                 <a:solidFill>
                   <a:srgbClr val="6145E6"/>
@@ -10088,6 +12237,7 @@
               </a:defRPr>
             </a:lvl3pPr>
             <a:lvl4pPr>
+              <a:buNone/>
               <a:defRPr sz="2100" b="1">
                 <a:solidFill>
                   <a:srgbClr val="6145E6"/>
@@ -10098,6 +12248,7 @@
               </a:defRPr>
             </a:lvl4pPr>
             <a:lvl5pPr>
+              <a:buNone/>
               <a:defRPr sz="2100" b="1">
                 <a:solidFill>
                   <a:srgbClr val="6145E6"/>
@@ -10108,6 +12259,7 @@
               </a:defRPr>
             </a:lvl5pPr>
             <a:lvl6pPr>
+              <a:buNone/>
               <a:defRPr sz="2100" b="1">
                 <a:solidFill>
                   <a:srgbClr val="6145E6"/>
@@ -10118,6 +12270,7 @@
               </a:defRPr>
             </a:lvl6pPr>
             <a:lvl7pPr>
+              <a:buNone/>
               <a:defRPr sz="2100" b="1">
                 <a:solidFill>
                   <a:srgbClr val="6145E6"/>
@@ -10128,6 +12281,7 @@
               </a:defRPr>
             </a:lvl7pPr>
             <a:lvl8pPr>
+              <a:buNone/>
               <a:defRPr sz="2100" b="1">
                 <a:solidFill>
                   <a:srgbClr val="6145E6"/>
@@ -10138,6 +12292,7 @@
               </a:defRPr>
             </a:lvl8pPr>
             <a:lvl9pPr>
+              <a:buNone/>
               <a:defRPr sz="2100" b="1">
                 <a:solidFill>
                   <a:srgbClr val="6145E6"/>
@@ -10150,6 +12305,7 @@
           </a:lstStyle>
           <a:p xmlns:a="http://schemas.openxmlformats.org/drawingml/2006/main">
             <a:pPr>
+              <a:buNone/>
               <a:defRPr sz="2100" b="1">
                 <a:solidFill>
                   <a:srgbClr val="6145E6"/>
@@ -10215,6 +12371,7 @@
               </a:defRPr>
             </a:defPPr>
             <a:lvl1pPr>
+              <a:buNone/>
               <a:defRPr sz="2100" b="0">
                 <a:solidFill>
                   <a:srgbClr val="252638"/>
@@ -10225,6 +12382,7 @@
               </a:defRPr>
             </a:lvl1pPr>
             <a:lvl2pPr>
+              <a:buNone/>
               <a:defRPr sz="2100" b="0">
                 <a:solidFill>
                   <a:srgbClr val="252638"/>
@@ -10235,6 +12393,7 @@
               </a:defRPr>
             </a:lvl2pPr>
             <a:lvl3pPr>
+              <a:buNone/>
               <a:defRPr sz="2100" b="0">
                 <a:solidFill>
                   <a:srgbClr val="252638"/>
@@ -10245,6 +12404,7 @@
               </a:defRPr>
             </a:lvl3pPr>
             <a:lvl4pPr>
+              <a:buNone/>
               <a:defRPr sz="2100" b="0">
                 <a:solidFill>
                   <a:srgbClr val="252638"/>
@@ -10255,6 +12415,7 @@
               </a:defRPr>
             </a:lvl4pPr>
             <a:lvl5pPr>
+              <a:buNone/>
               <a:defRPr sz="2100" b="0">
                 <a:solidFill>
                   <a:srgbClr val="252638"/>
@@ -10265,6 +12426,7 @@
               </a:defRPr>
             </a:lvl5pPr>
             <a:lvl6pPr>
+              <a:buNone/>
               <a:defRPr sz="2100" b="0">
                 <a:solidFill>
                   <a:srgbClr val="252638"/>
@@ -10275,6 +12437,7 @@
               </a:defRPr>
             </a:lvl6pPr>
             <a:lvl7pPr>
+              <a:buNone/>
               <a:defRPr sz="2100" b="0">
                 <a:solidFill>
                   <a:srgbClr val="252638"/>
@@ -10285,6 +12448,7 @@
               </a:defRPr>
             </a:lvl7pPr>
             <a:lvl8pPr>
+              <a:buNone/>
               <a:defRPr sz="2100" b="0">
                 <a:solidFill>
                   <a:srgbClr val="252638"/>
@@ -10295,6 +12459,7 @@
               </a:defRPr>
             </a:lvl8pPr>
             <a:lvl9pPr>
+              <a:buNone/>
               <a:defRPr sz="2100" b="0">
                 <a:solidFill>
                   <a:srgbClr val="252638"/>
@@ -10307,6 +12472,7 @@
           </a:lstStyle>
           <a:p xmlns:a="http://schemas.openxmlformats.org/drawingml/2006/main">
             <a:pPr>
+              <a:buNone/>
               <a:defRPr sz="2100" b="0">
                 <a:solidFill>
                   <a:srgbClr val="252638"/>
@@ -10372,6 +12538,7 @@
               </a:defRPr>
             </a:defPPr>
             <a:lvl1pPr>
+              <a:buNone/>
               <a:defRPr sz="1950" b="0">
                 <a:solidFill>
                   <a:srgbClr val="777383"/>
@@ -10382,6 +12549,7 @@
               </a:defRPr>
             </a:lvl1pPr>
             <a:lvl2pPr>
+              <a:buNone/>
               <a:defRPr sz="1950" b="0">
                 <a:solidFill>
                   <a:srgbClr val="777383"/>
@@ -10392,6 +12560,7 @@
               </a:defRPr>
             </a:lvl2pPr>
             <a:lvl3pPr>
+              <a:buNone/>
               <a:defRPr sz="1950" b="0">
                 <a:solidFill>
                   <a:srgbClr val="777383"/>
@@ -10402,6 +12571,7 @@
               </a:defRPr>
             </a:lvl3pPr>
             <a:lvl4pPr>
+              <a:buNone/>
               <a:defRPr sz="1950" b="0">
                 <a:solidFill>
                   <a:srgbClr val="777383"/>
@@ -10412,6 +12582,7 @@
               </a:defRPr>
             </a:lvl4pPr>
             <a:lvl5pPr>
+              <a:buNone/>
               <a:defRPr sz="1950" b="0">
                 <a:solidFill>
                   <a:srgbClr val="777383"/>
@@ -10422,6 +12593,7 @@
               </a:defRPr>
             </a:lvl5pPr>
             <a:lvl6pPr>
+              <a:buNone/>
               <a:defRPr sz="1950" b="0">
                 <a:solidFill>
                   <a:srgbClr val="777383"/>
@@ -10432,6 +12604,7 @@
               </a:defRPr>
             </a:lvl6pPr>
             <a:lvl7pPr>
+              <a:buNone/>
               <a:defRPr sz="1950" b="0">
                 <a:solidFill>
                   <a:srgbClr val="777383"/>
@@ -10442,6 +12615,7 @@
               </a:defRPr>
             </a:lvl7pPr>
             <a:lvl8pPr>
+              <a:buNone/>
               <a:defRPr sz="1950" b="0">
                 <a:solidFill>
                   <a:srgbClr val="777383"/>
@@ -10452,6 +12626,7 @@
               </a:defRPr>
             </a:lvl8pPr>
             <a:lvl9pPr>
+              <a:buNone/>
               <a:defRPr sz="1950" b="0">
                 <a:solidFill>
                   <a:srgbClr val="777383"/>
@@ -10464,6 +12639,7 @@
           </a:lstStyle>
           <a:p xmlns:a="http://schemas.openxmlformats.org/drawingml/2006/main">
             <a:pPr>
+              <a:buNone/>
               <a:defRPr sz="1950" b="0">
                 <a:solidFill>
                   <a:srgbClr val="777383"/>
@@ -10529,6 +12705,7 @@
               </a:defRPr>
             </a:defPPr>
             <a:lvl1pPr>
+              <a:buNone/>
               <a:defRPr sz="2100" b="1">
                 <a:solidFill>
                   <a:srgbClr val="6145E6"/>
@@ -10539,6 +12716,7 @@
               </a:defRPr>
             </a:lvl1pPr>
             <a:lvl2pPr>
+              <a:buNone/>
               <a:defRPr sz="2100" b="1">
                 <a:solidFill>
                   <a:srgbClr val="6145E6"/>
@@ -10549,6 +12727,7 @@
               </a:defRPr>
             </a:lvl2pPr>
             <a:lvl3pPr>
+              <a:buNone/>
               <a:defRPr sz="2100" b="1">
                 <a:solidFill>
                   <a:srgbClr val="6145E6"/>
@@ -10559,6 +12738,7 @@
               </a:defRPr>
             </a:lvl3pPr>
             <a:lvl4pPr>
+              <a:buNone/>
               <a:defRPr sz="2100" b="1">
                 <a:solidFill>
                   <a:srgbClr val="6145E6"/>
@@ -10569,6 +12749,7 @@
               </a:defRPr>
             </a:lvl4pPr>
             <a:lvl5pPr>
+              <a:buNone/>
               <a:defRPr sz="2100" b="1">
                 <a:solidFill>
                   <a:srgbClr val="6145E6"/>
@@ -10579,6 +12760,7 @@
               </a:defRPr>
             </a:lvl5pPr>
             <a:lvl6pPr>
+              <a:buNone/>
               <a:defRPr sz="2100" b="1">
                 <a:solidFill>
                   <a:srgbClr val="6145E6"/>
@@ -10589,6 +12771,7 @@
               </a:defRPr>
             </a:lvl6pPr>
             <a:lvl7pPr>
+              <a:buNone/>
               <a:defRPr sz="2100" b="1">
                 <a:solidFill>
                   <a:srgbClr val="6145E6"/>
@@ -10599,6 +12782,7 @@
               </a:defRPr>
             </a:lvl7pPr>
             <a:lvl8pPr>
+              <a:buNone/>
               <a:defRPr sz="2100" b="1">
                 <a:solidFill>
                   <a:srgbClr val="6145E6"/>
@@ -10609,6 +12793,7 @@
               </a:defRPr>
             </a:lvl8pPr>
             <a:lvl9pPr>
+              <a:buNone/>
               <a:defRPr sz="2100" b="1">
                 <a:solidFill>
                   <a:srgbClr val="6145E6"/>
@@ -10621,6 +12806,7 @@
           </a:lstStyle>
           <a:p xmlns:a="http://schemas.openxmlformats.org/drawingml/2006/main">
             <a:pPr>
+              <a:buNone/>
               <a:defRPr sz="2100" b="1">
                 <a:solidFill>
                   <a:srgbClr val="6145E6"/>
@@ -10686,6 +12872,7 @@
               </a:defRPr>
             </a:defPPr>
             <a:lvl1pPr>
+              <a:buNone/>
               <a:defRPr sz="2100" b="0">
                 <a:solidFill>
                   <a:srgbClr val="252638"/>
@@ -10696,6 +12883,7 @@
               </a:defRPr>
             </a:lvl1pPr>
             <a:lvl2pPr>
+              <a:buNone/>
               <a:defRPr sz="2100" b="0">
                 <a:solidFill>
                   <a:srgbClr val="252638"/>
@@ -10706,6 +12894,7 @@
               </a:defRPr>
             </a:lvl2pPr>
             <a:lvl3pPr>
+              <a:buNone/>
               <a:defRPr sz="2100" b="0">
                 <a:solidFill>
                   <a:srgbClr val="252638"/>
@@ -10716,6 +12905,7 @@
               </a:defRPr>
             </a:lvl3pPr>
             <a:lvl4pPr>
+              <a:buNone/>
               <a:defRPr sz="2100" b="0">
                 <a:solidFill>
                   <a:srgbClr val="252638"/>
@@ -10726,6 +12916,7 @@
               </a:defRPr>
             </a:lvl4pPr>
             <a:lvl5pPr>
+              <a:buNone/>
               <a:defRPr sz="2100" b="0">
                 <a:solidFill>
                   <a:srgbClr val="252638"/>
@@ -10736,6 +12927,7 @@
               </a:defRPr>
             </a:lvl5pPr>
             <a:lvl6pPr>
+              <a:buNone/>
               <a:defRPr sz="2100" b="0">
                 <a:solidFill>
                   <a:srgbClr val="252638"/>
@@ -10746,6 +12938,7 @@
               </a:defRPr>
             </a:lvl6pPr>
             <a:lvl7pPr>
+              <a:buNone/>
               <a:defRPr sz="2100" b="0">
                 <a:solidFill>
                   <a:srgbClr val="252638"/>
@@ -10756,6 +12949,7 @@
               </a:defRPr>
             </a:lvl7pPr>
             <a:lvl8pPr>
+              <a:buNone/>
               <a:defRPr sz="2100" b="0">
                 <a:solidFill>
                   <a:srgbClr val="252638"/>
@@ -10766,6 +12960,7 @@
               </a:defRPr>
             </a:lvl8pPr>
             <a:lvl9pPr>
+              <a:buNone/>
               <a:defRPr sz="2100" b="0">
                 <a:solidFill>
                   <a:srgbClr val="252638"/>
@@ -10778,6 +12973,7 @@
           </a:lstStyle>
           <a:p xmlns:a="http://schemas.openxmlformats.org/drawingml/2006/main">
             <a:pPr>
+              <a:buNone/>
               <a:defRPr sz="2100" b="0">
                 <a:solidFill>
                   <a:srgbClr val="252638"/>
@@ -10843,6 +13039,7 @@
               </a:defRPr>
             </a:defPPr>
             <a:lvl1pPr>
+              <a:buNone/>
               <a:defRPr sz="1950" b="0">
                 <a:solidFill>
                   <a:srgbClr val="777383"/>
@@ -10853,6 +13050,7 @@
               </a:defRPr>
             </a:lvl1pPr>
             <a:lvl2pPr>
+              <a:buNone/>
               <a:defRPr sz="1950" b="0">
                 <a:solidFill>
                   <a:srgbClr val="777383"/>
@@ -10863,6 +13061,7 @@
               </a:defRPr>
             </a:lvl2pPr>
             <a:lvl3pPr>
+              <a:buNone/>
               <a:defRPr sz="1950" b="0">
                 <a:solidFill>
                   <a:srgbClr val="777383"/>
@@ -10873,6 +13072,7 @@
               </a:defRPr>
             </a:lvl3pPr>
             <a:lvl4pPr>
+              <a:buNone/>
               <a:defRPr sz="1950" b="0">
                 <a:solidFill>
                   <a:srgbClr val="777383"/>
@@ -10883,6 +13083,7 @@
               </a:defRPr>
             </a:lvl4pPr>
             <a:lvl5pPr>
+              <a:buNone/>
               <a:defRPr sz="1950" b="0">
                 <a:solidFill>
                   <a:srgbClr val="777383"/>
@@ -10893,6 +13094,7 @@
               </a:defRPr>
             </a:lvl5pPr>
             <a:lvl6pPr>
+              <a:buNone/>
               <a:defRPr sz="1950" b="0">
                 <a:solidFill>
                   <a:srgbClr val="777383"/>
@@ -10903,6 +13105,7 @@
               </a:defRPr>
             </a:lvl6pPr>
             <a:lvl7pPr>
+              <a:buNone/>
               <a:defRPr sz="1950" b="0">
                 <a:solidFill>
                   <a:srgbClr val="777383"/>
@@ -10913,6 +13116,7 @@
               </a:defRPr>
             </a:lvl7pPr>
             <a:lvl8pPr>
+              <a:buNone/>
               <a:defRPr sz="1950" b="0">
                 <a:solidFill>
                   <a:srgbClr val="777383"/>
@@ -10923,6 +13127,7 @@
               </a:defRPr>
             </a:lvl8pPr>
             <a:lvl9pPr>
+              <a:buNone/>
               <a:defRPr sz="1950" b="0">
                 <a:solidFill>
                   <a:srgbClr val="777383"/>
@@ -10935,6 +13140,7 @@
           </a:lstStyle>
           <a:p xmlns:a="http://schemas.openxmlformats.org/drawingml/2006/main">
             <a:pPr>
+              <a:buNone/>
               <a:defRPr sz="1950" b="0">
                 <a:solidFill>
                   <a:srgbClr val="777383"/>
@@ -11000,6 +13206,7 @@
               </a:defRPr>
             </a:defPPr>
             <a:lvl1pPr>
+              <a:buNone/>
               <a:defRPr sz="2100" b="1">
                 <a:solidFill>
                   <a:srgbClr val="6145E6"/>
@@ -11010,6 +13217,7 @@
               </a:defRPr>
             </a:lvl1pPr>
             <a:lvl2pPr>
+              <a:buNone/>
               <a:defRPr sz="2100" b="1">
                 <a:solidFill>
                   <a:srgbClr val="6145E6"/>
@@ -11020,6 +13228,7 @@
               </a:defRPr>
             </a:lvl2pPr>
             <a:lvl3pPr>
+              <a:buNone/>
               <a:defRPr sz="2100" b="1">
                 <a:solidFill>
                   <a:srgbClr val="6145E6"/>
@@ -11030,6 +13239,7 @@
               </a:defRPr>
             </a:lvl3pPr>
             <a:lvl4pPr>
+              <a:buNone/>
               <a:defRPr sz="2100" b="1">
                 <a:solidFill>
                   <a:srgbClr val="6145E6"/>
@@ -11040,6 +13250,7 @@
               </a:defRPr>
             </a:lvl4pPr>
             <a:lvl5pPr>
+              <a:buNone/>
               <a:defRPr sz="2100" b="1">
                 <a:solidFill>
                   <a:srgbClr val="6145E6"/>
@@ -11050,6 +13261,7 @@
               </a:defRPr>
             </a:lvl5pPr>
             <a:lvl6pPr>
+              <a:buNone/>
               <a:defRPr sz="2100" b="1">
                 <a:solidFill>
                   <a:srgbClr val="6145E6"/>
@@ -11060,6 +13272,7 @@
               </a:defRPr>
             </a:lvl6pPr>
             <a:lvl7pPr>
+              <a:buNone/>
               <a:defRPr sz="2100" b="1">
                 <a:solidFill>
                   <a:srgbClr val="6145E6"/>
@@ -11070,6 +13283,7 @@
               </a:defRPr>
             </a:lvl7pPr>
             <a:lvl8pPr>
+              <a:buNone/>
               <a:defRPr sz="2100" b="1">
                 <a:solidFill>
                   <a:srgbClr val="6145E6"/>
@@ -11080,6 +13294,7 @@
               </a:defRPr>
             </a:lvl8pPr>
             <a:lvl9pPr>
+              <a:buNone/>
               <a:defRPr sz="2100" b="1">
                 <a:solidFill>
                   <a:srgbClr val="6145E6"/>
@@ -11092,6 +13307,7 @@
           </a:lstStyle>
           <a:p xmlns:a="http://schemas.openxmlformats.org/drawingml/2006/main">
             <a:pPr>
+              <a:buNone/>
               <a:defRPr sz="2100" b="1">
                 <a:solidFill>
                   <a:srgbClr val="6145E6"/>
@@ -11157,6 +13373,7 @@
               </a:defRPr>
             </a:defPPr>
             <a:lvl1pPr>
+              <a:buNone/>
               <a:defRPr sz="2100" b="0">
                 <a:solidFill>
                   <a:srgbClr val="252638"/>
@@ -11167,6 +13384,7 @@
               </a:defRPr>
             </a:lvl1pPr>
             <a:lvl2pPr>
+              <a:buNone/>
               <a:defRPr sz="2100" b="0">
                 <a:solidFill>
                   <a:srgbClr val="252638"/>
@@ -11177,6 +13395,7 @@
               </a:defRPr>
             </a:lvl2pPr>
             <a:lvl3pPr>
+              <a:buNone/>
               <a:defRPr sz="2100" b="0">
                 <a:solidFill>
                   <a:srgbClr val="252638"/>
@@ -11187,6 +13406,7 @@
               </a:defRPr>
             </a:lvl3pPr>
             <a:lvl4pPr>
+              <a:buNone/>
               <a:defRPr sz="2100" b="0">
                 <a:solidFill>
                   <a:srgbClr val="252638"/>
@@ -11197,6 +13417,7 @@
               </a:defRPr>
             </a:lvl4pPr>
             <a:lvl5pPr>
+              <a:buNone/>
               <a:defRPr sz="2100" b="0">
                 <a:solidFill>
                   <a:srgbClr val="252638"/>
@@ -11207,6 +13428,7 @@
               </a:defRPr>
             </a:lvl5pPr>
             <a:lvl6pPr>
+              <a:buNone/>
               <a:defRPr sz="2100" b="0">
                 <a:solidFill>
                   <a:srgbClr val="252638"/>
@@ -11217,6 +13439,7 @@
               </a:defRPr>
             </a:lvl6pPr>
             <a:lvl7pPr>
+              <a:buNone/>
               <a:defRPr sz="2100" b="0">
                 <a:solidFill>
                   <a:srgbClr val="252638"/>
@@ -11227,6 +13450,7 @@
               </a:defRPr>
             </a:lvl7pPr>
             <a:lvl8pPr>
+              <a:buNone/>
               <a:defRPr sz="2100" b="0">
                 <a:solidFill>
                   <a:srgbClr val="252638"/>
@@ -11237,6 +13461,7 @@
               </a:defRPr>
             </a:lvl8pPr>
             <a:lvl9pPr>
+              <a:buNone/>
               <a:defRPr sz="2100" b="0">
                 <a:solidFill>
                   <a:srgbClr val="252638"/>
@@ -11249,6 +13474,7 @@
           </a:lstStyle>
           <a:p xmlns:a="http://schemas.openxmlformats.org/drawingml/2006/main">
             <a:pPr>
+              <a:buNone/>
               <a:defRPr sz="2100" b="0">
                 <a:solidFill>
                   <a:srgbClr val="252638"/>
@@ -11314,6 +13540,7 @@
               </a:defRPr>
             </a:defPPr>
             <a:lvl1pPr>
+              <a:buNone/>
               <a:defRPr sz="1950" b="0">
                 <a:solidFill>
                   <a:srgbClr val="777383"/>
@@ -11324,6 +13551,7 @@
               </a:defRPr>
             </a:lvl1pPr>
             <a:lvl2pPr>
+              <a:buNone/>
               <a:defRPr sz="1950" b="0">
                 <a:solidFill>
                   <a:srgbClr val="777383"/>
@@ -11334,6 +13562,7 @@
               </a:defRPr>
             </a:lvl2pPr>
             <a:lvl3pPr>
+              <a:buNone/>
               <a:defRPr sz="1950" b="0">
                 <a:solidFill>
                   <a:srgbClr val="777383"/>
@@ -11344,6 +13573,7 @@
               </a:defRPr>
             </a:lvl3pPr>
             <a:lvl4pPr>
+              <a:buNone/>
               <a:defRPr sz="1950" b="0">
                 <a:solidFill>
                   <a:srgbClr val="777383"/>
@@ -11354,6 +13584,7 @@
               </a:defRPr>
             </a:lvl4pPr>
             <a:lvl5pPr>
+              <a:buNone/>
               <a:defRPr sz="1950" b="0">
                 <a:solidFill>
                   <a:srgbClr val="777383"/>
@@ -11364,6 +13595,7 @@
               </a:defRPr>
             </a:lvl5pPr>
             <a:lvl6pPr>
+              <a:buNone/>
               <a:defRPr sz="1950" b="0">
                 <a:solidFill>
                   <a:srgbClr val="777383"/>
@@ -11374,6 +13606,7 @@
               </a:defRPr>
             </a:lvl6pPr>
             <a:lvl7pPr>
+              <a:buNone/>
               <a:defRPr sz="1950" b="0">
                 <a:solidFill>
                   <a:srgbClr val="777383"/>
@@ -11384,6 +13617,7 @@
               </a:defRPr>
             </a:lvl7pPr>
             <a:lvl8pPr>
+              <a:buNone/>
               <a:defRPr sz="1950" b="0">
                 <a:solidFill>
                   <a:srgbClr val="777383"/>
@@ -11394,6 +13628,7 @@
               </a:defRPr>
             </a:lvl8pPr>
             <a:lvl9pPr>
+              <a:buNone/>
               <a:defRPr sz="1950" b="0">
                 <a:solidFill>
                   <a:srgbClr val="777383"/>
@@ -11406,6 +13641,7 @@
           </a:lstStyle>
           <a:p xmlns:a="http://schemas.openxmlformats.org/drawingml/2006/main">
             <a:pPr>
+              <a:buNone/>
               <a:defRPr sz="1950" b="0">
                 <a:solidFill>
                   <a:srgbClr val="777383"/>
@@ -11471,6 +13707,7 @@
               </a:defRPr>
             </a:defPPr>
             <a:lvl1pPr>
+              <a:buNone/>
               <a:defRPr sz="2100" b="1">
                 <a:solidFill>
                   <a:srgbClr val="6145E6"/>
@@ -11481,6 +13718,7 @@
               </a:defRPr>
             </a:lvl1pPr>
             <a:lvl2pPr>
+              <a:buNone/>
               <a:defRPr sz="2100" b="1">
                 <a:solidFill>
                   <a:srgbClr val="6145E6"/>
@@ -11491,6 +13729,7 @@
               </a:defRPr>
             </a:lvl2pPr>
             <a:lvl3pPr>
+              <a:buNone/>
               <a:defRPr sz="2100" b="1">
                 <a:solidFill>
                   <a:srgbClr val="6145E6"/>
@@ -11501,6 +13740,7 @@
               </a:defRPr>
             </a:lvl3pPr>
             <a:lvl4pPr>
+              <a:buNone/>
               <a:defRPr sz="2100" b="1">
                 <a:solidFill>
                   <a:srgbClr val="6145E6"/>
@@ -11511,6 +13751,7 @@
               </a:defRPr>
             </a:lvl4pPr>
             <a:lvl5pPr>
+              <a:buNone/>
               <a:defRPr sz="2100" b="1">
                 <a:solidFill>
                   <a:srgbClr val="6145E6"/>
@@ -11521,6 +13762,7 @@
               </a:defRPr>
             </a:lvl5pPr>
             <a:lvl6pPr>
+              <a:buNone/>
               <a:defRPr sz="2100" b="1">
                 <a:solidFill>
                   <a:srgbClr val="6145E6"/>
@@ -11531,6 +13773,7 @@
               </a:defRPr>
             </a:lvl6pPr>
             <a:lvl7pPr>
+              <a:buNone/>
               <a:defRPr sz="2100" b="1">
                 <a:solidFill>
                   <a:srgbClr val="6145E6"/>
@@ -11541,6 +13784,7 @@
               </a:defRPr>
             </a:lvl7pPr>
             <a:lvl8pPr>
+              <a:buNone/>
               <a:defRPr sz="2100" b="1">
                 <a:solidFill>
                   <a:srgbClr val="6145E6"/>
@@ -11551,6 +13795,7 @@
               </a:defRPr>
             </a:lvl8pPr>
             <a:lvl9pPr>
+              <a:buNone/>
               <a:defRPr sz="2100" b="1">
                 <a:solidFill>
                   <a:srgbClr val="6145E6"/>
@@ -11563,6 +13808,7 @@
           </a:lstStyle>
           <a:p xmlns:a="http://schemas.openxmlformats.org/drawingml/2006/main">
             <a:pPr>
+              <a:buNone/>
               <a:defRPr sz="2100" b="1">
                 <a:solidFill>
                   <a:srgbClr val="6145E6"/>
@@ -11628,6 +13874,7 @@
               </a:defRPr>
             </a:defPPr>
             <a:lvl1pPr>
+              <a:buNone/>
               <a:defRPr sz="2100" b="0">
                 <a:solidFill>
                   <a:srgbClr val="252638"/>
@@ -11638,6 +13885,7 @@
               </a:defRPr>
             </a:lvl1pPr>
             <a:lvl2pPr>
+              <a:buNone/>
               <a:defRPr sz="2100" b="0">
                 <a:solidFill>
                   <a:srgbClr val="252638"/>
@@ -11648,6 +13896,7 @@
               </a:defRPr>
             </a:lvl2pPr>
             <a:lvl3pPr>
+              <a:buNone/>
               <a:defRPr sz="2100" b="0">
                 <a:solidFill>
                   <a:srgbClr val="252638"/>
@@ -11658,6 +13907,7 @@
               </a:defRPr>
             </a:lvl3pPr>
             <a:lvl4pPr>
+              <a:buNone/>
               <a:defRPr sz="2100" b="0">
                 <a:solidFill>
                   <a:srgbClr val="252638"/>
@@ -11668,6 +13918,7 @@
               </a:defRPr>
             </a:lvl4pPr>
             <a:lvl5pPr>
+              <a:buNone/>
               <a:defRPr sz="2100" b="0">
                 <a:solidFill>
                   <a:srgbClr val="252638"/>
@@ -11678,6 +13929,7 @@
               </a:defRPr>
             </a:lvl5pPr>
             <a:lvl6pPr>
+              <a:buNone/>
               <a:defRPr sz="2100" b="0">
                 <a:solidFill>
                   <a:srgbClr val="252638"/>
@@ -11688,6 +13940,7 @@
               </a:defRPr>
             </a:lvl6pPr>
             <a:lvl7pPr>
+              <a:buNone/>
               <a:defRPr sz="2100" b="0">
                 <a:solidFill>
                   <a:srgbClr val="252638"/>
@@ -11698,6 +13951,7 @@
               </a:defRPr>
             </a:lvl7pPr>
             <a:lvl8pPr>
+              <a:buNone/>
               <a:defRPr sz="2100" b="0">
                 <a:solidFill>
                   <a:srgbClr val="252638"/>
@@ -11708,6 +13962,7 @@
               </a:defRPr>
             </a:lvl8pPr>
             <a:lvl9pPr>
+              <a:buNone/>
               <a:defRPr sz="2100" b="0">
                 <a:solidFill>
                   <a:srgbClr val="252638"/>
@@ -11720,6 +13975,7 @@
           </a:lstStyle>
           <a:p xmlns:a="http://schemas.openxmlformats.org/drawingml/2006/main">
             <a:pPr>
+              <a:buNone/>
               <a:defRPr sz="2100" b="0">
                 <a:solidFill>
                   <a:srgbClr val="252638"/>
@@ -11785,6 +14041,7 @@
               </a:defRPr>
             </a:defPPr>
             <a:lvl1pPr>
+              <a:buNone/>
               <a:defRPr sz="1950" b="0">
                 <a:solidFill>
                   <a:srgbClr val="777383"/>
@@ -11795,6 +14052,7 @@
               </a:defRPr>
             </a:lvl1pPr>
             <a:lvl2pPr>
+              <a:buNone/>
               <a:defRPr sz="1950" b="0">
                 <a:solidFill>
                   <a:srgbClr val="777383"/>
@@ -11805,6 +14063,7 @@
               </a:defRPr>
             </a:lvl2pPr>
             <a:lvl3pPr>
+              <a:buNone/>
               <a:defRPr sz="1950" b="0">
                 <a:solidFill>
                   <a:srgbClr val="777383"/>
@@ -11815,6 +14074,7 @@
               </a:defRPr>
             </a:lvl3pPr>
             <a:lvl4pPr>
+              <a:buNone/>
               <a:defRPr sz="1950" b="0">
                 <a:solidFill>
                   <a:srgbClr val="777383"/>
@@ -11825,6 +14085,7 @@
               </a:defRPr>
             </a:lvl4pPr>
             <a:lvl5pPr>
+              <a:buNone/>
               <a:defRPr sz="1950" b="0">
                 <a:solidFill>
                   <a:srgbClr val="777383"/>
@@ -11835,6 +14096,7 @@
               </a:defRPr>
             </a:lvl5pPr>
             <a:lvl6pPr>
+              <a:buNone/>
               <a:defRPr sz="1950" b="0">
                 <a:solidFill>
                   <a:srgbClr val="777383"/>
@@ -11845,6 +14107,7 @@
               </a:defRPr>
             </a:lvl6pPr>
             <a:lvl7pPr>
+              <a:buNone/>
               <a:defRPr sz="1950" b="0">
                 <a:solidFill>
                   <a:srgbClr val="777383"/>
@@ -11855,6 +14118,7 @@
               </a:defRPr>
             </a:lvl7pPr>
             <a:lvl8pPr>
+              <a:buNone/>
               <a:defRPr sz="1950" b="0">
                 <a:solidFill>
                   <a:srgbClr val="777383"/>
@@ -11865,6 +14129,7 @@
               </a:defRPr>
             </a:lvl8pPr>
             <a:lvl9pPr>
+              <a:buNone/>
               <a:defRPr sz="1950" b="0">
                 <a:solidFill>
                   <a:srgbClr val="777383"/>
@@ -11877,6 +14142,7 @@
           </a:lstStyle>
           <a:p xmlns:a="http://schemas.openxmlformats.org/drawingml/2006/main">
             <a:pPr>
+              <a:buNone/>
               <a:defRPr sz="1950" b="0">
                 <a:solidFill>
                   <a:srgbClr val="777383"/>
@@ -11942,6 +14208,7 @@
               </a:defRPr>
             </a:defPPr>
             <a:lvl1pPr>
+              <a:buNone/>
               <a:defRPr sz="2100" b="1">
                 <a:solidFill>
                   <a:srgbClr val="6145E6"/>
@@ -11952,6 +14219,7 @@
               </a:defRPr>
             </a:lvl1pPr>
             <a:lvl2pPr>
+              <a:buNone/>
               <a:defRPr sz="2100" b="1">
                 <a:solidFill>
                   <a:srgbClr val="6145E6"/>
@@ -11962,6 +14230,7 @@
               </a:defRPr>
             </a:lvl2pPr>
             <a:lvl3pPr>
+              <a:buNone/>
               <a:defRPr sz="2100" b="1">
                 <a:solidFill>
                   <a:srgbClr val="6145E6"/>
@@ -11972,6 +14241,7 @@
               </a:defRPr>
             </a:lvl3pPr>
             <a:lvl4pPr>
+              <a:buNone/>
               <a:defRPr sz="2100" b="1">
                 <a:solidFill>
                   <a:srgbClr val="6145E6"/>
@@ -11982,6 +14252,7 @@
               </a:defRPr>
             </a:lvl4pPr>
             <a:lvl5pPr>
+              <a:buNone/>
               <a:defRPr sz="2100" b="1">
                 <a:solidFill>
                   <a:srgbClr val="6145E6"/>
@@ -11992,6 +14263,7 @@
               </a:defRPr>
             </a:lvl5pPr>
             <a:lvl6pPr>
+              <a:buNone/>
               <a:defRPr sz="2100" b="1">
                 <a:solidFill>
                   <a:srgbClr val="6145E6"/>
@@ -12002,6 +14274,7 @@
               </a:defRPr>
             </a:lvl6pPr>
             <a:lvl7pPr>
+              <a:buNone/>
               <a:defRPr sz="2100" b="1">
                 <a:solidFill>
                   <a:srgbClr val="6145E6"/>
@@ -12012,6 +14285,7 @@
               </a:defRPr>
             </a:lvl7pPr>
             <a:lvl8pPr>
+              <a:buNone/>
               <a:defRPr sz="2100" b="1">
                 <a:solidFill>
                   <a:srgbClr val="6145E6"/>
@@ -12022,6 +14296,7 @@
               </a:defRPr>
             </a:lvl8pPr>
             <a:lvl9pPr>
+              <a:buNone/>
               <a:defRPr sz="2100" b="1">
                 <a:solidFill>
                   <a:srgbClr val="6145E6"/>
@@ -12034,6 +14309,7 @@
           </a:lstStyle>
           <a:p xmlns:a="http://schemas.openxmlformats.org/drawingml/2006/main">
             <a:pPr>
+              <a:buNone/>
               <a:defRPr sz="2100" b="1">
                 <a:solidFill>
                   <a:srgbClr val="6145E6"/>
@@ -12073,8 +14349,8 @@
         </p:nvSpPr>
         <p:spPr>
           <a:xfrm xmlns:a="http://schemas.openxmlformats.org/drawingml/2006/main">
-            <a:off x="609600" y="5905500"/>
-            <a:ext cx="10477500" cy="333375"/>
+            <a:off x="609600" y="5810250"/>
+            <a:ext cx="10477500" cy="476250"/>
           </a:xfrm>
           <a:prstGeom xmlns:a="http://schemas.openxmlformats.org/drawingml/2006/main" prst="rect">
             <a:avLst/>
@@ -12089,7 +14365,7 @@
           <a:bodyPr xmlns:a="http://schemas.openxmlformats.org/drawingml/2006/main" anchor="t"/>
           <a:lstStyle xmlns:a="http://schemas.openxmlformats.org/drawingml/2006/main">
             <a:defPPr>
-              <a:defRPr sz="1425" b="0">
+              <a:defRPr sz="1500" b="0">
                 <a:solidFill>
                   <a:srgbClr val="777383"/>
                 </a:solidFill>
@@ -12099,6 +14375,7 @@
               </a:defRPr>
             </a:defPPr>
             <a:lvl1pPr>
+              <a:buNone/>
               <a:defRPr sz="1425" b="0">
                 <a:solidFill>
                   <a:srgbClr val="777383"/>
@@ -12109,6 +14386,7 @@
               </a:defRPr>
             </a:lvl1pPr>
             <a:lvl2pPr>
+              <a:buNone/>
               <a:defRPr sz="1425" b="0">
                 <a:solidFill>
                   <a:srgbClr val="777383"/>
@@ -12119,6 +14397,7 @@
               </a:defRPr>
             </a:lvl2pPr>
             <a:lvl3pPr>
+              <a:buNone/>
               <a:defRPr sz="1425" b="0">
                 <a:solidFill>
                   <a:srgbClr val="777383"/>
@@ -12129,6 +14408,7 @@
               </a:defRPr>
             </a:lvl3pPr>
             <a:lvl4pPr>
+              <a:buNone/>
               <a:defRPr sz="1425" b="0">
                 <a:solidFill>
                   <a:srgbClr val="777383"/>
@@ -12139,6 +14419,7 @@
               </a:defRPr>
             </a:lvl4pPr>
             <a:lvl5pPr>
+              <a:buNone/>
               <a:defRPr sz="1425" b="0">
                 <a:solidFill>
                   <a:srgbClr val="777383"/>
@@ -12149,6 +14430,7 @@
               </a:defRPr>
             </a:lvl5pPr>
             <a:lvl6pPr>
+              <a:buNone/>
               <a:defRPr sz="1425" b="0">
                 <a:solidFill>
                   <a:srgbClr val="777383"/>
@@ -12159,6 +14441,7 @@
               </a:defRPr>
             </a:lvl6pPr>
             <a:lvl7pPr>
+              <a:buNone/>
               <a:defRPr sz="1425" b="0">
                 <a:solidFill>
                   <a:srgbClr val="777383"/>
@@ -12169,6 +14452,7 @@
               </a:defRPr>
             </a:lvl7pPr>
             <a:lvl8pPr>
+              <a:buNone/>
               <a:defRPr sz="1425" b="0">
                 <a:solidFill>
                   <a:srgbClr val="777383"/>
@@ -12179,6 +14463,7 @@
               </a:defRPr>
             </a:lvl8pPr>
             <a:lvl9pPr>
+              <a:buNone/>
               <a:defRPr sz="1425" b="0">
                 <a:solidFill>
                   <a:srgbClr val="777383"/>
@@ -12191,6 +14476,7 @@
           </a:lstStyle>
           <a:p xmlns:a="http://schemas.openxmlformats.org/drawingml/2006/main">
             <a:pPr>
+              <a:buNone/>
               <a:defRPr sz="1425" b="0">
                 <a:solidFill>
                   <a:srgbClr val="777383"/>
@@ -12201,7 +14487,7 @@
               </a:defRPr>
             </a:pPr>
             <a:r>
-              <a:rPr sz="1425" b="0">
+              <a:rPr sz="1500" b="0">
                 <a:solidFill>
                   <a:srgbClr val="777383"/>
                 </a:solidFill>
@@ -12209,7 +14495,7 @@
                 <a:ea typeface="DejaVu Sans"/>
                 <a:cs typeface="DejaVu Sans"/>
               </a:rPr>
-              <a:t>24–30 октября · первая оценка, скорость команды пока неизвестна</a:t>
+              <a:t>24–30 октября: 11 SP на команду. Это новый план, его итог оценим после проверок.</a:t>
             </a:r>
           </a:p>
         </p:txBody>
@@ -12224,7 +14510,7 @@
 </p:sld>
 </file>
 
-<file path=ppt/slides/slide6.xml><?xml version="1.0" encoding="utf-8"?>
+<file path=ppt/slides/slide7.xml><?xml version="1.0" encoding="utf-8"?>
 <p:sld xmlns:p="http://schemas.openxmlformats.org/presentationml/2006/main">
   <p:cSld>
     <p:bg>
@@ -12285,6 +14571,7 @@
               </a:defRPr>
             </a:defPPr>
             <a:lvl1pPr>
+              <a:buNone/>
               <a:defRPr sz="1125" b="1">
                 <a:solidFill>
                   <a:srgbClr val="6145E6"/>
@@ -12295,6 +14582,7 @@
               </a:defRPr>
             </a:lvl1pPr>
             <a:lvl2pPr>
+              <a:buNone/>
               <a:defRPr sz="1125" b="1">
                 <a:solidFill>
                   <a:srgbClr val="6145E6"/>
@@ -12305,6 +14593,7 @@
               </a:defRPr>
             </a:lvl2pPr>
             <a:lvl3pPr>
+              <a:buNone/>
               <a:defRPr sz="1125" b="1">
                 <a:solidFill>
                   <a:srgbClr val="6145E6"/>
@@ -12315,6 +14604,7 @@
               </a:defRPr>
             </a:lvl3pPr>
             <a:lvl4pPr>
+              <a:buNone/>
               <a:defRPr sz="1125" b="1">
                 <a:solidFill>
                   <a:srgbClr val="6145E6"/>
@@ -12325,6 +14615,7 @@
               </a:defRPr>
             </a:lvl4pPr>
             <a:lvl5pPr>
+              <a:buNone/>
               <a:defRPr sz="1125" b="1">
                 <a:solidFill>
                   <a:srgbClr val="6145E6"/>
@@ -12335,6 +14626,7 @@
               </a:defRPr>
             </a:lvl5pPr>
             <a:lvl6pPr>
+              <a:buNone/>
               <a:defRPr sz="1125" b="1">
                 <a:solidFill>
                   <a:srgbClr val="6145E6"/>
@@ -12345,6 +14637,7 @@
               </a:defRPr>
             </a:lvl6pPr>
             <a:lvl7pPr>
+              <a:buNone/>
               <a:defRPr sz="1125" b="1">
                 <a:solidFill>
                   <a:srgbClr val="6145E6"/>
@@ -12355,6 +14648,7 @@
               </a:defRPr>
             </a:lvl7pPr>
             <a:lvl8pPr>
+              <a:buNone/>
               <a:defRPr sz="1125" b="1">
                 <a:solidFill>
                   <a:srgbClr val="6145E6"/>
@@ -12365,6 +14659,7 @@
               </a:defRPr>
             </a:lvl8pPr>
             <a:lvl9pPr>
+              <a:buNone/>
               <a:defRPr sz="1125" b="1">
                 <a:solidFill>
                   <a:srgbClr val="6145E6"/>
@@ -12377,6 +14672,7 @@
           </a:lstStyle>
           <a:p xmlns:a="http://schemas.openxmlformats.org/drawingml/2006/main">
             <a:pPr>
+              <a:buNone/>
               <a:defRPr sz="1125" b="1">
                 <a:solidFill>
                   <a:srgbClr val="6145E6"/>
@@ -12432,7 +14728,7 @@
           <a:bodyPr xmlns:a="http://schemas.openxmlformats.org/drawingml/2006/main" anchor="t"/>
           <a:lstStyle xmlns:a="http://schemas.openxmlformats.org/drawingml/2006/main">
             <a:defPPr>
-              <a:defRPr sz="3600" b="1">
+              <a:defRPr sz="3300" b="1">
                 <a:solidFill>
                   <a:srgbClr val="252638"/>
                 </a:solidFill>
@@ -12442,6 +14738,7 @@
               </a:defRPr>
             </a:defPPr>
             <a:lvl1pPr>
+              <a:buNone/>
               <a:defRPr sz="3600" b="1">
                 <a:solidFill>
                   <a:srgbClr val="252638"/>
@@ -12452,6 +14749,7 @@
               </a:defRPr>
             </a:lvl1pPr>
             <a:lvl2pPr>
+              <a:buNone/>
               <a:defRPr sz="3600" b="1">
                 <a:solidFill>
                   <a:srgbClr val="252638"/>
@@ -12462,6 +14760,7 @@
               </a:defRPr>
             </a:lvl2pPr>
             <a:lvl3pPr>
+              <a:buNone/>
               <a:defRPr sz="3600" b="1">
                 <a:solidFill>
                   <a:srgbClr val="252638"/>
@@ -12472,6 +14771,7 @@
               </a:defRPr>
             </a:lvl3pPr>
             <a:lvl4pPr>
+              <a:buNone/>
               <a:defRPr sz="3600" b="1">
                 <a:solidFill>
                   <a:srgbClr val="252638"/>
@@ -12482,6 +14782,7 @@
               </a:defRPr>
             </a:lvl4pPr>
             <a:lvl5pPr>
+              <a:buNone/>
               <a:defRPr sz="3600" b="1">
                 <a:solidFill>
                   <a:srgbClr val="252638"/>
@@ -12492,6 +14793,7 @@
               </a:defRPr>
             </a:lvl5pPr>
             <a:lvl6pPr>
+              <a:buNone/>
               <a:defRPr sz="3600" b="1">
                 <a:solidFill>
                   <a:srgbClr val="252638"/>
@@ -12502,6 +14804,7 @@
               </a:defRPr>
             </a:lvl6pPr>
             <a:lvl7pPr>
+              <a:buNone/>
               <a:defRPr sz="3600" b="1">
                 <a:solidFill>
                   <a:srgbClr val="252638"/>
@@ -12512,6 +14815,7 @@
               </a:defRPr>
             </a:lvl7pPr>
             <a:lvl8pPr>
+              <a:buNone/>
               <a:defRPr sz="3600" b="1">
                 <a:solidFill>
                   <a:srgbClr val="252638"/>
@@ -12522,6 +14826,7 @@
               </a:defRPr>
             </a:lvl8pPr>
             <a:lvl9pPr>
+              <a:buNone/>
               <a:defRPr sz="3600" b="1">
                 <a:solidFill>
                   <a:srgbClr val="252638"/>
@@ -12534,6 +14839,7 @@
           </a:lstStyle>
           <a:p xmlns:a="http://schemas.openxmlformats.org/drawingml/2006/main">
             <a:pPr>
+              <a:buNone/>
               <a:defRPr sz="3600" b="1">
                 <a:solidFill>
                   <a:srgbClr val="252638"/>
@@ -12544,7 +14850,7 @@
               </a:defRPr>
             </a:pPr>
             <a:r>
-              <a:rPr sz="3600" b="1">
+              <a:rPr sz="3300" b="1">
                 <a:solidFill>
                   <a:srgbClr val="252638"/>
                 </a:solidFill>
@@ -12552,7 +14858,7 @@
                 <a:ea typeface="DejaVu Sans"/>
                 <a:cs typeface="DejaVu Sans"/>
               </a:rPr>
-              <a:t>Итог этапа и ближайшая проверка</a:t>
+              <a:t>Как оценили сложность и сроки</a:t>
             </a:r>
           </a:p>
         </p:txBody>
@@ -12599,6 +14905,7 @@
               </a:defRPr>
             </a:defPPr>
             <a:lvl1pPr>
+              <a:buNone/>
               <a:defRPr sz="1200" b="0">
                 <a:solidFill>
                   <a:srgbClr val="858393"/>
@@ -12609,6 +14916,7 @@
               </a:defRPr>
             </a:lvl1pPr>
             <a:lvl2pPr>
+              <a:buNone/>
               <a:defRPr sz="1200" b="0">
                 <a:solidFill>
                   <a:srgbClr val="858393"/>
@@ -12619,6 +14927,7 @@
               </a:defRPr>
             </a:lvl2pPr>
             <a:lvl3pPr>
+              <a:buNone/>
               <a:defRPr sz="1200" b="0">
                 <a:solidFill>
                   <a:srgbClr val="858393"/>
@@ -12629,6 +14938,7 @@
               </a:defRPr>
             </a:lvl3pPr>
             <a:lvl4pPr>
+              <a:buNone/>
               <a:defRPr sz="1200" b="0">
                 <a:solidFill>
                   <a:srgbClr val="858393"/>
@@ -12639,6 +14949,7 @@
               </a:defRPr>
             </a:lvl4pPr>
             <a:lvl5pPr>
+              <a:buNone/>
               <a:defRPr sz="1200" b="0">
                 <a:solidFill>
                   <a:srgbClr val="858393"/>
@@ -12649,6 +14960,7 @@
               </a:defRPr>
             </a:lvl5pPr>
             <a:lvl6pPr>
+              <a:buNone/>
               <a:defRPr sz="1200" b="0">
                 <a:solidFill>
                   <a:srgbClr val="858393"/>
@@ -12659,6 +14971,7 @@
               </a:defRPr>
             </a:lvl6pPr>
             <a:lvl7pPr>
+              <a:buNone/>
               <a:defRPr sz="1200" b="0">
                 <a:solidFill>
                   <a:srgbClr val="858393"/>
@@ -12669,6 +14982,7 @@
               </a:defRPr>
             </a:lvl7pPr>
             <a:lvl8pPr>
+              <a:buNone/>
               <a:defRPr sz="1200" b="0">
                 <a:solidFill>
                   <a:srgbClr val="858393"/>
@@ -12679,6 +14993,7 @@
               </a:defRPr>
             </a:lvl8pPr>
             <a:lvl9pPr>
+              <a:buNone/>
               <a:defRPr sz="1200" b="0">
                 <a:solidFill>
                   <a:srgbClr val="858393"/>
@@ -12691,6 +15006,7 @@
           </a:lstStyle>
           <a:p xmlns:a="http://schemas.openxmlformats.org/drawingml/2006/main">
             <a:pPr>
+              <a:buNone/>
               <a:defRPr sz="1200" b="0">
                 <a:solidFill>
                   <a:srgbClr val="858393"/>
@@ -12709,7 +15025,7 @@
                 <a:ea typeface="DejaVu Sans"/>
                 <a:cs typeface="DejaVu Sans"/>
               </a:rPr>
-              <a:t>06</a:t>
+              <a:t>07</a:t>
             </a:r>
           </a:p>
         </p:txBody>
@@ -12756,6 +15072,7 @@
               </a:defRPr>
             </a:defPPr>
             <a:lvl1pPr>
+              <a:buNone/>
               <a:defRPr sz="2250" b="1">
                 <a:solidFill>
                   <a:srgbClr val="252638"/>
@@ -12766,6 +15083,7 @@
               </a:defRPr>
             </a:lvl1pPr>
             <a:lvl2pPr>
+              <a:buNone/>
               <a:defRPr sz="2250" b="1">
                 <a:solidFill>
                   <a:srgbClr val="252638"/>
@@ -12776,6 +15094,7 @@
               </a:defRPr>
             </a:lvl2pPr>
             <a:lvl3pPr>
+              <a:buNone/>
               <a:defRPr sz="2250" b="1">
                 <a:solidFill>
                   <a:srgbClr val="252638"/>
@@ -12786,6 +15105,7 @@
               </a:defRPr>
             </a:lvl3pPr>
             <a:lvl4pPr>
+              <a:buNone/>
               <a:defRPr sz="2250" b="1">
                 <a:solidFill>
                   <a:srgbClr val="252638"/>
@@ -12796,6 +15116,7 @@
               </a:defRPr>
             </a:lvl4pPr>
             <a:lvl5pPr>
+              <a:buNone/>
               <a:defRPr sz="2250" b="1">
                 <a:solidFill>
                   <a:srgbClr val="252638"/>
@@ -12806,6 +15127,7 @@
               </a:defRPr>
             </a:lvl5pPr>
             <a:lvl6pPr>
+              <a:buNone/>
               <a:defRPr sz="2250" b="1">
                 <a:solidFill>
                   <a:srgbClr val="252638"/>
@@ -12816,6 +15138,7 @@
               </a:defRPr>
             </a:lvl6pPr>
             <a:lvl7pPr>
+              <a:buNone/>
               <a:defRPr sz="2250" b="1">
                 <a:solidFill>
                   <a:srgbClr val="252638"/>
@@ -12826,6 +15149,7 @@
               </a:defRPr>
             </a:lvl7pPr>
             <a:lvl8pPr>
+              <a:buNone/>
               <a:defRPr sz="2250" b="1">
                 <a:solidFill>
                   <a:srgbClr val="252638"/>
@@ -12836,6 +15160,7 @@
               </a:defRPr>
             </a:lvl8pPr>
             <a:lvl9pPr>
+              <a:buNone/>
               <a:defRPr sz="2250" b="1">
                 <a:solidFill>
                   <a:srgbClr val="252638"/>
@@ -12848,6 +15173,7 @@
           </a:lstStyle>
           <a:p xmlns:a="http://schemas.openxmlformats.org/drawingml/2006/main">
             <a:pPr>
+              <a:buNone/>
               <a:defRPr sz="2250" b="1">
                 <a:solidFill>
                   <a:srgbClr val="252638"/>
@@ -12866,7 +15192,7 @@
                 <a:ea typeface="DejaVu Sans"/>
                 <a:cs typeface="DejaVu Sans"/>
               </a:rPr>
-              <a:t>Прошедшая неделя</a:t>
+              <a:t>Оценка нового плана</a:t>
             </a:r>
           </a:p>
         </p:txBody>
@@ -12887,8 +15213,8 @@
         </p:nvSpPr>
         <p:spPr>
           <a:xfrm xmlns:a="http://schemas.openxmlformats.org/drawingml/2006/main">
-            <a:off x="609600" y="2809875"/>
-            <a:ext cx="10668000" cy="1047750"/>
+            <a:off x="609600" y="2762250"/>
+            <a:ext cx="10668000" cy="1238250"/>
           </a:xfrm>
           <a:prstGeom xmlns:a="http://schemas.openxmlformats.org/drawingml/2006/main" prst="rect">
             <a:avLst/>
@@ -12903,7 +15229,7 @@
           <a:bodyPr xmlns:a="http://schemas.openxmlformats.org/drawingml/2006/main" anchor="t"/>
           <a:lstStyle xmlns:a="http://schemas.openxmlformats.org/drawingml/2006/main">
             <a:defPPr>
-              <a:defRPr sz="2175" b="0">
+              <a:defRPr sz="1875" b="0">
                 <a:solidFill>
                   <a:srgbClr val="777383"/>
                 </a:solidFill>
@@ -12913,6 +15239,7 @@
               </a:defRPr>
             </a:defPPr>
             <a:lvl1pPr>
+              <a:buNone/>
               <a:defRPr sz="2175" b="0">
                 <a:solidFill>
                   <a:srgbClr val="777383"/>
@@ -12923,6 +15250,7 @@
               </a:defRPr>
             </a:lvl1pPr>
             <a:lvl2pPr>
+              <a:buNone/>
               <a:defRPr sz="2175" b="0">
                 <a:solidFill>
                   <a:srgbClr val="777383"/>
@@ -12933,6 +15261,7 @@
               </a:defRPr>
             </a:lvl2pPr>
             <a:lvl3pPr>
+              <a:buNone/>
               <a:defRPr sz="2175" b="0">
                 <a:solidFill>
                   <a:srgbClr val="777383"/>
@@ -12943,6 +15272,7 @@
               </a:defRPr>
             </a:lvl3pPr>
             <a:lvl4pPr>
+              <a:buNone/>
               <a:defRPr sz="2175" b="0">
                 <a:solidFill>
                   <a:srgbClr val="777383"/>
@@ -12953,6 +15283,7 @@
               </a:defRPr>
             </a:lvl4pPr>
             <a:lvl5pPr>
+              <a:buNone/>
               <a:defRPr sz="2175" b="0">
                 <a:solidFill>
                   <a:srgbClr val="777383"/>
@@ -12963,6 +15294,7 @@
               </a:defRPr>
             </a:lvl5pPr>
             <a:lvl6pPr>
+              <a:buNone/>
               <a:defRPr sz="2175" b="0">
                 <a:solidFill>
                   <a:srgbClr val="777383"/>
@@ -12973,6 +15305,7 @@
               </a:defRPr>
             </a:lvl6pPr>
             <a:lvl7pPr>
+              <a:buNone/>
               <a:defRPr sz="2175" b="0">
                 <a:solidFill>
                   <a:srgbClr val="777383"/>
@@ -12983,6 +15316,7 @@
               </a:defRPr>
             </a:lvl7pPr>
             <a:lvl8pPr>
+              <a:buNone/>
               <a:defRPr sz="2175" b="0">
                 <a:solidFill>
                   <a:srgbClr val="777383"/>
@@ -12993,6 +15327,7 @@
               </a:defRPr>
             </a:lvl8pPr>
             <a:lvl9pPr>
+              <a:buNone/>
               <a:defRPr sz="2175" b="0">
                 <a:solidFill>
                   <a:srgbClr val="777383"/>
@@ -13005,6 +15340,7 @@
           </a:lstStyle>
           <a:p xmlns:a="http://schemas.openxmlformats.org/drawingml/2006/main">
             <a:pPr>
+              <a:buNone/>
               <a:defRPr sz="2175" b="0">
                 <a:solidFill>
                   <a:srgbClr val="777383"/>
@@ -13015,7 +15351,7 @@
               </a:defRPr>
             </a:pPr>
             <a:r>
-              <a:rPr sz="2175" b="0">
+              <a:rPr sz="1875" b="0">
                 <a:solidFill>
                   <a:srgbClr val="777383"/>
                 </a:solidFill>
@@ -13023,11 +15359,12 @@
                 <a:ea typeface="DejaVu Sans"/>
                 <a:cs typeface="DejaVu Sans"/>
               </a:rPr>
-              <a:t>Были ТЗ, макет и доска. Выполнение разработки</a:t>
+              <a:t>Используем story points: 1, 2, 3, 5, 8 по относительной сложности.</a:t>
             </a:r>
           </a:p>
           <a:p xmlns:a="http://schemas.openxmlformats.org/drawingml/2006/main">
             <a:pPr>
+              <a:buNone/>
               <a:defRPr sz="2175" b="0">
                 <a:solidFill>
                   <a:srgbClr val="777383"/>
@@ -13038,7 +15375,7 @@
               </a:defRPr>
             </a:pPr>
             <a:r>
-              <a:rPr sz="2175" b="0">
+              <a:rPr sz="1875" b="0">
                 <a:solidFill>
                   <a:srgbClr val="777383"/>
                 </a:solidFill>
@@ -13046,7 +15383,31 @@
                 <a:ea typeface="DejaVu Sans"/>
                 <a:cs typeface="DejaVu Sans"/>
               </a:rPr>
-              <a:t>и исходная оценка недели не подтверждены.</a:t>
+              <a:t>Учитываем объём изменений, зависимости и технические риски.</a:t>
+            </a:r>
+          </a:p>
+          <a:p xmlns:a="http://schemas.openxmlformats.org/drawingml/2006/main">
+            <a:pPr>
+              <a:buNone/>
+              <a:defRPr sz="2175" b="0">
+                <a:solidFill>
+                  <a:srgbClr val="777383"/>
+                </a:solidFill>
+                <a:latin typeface="DejaVu Sans"/>
+                <a:ea typeface="DejaVu Sans"/>
+                <a:cs typeface="DejaVu Sans"/>
+              </a:defRPr>
+            </a:pPr>
+            <a:r>
+              <a:rPr sz="1875" b="0">
+                <a:solidFill>
+                  <a:srgbClr val="777383"/>
+                </a:solidFill>
+                <a:latin typeface="DejaVu Sans"/>
+                <a:ea typeface="DejaVu Sans"/>
+                <a:cs typeface="DejaVu Sans"/>
+              </a:rPr>
+              <a:t>ТЗ и HTML получили по 3 SP, Trello и QA по 2 SP, выступление 1 SP.</a:t>
             </a:r>
           </a:p>
         </p:txBody>
@@ -13093,6 +15454,7 @@
               </a:defRPr>
             </a:defPPr>
             <a:lvl1pPr>
+              <a:buNone/>
               <a:defRPr sz="2250" b="1">
                 <a:solidFill>
                   <a:srgbClr val="6145E6"/>
@@ -13103,6 +15465,7 @@
               </a:defRPr>
             </a:lvl1pPr>
             <a:lvl2pPr>
+              <a:buNone/>
               <a:defRPr sz="2250" b="1">
                 <a:solidFill>
                   <a:srgbClr val="6145E6"/>
@@ -13113,6 +15476,7 @@
               </a:defRPr>
             </a:lvl2pPr>
             <a:lvl3pPr>
+              <a:buNone/>
               <a:defRPr sz="2250" b="1">
                 <a:solidFill>
                   <a:srgbClr val="6145E6"/>
@@ -13123,6 +15487,7 @@
               </a:defRPr>
             </a:lvl3pPr>
             <a:lvl4pPr>
+              <a:buNone/>
               <a:defRPr sz="2250" b="1">
                 <a:solidFill>
                   <a:srgbClr val="6145E6"/>
@@ -13133,6 +15498,7 @@
               </a:defRPr>
             </a:lvl4pPr>
             <a:lvl5pPr>
+              <a:buNone/>
               <a:defRPr sz="2250" b="1">
                 <a:solidFill>
                   <a:srgbClr val="6145E6"/>
@@ -13143,6 +15509,7 @@
               </a:defRPr>
             </a:lvl5pPr>
             <a:lvl6pPr>
+              <a:buNone/>
               <a:defRPr sz="2250" b="1">
                 <a:solidFill>
                   <a:srgbClr val="6145E6"/>
@@ -13153,6 +15520,7 @@
               </a:defRPr>
             </a:lvl6pPr>
             <a:lvl7pPr>
+              <a:buNone/>
               <a:defRPr sz="2250" b="1">
                 <a:solidFill>
                   <a:srgbClr val="6145E6"/>
@@ -13163,6 +15531,7 @@
               </a:defRPr>
             </a:lvl7pPr>
             <a:lvl8pPr>
+              <a:buNone/>
               <a:defRPr sz="2250" b="1">
                 <a:solidFill>
                   <a:srgbClr val="6145E6"/>
@@ -13173,6 +15542,7 @@
               </a:defRPr>
             </a:lvl8pPr>
             <a:lvl9pPr>
+              <a:buNone/>
               <a:defRPr sz="2250" b="1">
                 <a:solidFill>
                   <a:srgbClr val="6145E6"/>
@@ -13185,6 +15555,7 @@
           </a:lstStyle>
           <a:p xmlns:a="http://schemas.openxmlformats.org/drawingml/2006/main">
             <a:pPr>
+              <a:buNone/>
               <a:defRPr sz="2250" b="1">
                 <a:solidFill>
                   <a:srgbClr val="6145E6"/>
@@ -13203,7 +15574,7 @@
                 <a:ea typeface="DejaVu Sans"/>
                 <a:cs typeface="DejaVu Sans"/>
               </a:rPr>
-              <a:t>Перед переходом к backend</a:t>
+              <a:t>Уложились ли в прошедшую неделю</a:t>
             </a:r>
           </a:p>
         </p:txBody>
@@ -13224,8 +15595,8 @@
         </p:nvSpPr>
         <p:spPr>
           <a:xfrm xmlns:a="http://schemas.openxmlformats.org/drawingml/2006/main">
-            <a:off x="609600" y="4953000"/>
-            <a:ext cx="10477500" cy="952500"/>
+            <a:off x="609600" y="4905375"/>
+            <a:ext cx="10477500" cy="1238250"/>
           </a:xfrm>
           <a:prstGeom xmlns:a="http://schemas.openxmlformats.org/drawingml/2006/main" prst="rect">
             <a:avLst/>
@@ -13240,7 +15611,7 @@
           <a:bodyPr xmlns:a="http://schemas.openxmlformats.org/drawingml/2006/main" anchor="t"/>
           <a:lstStyle xmlns:a="http://schemas.openxmlformats.org/drawingml/2006/main">
             <a:defPPr>
-              <a:defRPr sz="2175" b="0">
+              <a:defRPr sz="1875" b="0">
                 <a:solidFill>
                   <a:srgbClr val="252638"/>
                 </a:solidFill>
@@ -13250,6 +15621,7 @@
               </a:defRPr>
             </a:defPPr>
             <a:lvl1pPr>
+              <a:buNone/>
               <a:defRPr sz="2175" b="0">
                 <a:solidFill>
                   <a:srgbClr val="252638"/>
@@ -13260,6 +15632,7 @@
               </a:defRPr>
             </a:lvl1pPr>
             <a:lvl2pPr>
+              <a:buNone/>
               <a:defRPr sz="2175" b="0">
                 <a:solidFill>
                   <a:srgbClr val="252638"/>
@@ -13270,6 +15643,7 @@
               </a:defRPr>
             </a:lvl2pPr>
             <a:lvl3pPr>
+              <a:buNone/>
               <a:defRPr sz="2175" b="0">
                 <a:solidFill>
                   <a:srgbClr val="252638"/>
@@ -13280,6 +15654,7 @@
               </a:defRPr>
             </a:lvl3pPr>
             <a:lvl4pPr>
+              <a:buNone/>
               <a:defRPr sz="2175" b="0">
                 <a:solidFill>
                   <a:srgbClr val="252638"/>
@@ -13290,6 +15665,7 @@
               </a:defRPr>
             </a:lvl4pPr>
             <a:lvl5pPr>
+              <a:buNone/>
               <a:defRPr sz="2175" b="0">
                 <a:solidFill>
                   <a:srgbClr val="252638"/>
@@ -13300,6 +15676,7 @@
               </a:defRPr>
             </a:lvl5pPr>
             <a:lvl6pPr>
+              <a:buNone/>
               <a:defRPr sz="2175" b="0">
                 <a:solidFill>
                   <a:srgbClr val="252638"/>
@@ -13310,6 +15687,7 @@
               </a:defRPr>
             </a:lvl6pPr>
             <a:lvl7pPr>
+              <a:buNone/>
               <a:defRPr sz="2175" b="0">
                 <a:solidFill>
                   <a:srgbClr val="252638"/>
@@ -13320,6 +15698,7 @@
               </a:defRPr>
             </a:lvl7pPr>
             <a:lvl8pPr>
+              <a:buNone/>
               <a:defRPr sz="2175" b="0">
                 <a:solidFill>
                   <a:srgbClr val="252638"/>
@@ -13330,6 +15709,7 @@
               </a:defRPr>
             </a:lvl8pPr>
             <a:lvl9pPr>
+              <a:buNone/>
               <a:defRPr sz="2175" b="0">
                 <a:solidFill>
                   <a:srgbClr val="252638"/>
@@ -13342,6 +15722,7 @@
           </a:lstStyle>
           <a:p xmlns:a="http://schemas.openxmlformats.org/drawingml/2006/main">
             <a:pPr>
+              <a:buNone/>
               <a:defRPr sz="2175" b="0">
                 <a:solidFill>
                   <a:srgbClr val="252638"/>
@@ -13352,7 +15733,7 @@
               </a:defRPr>
             </a:pPr>
             <a:r>
-              <a:rPr sz="2175" b="0">
+              <a:rPr sz="1875" b="0">
                 <a:solidFill>
                   <a:srgbClr val="252638"/>
                 </a:solidFill>
@@ -13360,11 +15741,12 @@
                 <a:ea typeface="DejaVu Sans"/>
                 <a:cs typeface="DejaVu Sans"/>
               </a:rPr>
-              <a:t>Станислав проверяет прототип.</a:t>
+              <a:t>Подготовили организационную основу, но реализацию не завершили.</a:t>
             </a:r>
           </a:p>
           <a:p xmlns:a="http://schemas.openxmlformats.org/drawingml/2006/main">
             <a:pPr>
+              <a:buNone/>
               <a:defRPr sz="2175" b="0">
                 <a:solidFill>
                   <a:srgbClr val="252638"/>
@@ -13375,7 +15757,7 @@
               </a:defRPr>
             </a:pPr>
             <a:r>
-              <a:rPr sz="2175" b="0">
+              <a:rPr sz="1875" b="0">
                 <a:solidFill>
                   <a:srgbClr val="252638"/>
                 </a:solidFill>
@@ -13383,7 +15765,1325 @@
                 <a:ea typeface="DejaVu Sans"/>
                 <a:cs typeface="DejaVu Sans"/>
               </a:rPr>
-              <a:t>Команда согласует ТЗ и принимает результаты.</a:t>
+              <a:t>Исходных оценок и фактической длительности задач не зафиксировали.</a:t>
+            </a:r>
+          </a:p>
+          <a:p xmlns:a="http://schemas.openxmlformats.org/drawingml/2006/main">
+            <a:pPr>
+              <a:buNone/>
+              <a:defRPr sz="2175" b="0">
+                <a:solidFill>
+                  <a:srgbClr val="252638"/>
+                </a:solidFill>
+                <a:latin typeface="DejaVu Sans"/>
+                <a:ea typeface="DejaVu Sans"/>
+                <a:cs typeface="DejaVu Sans"/>
+              </a:defRPr>
+            </a:pPr>
+            <a:r>
+              <a:rPr sz="1875" b="0">
+                <a:solidFill>
+                  <a:srgbClr val="252638"/>
+                </a:solidFill>
+                <a:latin typeface="DejaVu Sans"/>
+                <a:ea typeface="DejaVu Sans"/>
+                <a:cs typeface="DejaVu Sans"/>
+              </a:rPr>
+              <a:t>Поэтому выполнение плана в SP пока нельзя достоверно посчитать.</a:t>
+            </a:r>
+          </a:p>
+        </p:txBody>
+      </p:sp>
+    </p:spTree>
+    <p:extLst>
+      <p:ext uri="{BB962C8B-B14F-4D97-AF65-F5344CB8AC3E}">
+        <p14:creationId xmlns:p14="http://schemas.microsoft.com/office/powerpoint/2010/main" val="46775566"/>
+      </p:ext>
+    </p:extLst>
+  </p:cSld>
+</p:sld>
+</file>
+
+<file path=ppt/slides/slide8.xml><?xml version="1.0" encoding="utf-8"?>
+<p:sld xmlns:p="http://schemas.openxmlformats.org/presentationml/2006/main">
+  <p:cSld>
+    <p:bg>
+      <p:bgPr>
+        <a:solidFill xmlns:a="http://schemas.openxmlformats.org/drawingml/2006/main">
+          <a:srgbClr val="FAF9FF"/>
+        </a:solidFill>
+      </p:bgPr>
+    </p:bg>
+    <p:spTree>
+      <p:nvGrpSpPr>
+        <p:cNvPr id="1" name=""/>
+        <p:cNvGrpSpPr/>
+        <p:nvPr/>
+      </p:nvGrpSpPr>
+      <p:grpSpPr>
+        <a:xfrm xmlns:a="http://schemas.openxmlformats.org/drawingml/2006/main"/>
+      </p:grpSpPr>
+      <p:sp>
+        <p:nvSpPr>
+          <p:cNvPr id="8" name="series">
+            <a:extLst xmlns:a="http://schemas.openxmlformats.org/drawingml/2006/main">
+              <a:ext uri="{FF2B5EF4-FFF2-40B4-BE49-F238E27FC236}">
+                <a16:creationId xmlns:a16="http://schemas.microsoft.com/office/drawing/2014/main" id="{9E3D0ACC-32FB-4388-AAC1-6879AFA9239B}"/>
+              </a:ext>
+            </a:extLst>
+          </p:cNvPr>
+          <p:cNvSpPr>
+            <a:spLocks xmlns:a="http://schemas.openxmlformats.org/drawingml/2006/main" noGrp="1"/>
+          </p:cNvSpPr>
+          <p:nvPr/>
+        </p:nvSpPr>
+        <p:spPr>
+          <a:xfrm xmlns:a="http://schemas.openxmlformats.org/drawingml/2006/main">
+            <a:off x="609600" y="285750"/>
+            <a:ext cx="10477500" cy="285750"/>
+          </a:xfrm>
+          <a:prstGeom xmlns:a="http://schemas.openxmlformats.org/drawingml/2006/main" prst="rect">
+            <a:avLst/>
+          </a:prstGeom>
+          <a:noFill xmlns:a="http://schemas.openxmlformats.org/drawingml/2006/main"/>
+          <a:ln xmlns:a="http://schemas.openxmlformats.org/drawingml/2006/main" w="0">
+            <a:noFill/>
+            <a:prstDash val="solid"/>
+          </a:ln>
+        </p:spPr>
+        <p:txBody>
+          <a:bodyPr xmlns:a="http://schemas.openxmlformats.org/drawingml/2006/main" anchor="t"/>
+          <a:lstStyle xmlns:a="http://schemas.openxmlformats.org/drawingml/2006/main">
+            <a:defPPr>
+              <a:defRPr sz="1125" b="1">
+                <a:solidFill>
+                  <a:srgbClr val="6145E6"/>
+                </a:solidFill>
+                <a:latin typeface="DejaVu Sans"/>
+                <a:ea typeface="DejaVu Sans"/>
+                <a:cs typeface="DejaVu Sans"/>
+              </a:defRPr>
+            </a:defPPr>
+            <a:lvl1pPr>
+              <a:buNone/>
+              <a:defRPr sz="1125" b="1">
+                <a:solidFill>
+                  <a:srgbClr val="6145E6"/>
+                </a:solidFill>
+                <a:latin typeface="DejaVu Sans"/>
+                <a:ea typeface="DejaVu Sans"/>
+                <a:cs typeface="DejaVu Sans"/>
+              </a:defRPr>
+            </a:lvl1pPr>
+            <a:lvl2pPr>
+              <a:buNone/>
+              <a:defRPr sz="1125" b="1">
+                <a:solidFill>
+                  <a:srgbClr val="6145E6"/>
+                </a:solidFill>
+                <a:latin typeface="DejaVu Sans"/>
+                <a:ea typeface="DejaVu Sans"/>
+                <a:cs typeface="DejaVu Sans"/>
+              </a:defRPr>
+            </a:lvl2pPr>
+            <a:lvl3pPr>
+              <a:buNone/>
+              <a:defRPr sz="1125" b="1">
+                <a:solidFill>
+                  <a:srgbClr val="6145E6"/>
+                </a:solidFill>
+                <a:latin typeface="DejaVu Sans"/>
+                <a:ea typeface="DejaVu Sans"/>
+                <a:cs typeface="DejaVu Sans"/>
+              </a:defRPr>
+            </a:lvl3pPr>
+            <a:lvl4pPr>
+              <a:buNone/>
+              <a:defRPr sz="1125" b="1">
+                <a:solidFill>
+                  <a:srgbClr val="6145E6"/>
+                </a:solidFill>
+                <a:latin typeface="DejaVu Sans"/>
+                <a:ea typeface="DejaVu Sans"/>
+                <a:cs typeface="DejaVu Sans"/>
+              </a:defRPr>
+            </a:lvl4pPr>
+            <a:lvl5pPr>
+              <a:buNone/>
+              <a:defRPr sz="1125" b="1">
+                <a:solidFill>
+                  <a:srgbClr val="6145E6"/>
+                </a:solidFill>
+                <a:latin typeface="DejaVu Sans"/>
+                <a:ea typeface="DejaVu Sans"/>
+                <a:cs typeface="DejaVu Sans"/>
+              </a:defRPr>
+            </a:lvl5pPr>
+            <a:lvl6pPr>
+              <a:buNone/>
+              <a:defRPr sz="1125" b="1">
+                <a:solidFill>
+                  <a:srgbClr val="6145E6"/>
+                </a:solidFill>
+                <a:latin typeface="DejaVu Sans"/>
+                <a:ea typeface="DejaVu Sans"/>
+                <a:cs typeface="DejaVu Sans"/>
+              </a:defRPr>
+            </a:lvl6pPr>
+            <a:lvl7pPr>
+              <a:buNone/>
+              <a:defRPr sz="1125" b="1">
+                <a:solidFill>
+                  <a:srgbClr val="6145E6"/>
+                </a:solidFill>
+                <a:latin typeface="DejaVu Sans"/>
+                <a:ea typeface="DejaVu Sans"/>
+                <a:cs typeface="DejaVu Sans"/>
+              </a:defRPr>
+            </a:lvl7pPr>
+            <a:lvl8pPr>
+              <a:buNone/>
+              <a:defRPr sz="1125" b="1">
+                <a:solidFill>
+                  <a:srgbClr val="6145E6"/>
+                </a:solidFill>
+                <a:latin typeface="DejaVu Sans"/>
+                <a:ea typeface="DejaVu Sans"/>
+                <a:cs typeface="DejaVu Sans"/>
+              </a:defRPr>
+            </a:lvl8pPr>
+            <a:lvl9pPr>
+              <a:buNone/>
+              <a:defRPr sz="1125" b="1">
+                <a:solidFill>
+                  <a:srgbClr val="6145E6"/>
+                </a:solidFill>
+                <a:latin typeface="DejaVu Sans"/>
+                <a:ea typeface="DejaVu Sans"/>
+                <a:cs typeface="DejaVu Sans"/>
+              </a:defRPr>
+            </a:lvl9pPr>
+          </a:lstStyle>
+          <a:p xmlns:a="http://schemas.openxmlformats.org/drawingml/2006/main">
+            <a:pPr>
+              <a:buNone/>
+              <a:defRPr sz="1125" b="1">
+                <a:solidFill>
+                  <a:srgbClr val="6145E6"/>
+                </a:solidFill>
+                <a:latin typeface="DejaVu Sans"/>
+                <a:ea typeface="DejaVu Sans"/>
+                <a:cs typeface="DejaVu Sans"/>
+              </a:defRPr>
+            </a:pPr>
+            <a:r>
+              <a:rPr sz="1125" b="1">
+                <a:solidFill>
+                  <a:srgbClr val="6145E6"/>
+                </a:solidFill>
+                <a:latin typeface="DejaVu Sans"/>
+                <a:ea typeface="DejaVu Sans"/>
+                <a:cs typeface="DejaVu Sans"/>
+              </a:rPr>
+              <a:t>ОНЛАЙН КУРСЫ / УЧЕБНЫЙ ПРОЕКТ</a:t>
+            </a:r>
+          </a:p>
+        </p:txBody>
+      </p:sp>
+      <p:sp>
+        <p:nvSpPr>
+          <p:cNvPr id="2" name="title">
+            <a:extLst xmlns:a="http://schemas.openxmlformats.org/drawingml/2006/main">
+              <a:ext uri="{FF2B5EF4-FFF2-40B4-BE49-F238E27FC236}">
+                <a16:creationId xmlns:a16="http://schemas.microsoft.com/office/drawing/2014/main" id="{0A0FED90-7599-4671-B59A-7CD6174A012F}"/>
+              </a:ext>
+            </a:extLst>
+          </p:cNvPr>
+          <p:cNvSpPr>
+            <a:spLocks xmlns:a="http://schemas.openxmlformats.org/drawingml/2006/main" noGrp="1"/>
+          </p:cNvSpPr>
+          <p:nvPr/>
+        </p:nvSpPr>
+        <p:spPr>
+          <a:xfrm xmlns:a="http://schemas.openxmlformats.org/drawingml/2006/main">
+            <a:off x="609600" y="895350"/>
+            <a:ext cx="10953750" cy="1143000"/>
+          </a:xfrm>
+          <a:prstGeom xmlns:a="http://schemas.openxmlformats.org/drawingml/2006/main" prst="rect">
+            <a:avLst/>
+          </a:prstGeom>
+          <a:noFill xmlns:a="http://schemas.openxmlformats.org/drawingml/2006/main"/>
+          <a:ln xmlns:a="http://schemas.openxmlformats.org/drawingml/2006/main" w="0">
+            <a:noFill/>
+            <a:prstDash val="solid"/>
+          </a:ln>
+        </p:spPr>
+        <p:txBody>
+          <a:bodyPr xmlns:a="http://schemas.openxmlformats.org/drawingml/2006/main" anchor="t"/>
+          <a:lstStyle xmlns:a="http://schemas.openxmlformats.org/drawingml/2006/main">
+            <a:defPPr>
+              <a:defRPr sz="3300" b="1">
+                <a:solidFill>
+                  <a:srgbClr val="252638"/>
+                </a:solidFill>
+                <a:latin typeface="DejaVu Sans"/>
+                <a:ea typeface="DejaVu Sans"/>
+                <a:cs typeface="DejaVu Sans"/>
+              </a:defRPr>
+            </a:defPPr>
+            <a:lvl1pPr>
+              <a:buNone/>
+              <a:defRPr sz="3600" b="1">
+                <a:solidFill>
+                  <a:srgbClr val="252638"/>
+                </a:solidFill>
+                <a:latin typeface="DejaVu Sans"/>
+                <a:ea typeface="DejaVu Sans"/>
+                <a:cs typeface="DejaVu Sans"/>
+              </a:defRPr>
+            </a:lvl1pPr>
+            <a:lvl2pPr>
+              <a:buNone/>
+              <a:defRPr sz="3600" b="1">
+                <a:solidFill>
+                  <a:srgbClr val="252638"/>
+                </a:solidFill>
+                <a:latin typeface="DejaVu Sans"/>
+                <a:ea typeface="DejaVu Sans"/>
+                <a:cs typeface="DejaVu Sans"/>
+              </a:defRPr>
+            </a:lvl2pPr>
+            <a:lvl3pPr>
+              <a:buNone/>
+              <a:defRPr sz="3600" b="1">
+                <a:solidFill>
+                  <a:srgbClr val="252638"/>
+                </a:solidFill>
+                <a:latin typeface="DejaVu Sans"/>
+                <a:ea typeface="DejaVu Sans"/>
+                <a:cs typeface="DejaVu Sans"/>
+              </a:defRPr>
+            </a:lvl3pPr>
+            <a:lvl4pPr>
+              <a:buNone/>
+              <a:defRPr sz="3600" b="1">
+                <a:solidFill>
+                  <a:srgbClr val="252638"/>
+                </a:solidFill>
+                <a:latin typeface="DejaVu Sans"/>
+                <a:ea typeface="DejaVu Sans"/>
+                <a:cs typeface="DejaVu Sans"/>
+              </a:defRPr>
+            </a:lvl4pPr>
+            <a:lvl5pPr>
+              <a:buNone/>
+              <a:defRPr sz="3600" b="1">
+                <a:solidFill>
+                  <a:srgbClr val="252638"/>
+                </a:solidFill>
+                <a:latin typeface="DejaVu Sans"/>
+                <a:ea typeface="DejaVu Sans"/>
+                <a:cs typeface="DejaVu Sans"/>
+              </a:defRPr>
+            </a:lvl5pPr>
+            <a:lvl6pPr>
+              <a:buNone/>
+              <a:defRPr sz="3600" b="1">
+                <a:solidFill>
+                  <a:srgbClr val="252638"/>
+                </a:solidFill>
+                <a:latin typeface="DejaVu Sans"/>
+                <a:ea typeface="DejaVu Sans"/>
+                <a:cs typeface="DejaVu Sans"/>
+              </a:defRPr>
+            </a:lvl6pPr>
+            <a:lvl7pPr>
+              <a:buNone/>
+              <a:defRPr sz="3600" b="1">
+                <a:solidFill>
+                  <a:srgbClr val="252638"/>
+                </a:solidFill>
+                <a:latin typeface="DejaVu Sans"/>
+                <a:ea typeface="DejaVu Sans"/>
+                <a:cs typeface="DejaVu Sans"/>
+              </a:defRPr>
+            </a:lvl7pPr>
+            <a:lvl8pPr>
+              <a:buNone/>
+              <a:defRPr sz="3600" b="1">
+                <a:solidFill>
+                  <a:srgbClr val="252638"/>
+                </a:solidFill>
+                <a:latin typeface="DejaVu Sans"/>
+                <a:ea typeface="DejaVu Sans"/>
+                <a:cs typeface="DejaVu Sans"/>
+              </a:defRPr>
+            </a:lvl8pPr>
+            <a:lvl9pPr>
+              <a:buNone/>
+              <a:defRPr sz="3600" b="1">
+                <a:solidFill>
+                  <a:srgbClr val="252638"/>
+                </a:solidFill>
+                <a:latin typeface="DejaVu Sans"/>
+                <a:ea typeface="DejaVu Sans"/>
+                <a:cs typeface="DejaVu Sans"/>
+              </a:defRPr>
+            </a:lvl9pPr>
+          </a:lstStyle>
+          <a:p xmlns:a="http://schemas.openxmlformats.org/drawingml/2006/main">
+            <a:pPr>
+              <a:buNone/>
+              <a:defRPr sz="3600" b="1">
+                <a:solidFill>
+                  <a:srgbClr val="252638"/>
+                </a:solidFill>
+                <a:latin typeface="DejaVu Sans"/>
+                <a:ea typeface="DejaVu Sans"/>
+                <a:cs typeface="DejaVu Sans"/>
+              </a:defRPr>
+            </a:pPr>
+            <a:r>
+              <a:rPr sz="3300" b="1">
+                <a:solidFill>
+                  <a:srgbClr val="252638"/>
+                </a:solidFill>
+                <a:latin typeface="DejaVu Sans"/>
+                <a:ea typeface="DejaVu Sans"/>
+                <a:cs typeface="DejaVu Sans"/>
+              </a:rPr>
+              <a:t>Что завершено и что проверить</a:t>
+            </a:r>
+          </a:p>
+        </p:txBody>
+      </p:sp>
+      <p:sp>
+        <p:nvSpPr>
+          <p:cNvPr id="3" name="page">
+            <a:extLst xmlns:a="http://schemas.openxmlformats.org/drawingml/2006/main">
+              <a:ext uri="{FF2B5EF4-FFF2-40B4-BE49-F238E27FC236}">
+                <a16:creationId xmlns:a16="http://schemas.microsoft.com/office/drawing/2014/main" id="{D16B2D9A-B78F-48EE-9AD9-CDDEB123ECA9}"/>
+              </a:ext>
+            </a:extLst>
+          </p:cNvPr>
+          <p:cNvSpPr>
+            <a:spLocks xmlns:a="http://schemas.openxmlformats.org/drawingml/2006/main" noGrp="1"/>
+          </p:cNvSpPr>
+          <p:nvPr/>
+        </p:nvSpPr>
+        <p:spPr>
+          <a:xfrm xmlns:a="http://schemas.openxmlformats.org/drawingml/2006/main">
+            <a:off x="11049000" y="6286500"/>
+            <a:ext cx="571500" cy="266700"/>
+          </a:xfrm>
+          <a:prstGeom xmlns:a="http://schemas.openxmlformats.org/drawingml/2006/main" prst="rect">
+            <a:avLst/>
+          </a:prstGeom>
+          <a:noFill xmlns:a="http://schemas.openxmlformats.org/drawingml/2006/main"/>
+          <a:ln xmlns:a="http://schemas.openxmlformats.org/drawingml/2006/main" w="0">
+            <a:noFill/>
+            <a:prstDash val="solid"/>
+          </a:ln>
+        </p:spPr>
+        <p:txBody>
+          <a:bodyPr xmlns:a="http://schemas.openxmlformats.org/drawingml/2006/main" anchor="t"/>
+          <a:lstStyle xmlns:a="http://schemas.openxmlformats.org/drawingml/2006/main">
+            <a:defPPr>
+              <a:defRPr sz="1200" b="0">
+                <a:solidFill>
+                  <a:srgbClr val="858393"/>
+                </a:solidFill>
+                <a:latin typeface="DejaVu Sans"/>
+                <a:ea typeface="DejaVu Sans"/>
+                <a:cs typeface="DejaVu Sans"/>
+              </a:defRPr>
+            </a:defPPr>
+            <a:lvl1pPr>
+              <a:buNone/>
+              <a:defRPr sz="1200" b="0">
+                <a:solidFill>
+                  <a:srgbClr val="858393"/>
+                </a:solidFill>
+                <a:latin typeface="DejaVu Sans"/>
+                <a:ea typeface="DejaVu Sans"/>
+                <a:cs typeface="DejaVu Sans"/>
+              </a:defRPr>
+            </a:lvl1pPr>
+            <a:lvl2pPr>
+              <a:buNone/>
+              <a:defRPr sz="1200" b="0">
+                <a:solidFill>
+                  <a:srgbClr val="858393"/>
+                </a:solidFill>
+                <a:latin typeface="DejaVu Sans"/>
+                <a:ea typeface="DejaVu Sans"/>
+                <a:cs typeface="DejaVu Sans"/>
+              </a:defRPr>
+            </a:lvl2pPr>
+            <a:lvl3pPr>
+              <a:buNone/>
+              <a:defRPr sz="1200" b="0">
+                <a:solidFill>
+                  <a:srgbClr val="858393"/>
+                </a:solidFill>
+                <a:latin typeface="DejaVu Sans"/>
+                <a:ea typeface="DejaVu Sans"/>
+                <a:cs typeface="DejaVu Sans"/>
+              </a:defRPr>
+            </a:lvl3pPr>
+            <a:lvl4pPr>
+              <a:buNone/>
+              <a:defRPr sz="1200" b="0">
+                <a:solidFill>
+                  <a:srgbClr val="858393"/>
+                </a:solidFill>
+                <a:latin typeface="DejaVu Sans"/>
+                <a:ea typeface="DejaVu Sans"/>
+                <a:cs typeface="DejaVu Sans"/>
+              </a:defRPr>
+            </a:lvl4pPr>
+            <a:lvl5pPr>
+              <a:buNone/>
+              <a:defRPr sz="1200" b="0">
+                <a:solidFill>
+                  <a:srgbClr val="858393"/>
+                </a:solidFill>
+                <a:latin typeface="DejaVu Sans"/>
+                <a:ea typeface="DejaVu Sans"/>
+                <a:cs typeface="DejaVu Sans"/>
+              </a:defRPr>
+            </a:lvl5pPr>
+            <a:lvl6pPr>
+              <a:buNone/>
+              <a:defRPr sz="1200" b="0">
+                <a:solidFill>
+                  <a:srgbClr val="858393"/>
+                </a:solidFill>
+                <a:latin typeface="DejaVu Sans"/>
+                <a:ea typeface="DejaVu Sans"/>
+                <a:cs typeface="DejaVu Sans"/>
+              </a:defRPr>
+            </a:lvl6pPr>
+            <a:lvl7pPr>
+              <a:buNone/>
+              <a:defRPr sz="1200" b="0">
+                <a:solidFill>
+                  <a:srgbClr val="858393"/>
+                </a:solidFill>
+                <a:latin typeface="DejaVu Sans"/>
+                <a:ea typeface="DejaVu Sans"/>
+                <a:cs typeface="DejaVu Sans"/>
+              </a:defRPr>
+            </a:lvl7pPr>
+            <a:lvl8pPr>
+              <a:buNone/>
+              <a:defRPr sz="1200" b="0">
+                <a:solidFill>
+                  <a:srgbClr val="858393"/>
+                </a:solidFill>
+                <a:latin typeface="DejaVu Sans"/>
+                <a:ea typeface="DejaVu Sans"/>
+                <a:cs typeface="DejaVu Sans"/>
+              </a:defRPr>
+            </a:lvl8pPr>
+            <a:lvl9pPr>
+              <a:buNone/>
+              <a:defRPr sz="1200" b="0">
+                <a:solidFill>
+                  <a:srgbClr val="858393"/>
+                </a:solidFill>
+                <a:latin typeface="DejaVu Sans"/>
+                <a:ea typeface="DejaVu Sans"/>
+                <a:cs typeface="DejaVu Sans"/>
+              </a:defRPr>
+            </a:lvl9pPr>
+          </a:lstStyle>
+          <a:p xmlns:a="http://schemas.openxmlformats.org/drawingml/2006/main">
+            <a:pPr>
+              <a:buNone/>
+              <a:defRPr sz="1200" b="0">
+                <a:solidFill>
+                  <a:srgbClr val="858393"/>
+                </a:solidFill>
+                <a:latin typeface="DejaVu Sans"/>
+                <a:ea typeface="DejaVu Sans"/>
+                <a:cs typeface="DejaVu Sans"/>
+              </a:defRPr>
+            </a:pPr>
+            <a:r>
+              <a:rPr sz="1200" b="0">
+                <a:solidFill>
+                  <a:srgbClr val="858393"/>
+                </a:solidFill>
+                <a:latin typeface="DejaVu Sans"/>
+                <a:ea typeface="DejaVu Sans"/>
+                <a:cs typeface="DejaVu Sans"/>
+              </a:rPr>
+              <a:t>08</a:t>
+            </a:r>
+          </a:p>
+        </p:txBody>
+      </p:sp>
+      <p:sp>
+        <p:nvSpPr>
+          <p:cNvPr id="4" name="past">
+            <a:extLst xmlns:a="http://schemas.openxmlformats.org/drawingml/2006/main">
+              <a:ext uri="{FF2B5EF4-FFF2-40B4-BE49-F238E27FC236}">
+                <a16:creationId xmlns:a16="http://schemas.microsoft.com/office/drawing/2014/main" id="{435726DC-E1F5-4CAA-B236-9EB6A38F701C}"/>
+              </a:ext>
+            </a:extLst>
+          </p:cNvPr>
+          <p:cNvSpPr>
+            <a:spLocks xmlns:a="http://schemas.openxmlformats.org/drawingml/2006/main" noGrp="1"/>
+          </p:cNvSpPr>
+          <p:nvPr/>
+        </p:nvSpPr>
+        <p:spPr>
+          <a:xfrm xmlns:a="http://schemas.openxmlformats.org/drawingml/2006/main">
+            <a:off x="609600" y="2190750"/>
+            <a:ext cx="10096500" cy="476250"/>
+          </a:xfrm>
+          <a:prstGeom xmlns:a="http://schemas.openxmlformats.org/drawingml/2006/main" prst="rect">
+            <a:avLst/>
+          </a:prstGeom>
+          <a:noFill xmlns:a="http://schemas.openxmlformats.org/drawingml/2006/main"/>
+          <a:ln xmlns:a="http://schemas.openxmlformats.org/drawingml/2006/main" w="0">
+            <a:noFill/>
+            <a:prstDash val="solid"/>
+          </a:ln>
+        </p:spPr>
+        <p:txBody>
+          <a:bodyPr xmlns:a="http://schemas.openxmlformats.org/drawingml/2006/main" anchor="t"/>
+          <a:lstStyle xmlns:a="http://schemas.openxmlformats.org/drawingml/2006/main">
+            <a:defPPr>
+              <a:defRPr sz="2250" b="1">
+                <a:solidFill>
+                  <a:srgbClr val="252638"/>
+                </a:solidFill>
+                <a:latin typeface="DejaVu Sans"/>
+                <a:ea typeface="DejaVu Sans"/>
+                <a:cs typeface="DejaVu Sans"/>
+              </a:defRPr>
+            </a:defPPr>
+            <a:lvl1pPr>
+              <a:buNone/>
+              <a:defRPr sz="2250" b="1">
+                <a:solidFill>
+                  <a:srgbClr val="252638"/>
+                </a:solidFill>
+                <a:latin typeface="DejaVu Sans"/>
+                <a:ea typeface="DejaVu Sans"/>
+                <a:cs typeface="DejaVu Sans"/>
+              </a:defRPr>
+            </a:lvl1pPr>
+            <a:lvl2pPr>
+              <a:buNone/>
+              <a:defRPr sz="2250" b="1">
+                <a:solidFill>
+                  <a:srgbClr val="252638"/>
+                </a:solidFill>
+                <a:latin typeface="DejaVu Sans"/>
+                <a:ea typeface="DejaVu Sans"/>
+                <a:cs typeface="DejaVu Sans"/>
+              </a:defRPr>
+            </a:lvl2pPr>
+            <a:lvl3pPr>
+              <a:buNone/>
+              <a:defRPr sz="2250" b="1">
+                <a:solidFill>
+                  <a:srgbClr val="252638"/>
+                </a:solidFill>
+                <a:latin typeface="DejaVu Sans"/>
+                <a:ea typeface="DejaVu Sans"/>
+                <a:cs typeface="DejaVu Sans"/>
+              </a:defRPr>
+            </a:lvl3pPr>
+            <a:lvl4pPr>
+              <a:buNone/>
+              <a:defRPr sz="2250" b="1">
+                <a:solidFill>
+                  <a:srgbClr val="252638"/>
+                </a:solidFill>
+                <a:latin typeface="DejaVu Sans"/>
+                <a:ea typeface="DejaVu Sans"/>
+                <a:cs typeface="DejaVu Sans"/>
+              </a:defRPr>
+            </a:lvl4pPr>
+            <a:lvl5pPr>
+              <a:buNone/>
+              <a:defRPr sz="2250" b="1">
+                <a:solidFill>
+                  <a:srgbClr val="252638"/>
+                </a:solidFill>
+                <a:latin typeface="DejaVu Sans"/>
+                <a:ea typeface="DejaVu Sans"/>
+                <a:cs typeface="DejaVu Sans"/>
+              </a:defRPr>
+            </a:lvl5pPr>
+            <a:lvl6pPr>
+              <a:buNone/>
+              <a:defRPr sz="2250" b="1">
+                <a:solidFill>
+                  <a:srgbClr val="252638"/>
+                </a:solidFill>
+                <a:latin typeface="DejaVu Sans"/>
+                <a:ea typeface="DejaVu Sans"/>
+                <a:cs typeface="DejaVu Sans"/>
+              </a:defRPr>
+            </a:lvl6pPr>
+            <a:lvl7pPr>
+              <a:buNone/>
+              <a:defRPr sz="2250" b="1">
+                <a:solidFill>
+                  <a:srgbClr val="252638"/>
+                </a:solidFill>
+                <a:latin typeface="DejaVu Sans"/>
+                <a:ea typeface="DejaVu Sans"/>
+                <a:cs typeface="DejaVu Sans"/>
+              </a:defRPr>
+            </a:lvl7pPr>
+            <a:lvl8pPr>
+              <a:buNone/>
+              <a:defRPr sz="2250" b="1">
+                <a:solidFill>
+                  <a:srgbClr val="252638"/>
+                </a:solidFill>
+                <a:latin typeface="DejaVu Sans"/>
+                <a:ea typeface="DejaVu Sans"/>
+                <a:cs typeface="DejaVu Sans"/>
+              </a:defRPr>
+            </a:lvl8pPr>
+            <a:lvl9pPr>
+              <a:buNone/>
+              <a:defRPr sz="2250" b="1">
+                <a:solidFill>
+                  <a:srgbClr val="252638"/>
+                </a:solidFill>
+                <a:latin typeface="DejaVu Sans"/>
+                <a:ea typeface="DejaVu Sans"/>
+                <a:cs typeface="DejaVu Sans"/>
+              </a:defRPr>
+            </a:lvl9pPr>
+          </a:lstStyle>
+          <a:p xmlns:a="http://schemas.openxmlformats.org/drawingml/2006/main">
+            <a:pPr>
+              <a:buNone/>
+              <a:defRPr sz="2250" b="1">
+                <a:solidFill>
+                  <a:srgbClr val="252638"/>
+                </a:solidFill>
+                <a:latin typeface="DejaVu Sans"/>
+                <a:ea typeface="DejaVu Sans"/>
+                <a:cs typeface="DejaVu Sans"/>
+              </a:defRPr>
+            </a:pPr>
+            <a:r>
+              <a:rPr sz="2250" b="1">
+                <a:solidFill>
+                  <a:srgbClr val="252638"/>
+                </a:solidFill>
+                <a:latin typeface="DejaVu Sans"/>
+                <a:ea typeface="DejaVu Sans"/>
+                <a:cs typeface="DejaVu Sans"/>
+              </a:rPr>
+              <a:t>Текущий результат</a:t>
+            </a:r>
+          </a:p>
+        </p:txBody>
+      </p:sp>
+      <p:sp>
+        <p:nvSpPr>
+          <p:cNvPr id="5" name="pastbody">
+            <a:extLst xmlns:a="http://schemas.openxmlformats.org/drawingml/2006/main">
+              <a:ext uri="{FF2B5EF4-FFF2-40B4-BE49-F238E27FC236}">
+                <a16:creationId xmlns:a16="http://schemas.microsoft.com/office/drawing/2014/main" id="{B6FECD1A-1DEF-4002-B646-604AFB89F92E}"/>
+              </a:ext>
+            </a:extLst>
+          </p:cNvPr>
+          <p:cNvSpPr>
+            <a:spLocks xmlns:a="http://schemas.openxmlformats.org/drawingml/2006/main" noGrp="1"/>
+          </p:cNvSpPr>
+          <p:nvPr/>
+        </p:nvSpPr>
+        <p:spPr>
+          <a:xfrm xmlns:a="http://schemas.openxmlformats.org/drawingml/2006/main">
+            <a:off x="609600" y="2762250"/>
+            <a:ext cx="10668000" cy="1190625"/>
+          </a:xfrm>
+          <a:prstGeom xmlns:a="http://schemas.openxmlformats.org/drawingml/2006/main" prst="rect">
+            <a:avLst/>
+          </a:prstGeom>
+          <a:noFill xmlns:a="http://schemas.openxmlformats.org/drawingml/2006/main"/>
+          <a:ln xmlns:a="http://schemas.openxmlformats.org/drawingml/2006/main" w="0">
+            <a:noFill/>
+            <a:prstDash val="solid"/>
+          </a:ln>
+        </p:spPr>
+        <p:txBody>
+          <a:bodyPr xmlns:a="http://schemas.openxmlformats.org/drawingml/2006/main" anchor="t"/>
+          <a:lstStyle xmlns:a="http://schemas.openxmlformats.org/drawingml/2006/main">
+            <a:defPPr>
+              <a:defRPr sz="1950" b="0">
+                <a:solidFill>
+                  <a:srgbClr val="777383"/>
+                </a:solidFill>
+                <a:latin typeface="DejaVu Sans"/>
+                <a:ea typeface="DejaVu Sans"/>
+                <a:cs typeface="DejaVu Sans"/>
+              </a:defRPr>
+            </a:defPPr>
+            <a:lvl1pPr>
+              <a:buNone/>
+              <a:defRPr sz="2175" b="0">
+                <a:solidFill>
+                  <a:srgbClr val="777383"/>
+                </a:solidFill>
+                <a:latin typeface="DejaVu Sans"/>
+                <a:ea typeface="DejaVu Sans"/>
+                <a:cs typeface="DejaVu Sans"/>
+              </a:defRPr>
+            </a:lvl1pPr>
+            <a:lvl2pPr>
+              <a:buNone/>
+              <a:defRPr sz="2175" b="0">
+                <a:solidFill>
+                  <a:srgbClr val="777383"/>
+                </a:solidFill>
+                <a:latin typeface="DejaVu Sans"/>
+                <a:ea typeface="DejaVu Sans"/>
+                <a:cs typeface="DejaVu Sans"/>
+              </a:defRPr>
+            </a:lvl2pPr>
+            <a:lvl3pPr>
+              <a:buNone/>
+              <a:defRPr sz="2175" b="0">
+                <a:solidFill>
+                  <a:srgbClr val="777383"/>
+                </a:solidFill>
+                <a:latin typeface="DejaVu Sans"/>
+                <a:ea typeface="DejaVu Sans"/>
+                <a:cs typeface="DejaVu Sans"/>
+              </a:defRPr>
+            </a:lvl3pPr>
+            <a:lvl4pPr>
+              <a:buNone/>
+              <a:defRPr sz="2175" b="0">
+                <a:solidFill>
+                  <a:srgbClr val="777383"/>
+                </a:solidFill>
+                <a:latin typeface="DejaVu Sans"/>
+                <a:ea typeface="DejaVu Sans"/>
+                <a:cs typeface="DejaVu Sans"/>
+              </a:defRPr>
+            </a:lvl4pPr>
+            <a:lvl5pPr>
+              <a:buNone/>
+              <a:defRPr sz="2175" b="0">
+                <a:solidFill>
+                  <a:srgbClr val="777383"/>
+                </a:solidFill>
+                <a:latin typeface="DejaVu Sans"/>
+                <a:ea typeface="DejaVu Sans"/>
+                <a:cs typeface="DejaVu Sans"/>
+              </a:defRPr>
+            </a:lvl5pPr>
+            <a:lvl6pPr>
+              <a:buNone/>
+              <a:defRPr sz="2175" b="0">
+                <a:solidFill>
+                  <a:srgbClr val="777383"/>
+                </a:solidFill>
+                <a:latin typeface="DejaVu Sans"/>
+                <a:ea typeface="DejaVu Sans"/>
+                <a:cs typeface="DejaVu Sans"/>
+              </a:defRPr>
+            </a:lvl6pPr>
+            <a:lvl7pPr>
+              <a:buNone/>
+              <a:defRPr sz="2175" b="0">
+                <a:solidFill>
+                  <a:srgbClr val="777383"/>
+                </a:solidFill>
+                <a:latin typeface="DejaVu Sans"/>
+                <a:ea typeface="DejaVu Sans"/>
+                <a:cs typeface="DejaVu Sans"/>
+              </a:defRPr>
+            </a:lvl7pPr>
+            <a:lvl8pPr>
+              <a:buNone/>
+              <a:defRPr sz="2175" b="0">
+                <a:solidFill>
+                  <a:srgbClr val="777383"/>
+                </a:solidFill>
+                <a:latin typeface="DejaVu Sans"/>
+                <a:ea typeface="DejaVu Sans"/>
+                <a:cs typeface="DejaVu Sans"/>
+              </a:defRPr>
+            </a:lvl8pPr>
+            <a:lvl9pPr>
+              <a:buNone/>
+              <a:defRPr sz="2175" b="0">
+                <a:solidFill>
+                  <a:srgbClr val="777383"/>
+                </a:solidFill>
+                <a:latin typeface="DejaVu Sans"/>
+                <a:ea typeface="DejaVu Sans"/>
+                <a:cs typeface="DejaVu Sans"/>
+              </a:defRPr>
+            </a:lvl9pPr>
+          </a:lstStyle>
+          <a:p xmlns:a="http://schemas.openxmlformats.org/drawingml/2006/main">
+            <a:pPr>
+              <a:buNone/>
+              <a:defRPr sz="2175" b="0">
+                <a:solidFill>
+                  <a:srgbClr val="777383"/>
+                </a:solidFill>
+                <a:latin typeface="DejaVu Sans"/>
+                <a:ea typeface="DejaVu Sans"/>
+                <a:cs typeface="DejaVu Sans"/>
+              </a:defRPr>
+            </a:pPr>
+            <a:r>
+              <a:rPr sz="1950" b="0">
+                <a:solidFill>
+                  <a:srgbClr val="777383"/>
+                </a:solidFill>
+                <a:latin typeface="DejaVu Sans"/>
+                <a:ea typeface="DejaVu Sans"/>
+                <a:cs typeface="DejaVu Sans"/>
+              </a:rPr>
+              <a:t>Есть ТЗ 2.0, HTML-прототип и презентация.</a:t>
+            </a:r>
+          </a:p>
+          <a:p xmlns:a="http://schemas.openxmlformats.org/drawingml/2006/main">
+            <a:pPr>
+              <a:buNone/>
+              <a:defRPr sz="2175" b="0">
+                <a:solidFill>
+                  <a:srgbClr val="777383"/>
+                </a:solidFill>
+                <a:latin typeface="DejaVu Sans"/>
+                <a:ea typeface="DejaVu Sans"/>
+                <a:cs typeface="DejaVu Sans"/>
+              </a:defRPr>
+            </a:pPr>
+            <a:r>
+              <a:rPr sz="1950" b="0">
+                <a:solidFill>
+                  <a:srgbClr val="777383"/>
+                </a:solidFill>
+                <a:latin typeface="DejaVu Sans"/>
+                <a:ea typeface="DejaVu Sans"/>
+                <a:cs typeface="DejaVu Sans"/>
+              </a:rPr>
+              <a:t>В GitHub опубликована история изменений.</a:t>
+            </a:r>
+          </a:p>
+          <a:p xmlns:a="http://schemas.openxmlformats.org/drawingml/2006/main">
+            <a:pPr>
+              <a:buNone/>
+              <a:defRPr sz="2175" b="0">
+                <a:solidFill>
+                  <a:srgbClr val="777383"/>
+                </a:solidFill>
+                <a:latin typeface="DejaVu Sans"/>
+                <a:ea typeface="DejaVu Sans"/>
+                <a:cs typeface="DejaVu Sans"/>
+              </a:defRPr>
+            </a:pPr>
+            <a:r>
+              <a:rPr sz="1950" b="0">
+                <a:solidFill>
+                  <a:srgbClr val="777383"/>
+                </a:solidFill>
+                <a:latin typeface="DejaVu Sans"/>
+                <a:ea typeface="DejaVu Sans"/>
+                <a:cs typeface="DejaVu Sans"/>
+              </a:rPr>
+              <a:t>В Trello назначены участники и связаны проверки.</a:t>
+            </a:r>
+          </a:p>
+        </p:txBody>
+      </p:sp>
+      <p:sp>
+        <p:nvSpPr>
+          <p:cNvPr id="6" name="gate">
+            <a:extLst xmlns:a="http://schemas.openxmlformats.org/drawingml/2006/main">
+              <a:ext uri="{FF2B5EF4-FFF2-40B4-BE49-F238E27FC236}">
+                <a16:creationId xmlns:a16="http://schemas.microsoft.com/office/drawing/2014/main" id="{F3265356-DD03-4E73-8B7F-BBE0E30173BD}"/>
+              </a:ext>
+            </a:extLst>
+          </p:cNvPr>
+          <p:cNvSpPr>
+            <a:spLocks xmlns:a="http://schemas.openxmlformats.org/drawingml/2006/main" noGrp="1"/>
+          </p:cNvSpPr>
+          <p:nvPr/>
+        </p:nvSpPr>
+        <p:spPr>
+          <a:xfrm xmlns:a="http://schemas.openxmlformats.org/drawingml/2006/main">
+            <a:off x="609600" y="4333875"/>
+            <a:ext cx="10477500" cy="476250"/>
+          </a:xfrm>
+          <a:prstGeom xmlns:a="http://schemas.openxmlformats.org/drawingml/2006/main" prst="rect">
+            <a:avLst/>
+          </a:prstGeom>
+          <a:noFill xmlns:a="http://schemas.openxmlformats.org/drawingml/2006/main"/>
+          <a:ln xmlns:a="http://schemas.openxmlformats.org/drawingml/2006/main" w="0">
+            <a:noFill/>
+            <a:prstDash val="solid"/>
+          </a:ln>
+        </p:spPr>
+        <p:txBody>
+          <a:bodyPr xmlns:a="http://schemas.openxmlformats.org/drawingml/2006/main" anchor="t"/>
+          <a:lstStyle xmlns:a="http://schemas.openxmlformats.org/drawingml/2006/main">
+            <a:defPPr>
+              <a:defRPr sz="2250" b="1">
+                <a:solidFill>
+                  <a:srgbClr val="6145E6"/>
+                </a:solidFill>
+                <a:latin typeface="DejaVu Sans"/>
+                <a:ea typeface="DejaVu Sans"/>
+                <a:cs typeface="DejaVu Sans"/>
+              </a:defRPr>
+            </a:defPPr>
+            <a:lvl1pPr>
+              <a:buNone/>
+              <a:defRPr sz="2250" b="1">
+                <a:solidFill>
+                  <a:srgbClr val="6145E6"/>
+                </a:solidFill>
+                <a:latin typeface="DejaVu Sans"/>
+                <a:ea typeface="DejaVu Sans"/>
+                <a:cs typeface="DejaVu Sans"/>
+              </a:defRPr>
+            </a:lvl1pPr>
+            <a:lvl2pPr>
+              <a:buNone/>
+              <a:defRPr sz="2250" b="1">
+                <a:solidFill>
+                  <a:srgbClr val="6145E6"/>
+                </a:solidFill>
+                <a:latin typeface="DejaVu Sans"/>
+                <a:ea typeface="DejaVu Sans"/>
+                <a:cs typeface="DejaVu Sans"/>
+              </a:defRPr>
+            </a:lvl2pPr>
+            <a:lvl3pPr>
+              <a:buNone/>
+              <a:defRPr sz="2250" b="1">
+                <a:solidFill>
+                  <a:srgbClr val="6145E6"/>
+                </a:solidFill>
+                <a:latin typeface="DejaVu Sans"/>
+                <a:ea typeface="DejaVu Sans"/>
+                <a:cs typeface="DejaVu Sans"/>
+              </a:defRPr>
+            </a:lvl3pPr>
+            <a:lvl4pPr>
+              <a:buNone/>
+              <a:defRPr sz="2250" b="1">
+                <a:solidFill>
+                  <a:srgbClr val="6145E6"/>
+                </a:solidFill>
+                <a:latin typeface="DejaVu Sans"/>
+                <a:ea typeface="DejaVu Sans"/>
+                <a:cs typeface="DejaVu Sans"/>
+              </a:defRPr>
+            </a:lvl4pPr>
+            <a:lvl5pPr>
+              <a:buNone/>
+              <a:defRPr sz="2250" b="1">
+                <a:solidFill>
+                  <a:srgbClr val="6145E6"/>
+                </a:solidFill>
+                <a:latin typeface="DejaVu Sans"/>
+                <a:ea typeface="DejaVu Sans"/>
+                <a:cs typeface="DejaVu Sans"/>
+              </a:defRPr>
+            </a:lvl5pPr>
+            <a:lvl6pPr>
+              <a:buNone/>
+              <a:defRPr sz="2250" b="1">
+                <a:solidFill>
+                  <a:srgbClr val="6145E6"/>
+                </a:solidFill>
+                <a:latin typeface="DejaVu Sans"/>
+                <a:ea typeface="DejaVu Sans"/>
+                <a:cs typeface="DejaVu Sans"/>
+              </a:defRPr>
+            </a:lvl6pPr>
+            <a:lvl7pPr>
+              <a:buNone/>
+              <a:defRPr sz="2250" b="1">
+                <a:solidFill>
+                  <a:srgbClr val="6145E6"/>
+                </a:solidFill>
+                <a:latin typeface="DejaVu Sans"/>
+                <a:ea typeface="DejaVu Sans"/>
+                <a:cs typeface="DejaVu Sans"/>
+              </a:defRPr>
+            </a:lvl7pPr>
+            <a:lvl8pPr>
+              <a:buNone/>
+              <a:defRPr sz="2250" b="1">
+                <a:solidFill>
+                  <a:srgbClr val="6145E6"/>
+                </a:solidFill>
+                <a:latin typeface="DejaVu Sans"/>
+                <a:ea typeface="DejaVu Sans"/>
+                <a:cs typeface="DejaVu Sans"/>
+              </a:defRPr>
+            </a:lvl8pPr>
+            <a:lvl9pPr>
+              <a:buNone/>
+              <a:defRPr sz="2250" b="1">
+                <a:solidFill>
+                  <a:srgbClr val="6145E6"/>
+                </a:solidFill>
+                <a:latin typeface="DejaVu Sans"/>
+                <a:ea typeface="DejaVu Sans"/>
+                <a:cs typeface="DejaVu Sans"/>
+              </a:defRPr>
+            </a:lvl9pPr>
+          </a:lstStyle>
+          <a:p xmlns:a="http://schemas.openxmlformats.org/drawingml/2006/main">
+            <a:pPr>
+              <a:buNone/>
+              <a:defRPr sz="2250" b="1">
+                <a:solidFill>
+                  <a:srgbClr val="6145E6"/>
+                </a:solidFill>
+                <a:latin typeface="DejaVu Sans"/>
+                <a:ea typeface="DejaVu Sans"/>
+                <a:cs typeface="DejaVu Sans"/>
+              </a:defRPr>
+            </a:pPr>
+            <a:r>
+              <a:rPr sz="2250" b="1">
+                <a:solidFill>
+                  <a:srgbClr val="6145E6"/>
+                </a:solidFill>
+                <a:latin typeface="DejaVu Sans"/>
+                <a:ea typeface="DejaVu Sans"/>
+                <a:cs typeface="DejaVu Sans"/>
+              </a:rPr>
+              <a:t>Следующие действия команды</a:t>
+            </a:r>
+          </a:p>
+        </p:txBody>
+      </p:sp>
+      <p:sp>
+        <p:nvSpPr>
+          <p:cNvPr id="7" name="gatebody">
+            <a:extLst xmlns:a="http://schemas.openxmlformats.org/drawingml/2006/main">
+              <a:ext uri="{FF2B5EF4-FFF2-40B4-BE49-F238E27FC236}">
+                <a16:creationId xmlns:a16="http://schemas.microsoft.com/office/drawing/2014/main" id="{80FFBCC7-B652-43E3-87AD-5BDF1725F020}"/>
+              </a:ext>
+            </a:extLst>
+          </p:cNvPr>
+          <p:cNvSpPr>
+            <a:spLocks xmlns:a="http://schemas.openxmlformats.org/drawingml/2006/main" noGrp="1"/>
+          </p:cNvSpPr>
+          <p:nvPr/>
+        </p:nvSpPr>
+        <p:spPr>
+          <a:xfrm xmlns:a="http://schemas.openxmlformats.org/drawingml/2006/main">
+            <a:off x="609600" y="4905375"/>
+            <a:ext cx="10477500" cy="1190625"/>
+          </a:xfrm>
+          <a:prstGeom xmlns:a="http://schemas.openxmlformats.org/drawingml/2006/main" prst="rect">
+            <a:avLst/>
+          </a:prstGeom>
+          <a:noFill xmlns:a="http://schemas.openxmlformats.org/drawingml/2006/main"/>
+          <a:ln xmlns:a="http://schemas.openxmlformats.org/drawingml/2006/main" w="0">
+            <a:noFill/>
+            <a:prstDash val="solid"/>
+          </a:ln>
+        </p:spPr>
+        <p:txBody>
+          <a:bodyPr xmlns:a="http://schemas.openxmlformats.org/drawingml/2006/main" anchor="t"/>
+          <a:lstStyle xmlns:a="http://schemas.openxmlformats.org/drawingml/2006/main">
+            <a:defPPr>
+              <a:defRPr sz="1950" b="0">
+                <a:solidFill>
+                  <a:srgbClr val="252638"/>
+                </a:solidFill>
+                <a:latin typeface="DejaVu Sans"/>
+                <a:ea typeface="DejaVu Sans"/>
+                <a:cs typeface="DejaVu Sans"/>
+              </a:defRPr>
+            </a:defPPr>
+            <a:lvl1pPr>
+              <a:buNone/>
+              <a:defRPr sz="2175" b="0">
+                <a:solidFill>
+                  <a:srgbClr val="252638"/>
+                </a:solidFill>
+                <a:latin typeface="DejaVu Sans"/>
+                <a:ea typeface="DejaVu Sans"/>
+                <a:cs typeface="DejaVu Sans"/>
+              </a:defRPr>
+            </a:lvl1pPr>
+            <a:lvl2pPr>
+              <a:buNone/>
+              <a:defRPr sz="2175" b="0">
+                <a:solidFill>
+                  <a:srgbClr val="252638"/>
+                </a:solidFill>
+                <a:latin typeface="DejaVu Sans"/>
+                <a:ea typeface="DejaVu Sans"/>
+                <a:cs typeface="DejaVu Sans"/>
+              </a:defRPr>
+            </a:lvl2pPr>
+            <a:lvl3pPr>
+              <a:buNone/>
+              <a:defRPr sz="2175" b="0">
+                <a:solidFill>
+                  <a:srgbClr val="252638"/>
+                </a:solidFill>
+                <a:latin typeface="DejaVu Sans"/>
+                <a:ea typeface="DejaVu Sans"/>
+                <a:cs typeface="DejaVu Sans"/>
+              </a:defRPr>
+            </a:lvl3pPr>
+            <a:lvl4pPr>
+              <a:buNone/>
+              <a:defRPr sz="2175" b="0">
+                <a:solidFill>
+                  <a:srgbClr val="252638"/>
+                </a:solidFill>
+                <a:latin typeface="DejaVu Sans"/>
+                <a:ea typeface="DejaVu Sans"/>
+                <a:cs typeface="DejaVu Sans"/>
+              </a:defRPr>
+            </a:lvl4pPr>
+            <a:lvl5pPr>
+              <a:buNone/>
+              <a:defRPr sz="2175" b="0">
+                <a:solidFill>
+                  <a:srgbClr val="252638"/>
+                </a:solidFill>
+                <a:latin typeface="DejaVu Sans"/>
+                <a:ea typeface="DejaVu Sans"/>
+                <a:cs typeface="DejaVu Sans"/>
+              </a:defRPr>
+            </a:lvl5pPr>
+            <a:lvl6pPr>
+              <a:buNone/>
+              <a:defRPr sz="2175" b="0">
+                <a:solidFill>
+                  <a:srgbClr val="252638"/>
+                </a:solidFill>
+                <a:latin typeface="DejaVu Sans"/>
+                <a:ea typeface="DejaVu Sans"/>
+                <a:cs typeface="DejaVu Sans"/>
+              </a:defRPr>
+            </a:lvl6pPr>
+            <a:lvl7pPr>
+              <a:buNone/>
+              <a:defRPr sz="2175" b="0">
+                <a:solidFill>
+                  <a:srgbClr val="252638"/>
+                </a:solidFill>
+                <a:latin typeface="DejaVu Sans"/>
+                <a:ea typeface="DejaVu Sans"/>
+                <a:cs typeface="DejaVu Sans"/>
+              </a:defRPr>
+            </a:lvl7pPr>
+            <a:lvl8pPr>
+              <a:buNone/>
+              <a:defRPr sz="2175" b="0">
+                <a:solidFill>
+                  <a:srgbClr val="252638"/>
+                </a:solidFill>
+                <a:latin typeface="DejaVu Sans"/>
+                <a:ea typeface="DejaVu Sans"/>
+                <a:cs typeface="DejaVu Sans"/>
+              </a:defRPr>
+            </a:lvl8pPr>
+            <a:lvl9pPr>
+              <a:buNone/>
+              <a:defRPr sz="2175" b="0">
+                <a:solidFill>
+                  <a:srgbClr val="252638"/>
+                </a:solidFill>
+                <a:latin typeface="DejaVu Sans"/>
+                <a:ea typeface="DejaVu Sans"/>
+                <a:cs typeface="DejaVu Sans"/>
+              </a:defRPr>
+            </a:lvl9pPr>
+          </a:lstStyle>
+          <a:p xmlns:a="http://schemas.openxmlformats.org/drawingml/2006/main">
+            <a:pPr>
+              <a:buNone/>
+              <a:defRPr sz="2175" b="0">
+                <a:solidFill>
+                  <a:srgbClr val="252638"/>
+                </a:solidFill>
+                <a:latin typeface="DejaVu Sans"/>
+                <a:ea typeface="DejaVu Sans"/>
+                <a:cs typeface="DejaVu Sans"/>
+              </a:defRPr>
+            </a:pPr>
+            <a:r>
+              <a:rPr sz="1950" b="0">
+                <a:solidFill>
+                  <a:srgbClr val="252638"/>
+                </a:solidFill>
+                <a:latin typeface="DejaVu Sans"/>
+                <a:ea typeface="DejaVu Sans"/>
+                <a:cs typeface="DejaVu Sans"/>
+              </a:rPr>
+              <a:t>Станислав проверяет сайт и фиксирует результаты.</a:t>
+            </a:r>
+          </a:p>
+          <a:p xmlns:a="http://schemas.openxmlformats.org/drawingml/2006/main">
+            <a:pPr>
+              <a:buNone/>
+              <a:defRPr sz="2175" b="0">
+                <a:solidFill>
+                  <a:srgbClr val="252638"/>
+                </a:solidFill>
+                <a:latin typeface="DejaVu Sans"/>
+                <a:ea typeface="DejaVu Sans"/>
+                <a:cs typeface="DejaVu Sans"/>
+              </a:defRPr>
+            </a:pPr>
+            <a:r>
+              <a:rPr sz="1950" b="0">
+                <a:solidFill>
+                  <a:srgbClr val="252638"/>
+                </a:solidFill>
+                <a:latin typeface="DejaVu Sans"/>
+                <a:ea typeface="DejaVu Sans"/>
+                <a:cs typeface="DejaVu Sans"/>
+              </a:rPr>
+              <a:t>Команда согласует ТЗ и уточняет недельный план.</a:t>
+            </a:r>
+          </a:p>
+          <a:p xmlns:a="http://schemas.openxmlformats.org/drawingml/2006/main">
+            <a:pPr>
+              <a:buNone/>
+              <a:defRPr sz="2175" b="0">
+                <a:solidFill>
+                  <a:srgbClr val="252638"/>
+                </a:solidFill>
+                <a:latin typeface="DejaVu Sans"/>
+                <a:ea typeface="DejaVu Sans"/>
+                <a:cs typeface="DejaVu Sans"/>
+              </a:defRPr>
+            </a:pPr>
+            <a:r>
+              <a:rPr sz="1950" b="0">
+                <a:solidFill>
+                  <a:srgbClr val="252638"/>
+                </a:solidFill>
+                <a:latin typeface="DejaVu Sans"/>
+                <a:ea typeface="DejaVu Sans"/>
+                <a:cs typeface="DejaVu Sans"/>
+              </a:rPr>
+              <a:t>После приёмки прототипа начинается работа над backend.</a:t>
             </a:r>
           </a:p>
         </p:txBody>
